--- a/part2/Презентация.pptx
+++ b/part2/Презентация.pptx
@@ -5,10 +5,10 @@
     <p:sldMasterId id="2147483672" r:id="rId1"/>
   </p:sldMasterIdLst>
   <p:notesMasterIdLst>
-    <p:notesMasterId r:id="rId15"/>
+    <p:notesMasterId r:id="rId17"/>
   </p:notesMasterIdLst>
   <p:handoutMasterIdLst>
-    <p:handoutMasterId r:id="rId16"/>
+    <p:handoutMasterId r:id="rId18"/>
   </p:handoutMasterIdLst>
   <p:sldIdLst>
     <p:sldId id="256" r:id="rId2"/>
@@ -19,11 +19,13 @@
     <p:sldId id="339" r:id="rId7"/>
     <p:sldId id="356" r:id="rId8"/>
     <p:sldId id="341" r:id="rId9"/>
-    <p:sldId id="343" r:id="rId10"/>
+    <p:sldId id="357" r:id="rId10"/>
     <p:sldId id="353" r:id="rId11"/>
-    <p:sldId id="354" r:id="rId12"/>
-    <p:sldId id="344" r:id="rId13"/>
-    <p:sldId id="355" r:id="rId14"/>
+    <p:sldId id="358" r:id="rId12"/>
+    <p:sldId id="354" r:id="rId13"/>
+    <p:sldId id="359" r:id="rId14"/>
+    <p:sldId id="344" r:id="rId15"/>
+    <p:sldId id="355" r:id="rId16"/>
   </p:sldIdLst>
   <p:sldSz cx="12192000" cy="6858000"/>
   <p:notesSz cx="6858000" cy="9144000"/>
@@ -293,7 +295,7 @@
               <a:pPr>
                 <a:defRPr/>
               </a:pPr>
-              <a:t>30.05.2026</a:t>
+              <a:t>12.06.2026</a:t>
             </a:fld>
             <a:endParaRPr lang="ru-RU"/>
           </a:p>
@@ -534,7 +536,7 @@
               <a:pPr>
                 <a:defRPr/>
               </a:pPr>
-              <a:t>30.05.2026</a:t>
+              <a:t>12.06.2026</a:t>
             </a:fld>
             <a:endParaRPr lang="ru-RU"/>
           </a:p>
@@ -3604,7 +3606,7 @@
         </p:nvSpPr>
         <p:spPr>
           <a:xfrm>
-            <a:off x="3719736" y="2782618"/>
+            <a:off x="4288383" y="2756392"/>
             <a:ext cx="6853733" cy="523874"/>
           </a:xfrm>
         </p:spPr>
@@ -5023,7 +5025,7 @@
         </p:nvSpPr>
         <p:spPr bwMode="auto">
           <a:xfrm>
-            <a:off x="3496468" y="64299"/>
+            <a:off x="3976141" y="141310"/>
             <a:ext cx="7165975" cy="796553"/>
           </a:xfrm>
           <a:prstGeom prst="rect">
@@ -5278,7 +5280,7 @@
         </p:nvSpPr>
         <p:spPr bwMode="auto">
           <a:xfrm>
-            <a:off x="3559534" y="881524"/>
+            <a:off x="4132261" y="969963"/>
             <a:ext cx="7165975" cy="523875"/>
           </a:xfrm>
           <a:prstGeom prst="rect">
@@ -5515,7 +5517,7 @@
         </p:nvSpPr>
         <p:spPr bwMode="auto">
           <a:xfrm>
-            <a:off x="4583832" y="3377686"/>
+            <a:off x="5156558" y="3240992"/>
             <a:ext cx="5117380" cy="673486"/>
           </a:xfrm>
           <a:prstGeom prst="rect">
@@ -5989,32 +5991,9 @@
               <a:defRPr/>
             </a:pPr>
             <a:r>
-              <a:rPr lang="en-US" sz="3200" dirty="0">
-                <a:solidFill>
-                  <a:srgbClr val="FF0000"/>
-                </a:solidFill>
-                <a:highlight>
-                  <a:srgbClr val="FFFF00"/>
-                </a:highlight>
-                <a:latin typeface="Times New Roman"/>
-                <a:cs typeface="Times New Roman"/>
-              </a:rPr>
-              <a:t>TODO </a:t>
-            </a:r>
-            <a:r>
-              <a:rPr lang="ru-RU" sz="3200" dirty="0">
-                <a:solidFill>
-                  <a:srgbClr val="FF0000"/>
-                </a:solidFill>
-                <a:highlight>
-                  <a:srgbClr val="FFFF00"/>
-                </a:highlight>
-                <a:latin typeface="Times New Roman"/>
-                <a:cs typeface="Times New Roman"/>
-              </a:rPr>
-              <a:t>ГЛАВА 2</a:t>
-            </a:r>
-            <a:endParaRPr lang="ru-RU" b="1" dirty="0"/>
+              <a:rPr lang="ru-RU" b="1" dirty="0"/>
+              <a:t>Реализация опытного образца</a:t>
+            </a:r>
           </a:p>
         </p:txBody>
       </p:sp>
@@ -6257,6 +6236,43 @@
                 <a:srgbClr val="FFFFFF"/>
               </a:solidFill>
             </a:endParaRPr>
+          </a:p>
+        </p:txBody>
+      </p:sp>
+      <p:sp>
+        <p:nvSpPr>
+          <p:cNvPr id="3" name="TextBox 2">
+            <a:extLst>
+              <a:ext uri="{FF2B5EF4-FFF2-40B4-BE49-F238E27FC236}">
+                <a16:creationId xmlns:a16="http://schemas.microsoft.com/office/drawing/2014/main" id="{98C5BA7A-5E95-E9A1-CE0C-432C76688F06}"/>
+              </a:ext>
+            </a:extLst>
+          </p:cNvPr>
+          <p:cNvSpPr txBox="1"/>
+          <p:nvPr/>
+        </p:nvSpPr>
+        <p:spPr>
+          <a:xfrm>
+            <a:off x="3719736" y="6046192"/>
+            <a:ext cx="4521460" cy="307777"/>
+          </a:xfrm>
+          <a:prstGeom prst="rect">
+            <a:avLst/>
+          </a:prstGeom>
+          <a:noFill/>
+        </p:spPr>
+        <p:txBody>
+          <a:bodyPr wrap="square" rtlCol="0">
+            <a:spAutoFit/>
+          </a:bodyPr>
+          <a:lstStyle/>
+          <a:p>
+            <a:r>
+              <a:rPr lang="ru-RU" sz="1400" dirty="0">
+                <a:latin typeface="+mn-lt"/>
+              </a:rPr>
+              <a:t>Рисунок 3 – Блок-схема работы агента опытного образца</a:t>
+            </a:r>
           </a:p>
         </p:txBody>
       </p:sp>
@@ -6323,32 +6339,9 @@
               <a:defRPr/>
             </a:pPr>
             <a:r>
-              <a:rPr lang="en-US" sz="3200" dirty="0">
-                <a:solidFill>
-                  <a:srgbClr val="FF0000"/>
-                </a:solidFill>
-                <a:highlight>
-                  <a:srgbClr val="FFFF00"/>
-                </a:highlight>
-                <a:latin typeface="Times New Roman"/>
-                <a:cs typeface="Times New Roman"/>
-              </a:rPr>
-              <a:t>TODO </a:t>
-            </a:r>
-            <a:r>
-              <a:rPr lang="ru-RU" sz="3200" dirty="0">
-                <a:solidFill>
-                  <a:srgbClr val="FF0000"/>
-                </a:solidFill>
-                <a:highlight>
-                  <a:srgbClr val="FFFF00"/>
-                </a:highlight>
-                <a:latin typeface="Times New Roman"/>
-                <a:cs typeface="Times New Roman"/>
-              </a:rPr>
-              <a:t>ГЛАВА 3</a:t>
-            </a:r>
-            <a:endParaRPr lang="ru-RU" b="1" dirty="0"/>
+              <a:rPr lang="ru-RU" b="1" dirty="0"/>
+              <a:t>Реализация опытного образца</a:t>
+            </a:r>
           </a:p>
         </p:txBody>
       </p:sp>
@@ -6594,6 +6587,527 @@
           </a:p>
         </p:txBody>
       </p:sp>
+      <p:sp>
+        <p:nvSpPr>
+          <p:cNvPr id="3" name="TextBox 2">
+            <a:extLst>
+              <a:ext uri="{FF2B5EF4-FFF2-40B4-BE49-F238E27FC236}">
+                <a16:creationId xmlns:a16="http://schemas.microsoft.com/office/drawing/2014/main" id="{98C5BA7A-5E95-E9A1-CE0C-432C76688F06}"/>
+              </a:ext>
+            </a:extLst>
+          </p:cNvPr>
+          <p:cNvSpPr txBox="1"/>
+          <p:nvPr/>
+        </p:nvSpPr>
+        <p:spPr>
+          <a:xfrm>
+            <a:off x="4223792" y="5301208"/>
+            <a:ext cx="4521460" cy="307777"/>
+          </a:xfrm>
+          <a:prstGeom prst="rect">
+            <a:avLst/>
+          </a:prstGeom>
+          <a:noFill/>
+        </p:spPr>
+        <p:txBody>
+          <a:bodyPr wrap="square" rtlCol="0">
+            <a:spAutoFit/>
+          </a:bodyPr>
+          <a:lstStyle/>
+          <a:p>
+            <a:r>
+              <a:rPr lang="ru-RU" sz="1400" dirty="0">
+                <a:latin typeface="+mn-lt"/>
+              </a:rPr>
+              <a:t>А ещё тут будет формат вывода</a:t>
+            </a:r>
+          </a:p>
+        </p:txBody>
+      </p:sp>
+      <p:sp>
+        <p:nvSpPr>
+          <p:cNvPr id="4" name="TextBox 3">
+            <a:extLst>
+              <a:ext uri="{FF2B5EF4-FFF2-40B4-BE49-F238E27FC236}">
+                <a16:creationId xmlns:a16="http://schemas.microsoft.com/office/drawing/2014/main" id="{A744DB5E-5E2E-A79F-635E-22A7881E6F84}"/>
+              </a:ext>
+            </a:extLst>
+          </p:cNvPr>
+          <p:cNvSpPr txBox="1"/>
+          <p:nvPr/>
+        </p:nvSpPr>
+        <p:spPr>
+          <a:xfrm>
+            <a:off x="919808" y="4085456"/>
+            <a:ext cx="4521460" cy="307777"/>
+          </a:xfrm>
+          <a:prstGeom prst="rect">
+            <a:avLst/>
+          </a:prstGeom>
+          <a:noFill/>
+        </p:spPr>
+        <p:txBody>
+          <a:bodyPr wrap="square" rtlCol="0">
+            <a:spAutoFit/>
+          </a:bodyPr>
+          <a:lstStyle/>
+          <a:p>
+            <a:r>
+              <a:rPr lang="ru-RU" sz="1400" dirty="0">
+                <a:latin typeface="+mn-lt"/>
+              </a:rPr>
+              <a:t>Вот тут будут какие-нибудь листинги кода?????</a:t>
+            </a:r>
+          </a:p>
+        </p:txBody>
+      </p:sp>
+    </p:spTree>
+    <p:extLst>
+      <p:ext uri="{BB962C8B-B14F-4D97-AF65-F5344CB8AC3E}">
+        <p14:creationId xmlns:p14="http://schemas.microsoft.com/office/powerpoint/2010/main" val="4099589532"/>
+      </p:ext>
+    </p:extLst>
+  </p:cSld>
+  <p:clrMapOvr>
+    <a:masterClrMapping/>
+  </p:clrMapOvr>
+</p:sld>
+</file>
+
+<file path=ppt/slides/slide12.xml><?xml version="1.0" encoding="utf-8"?>
+<p:sld xmlns:a="http://schemas.openxmlformats.org/drawingml/2006/main" xmlns:r="http://schemas.openxmlformats.org/officeDocument/2006/relationships" xmlns:p="http://schemas.openxmlformats.org/presentationml/2006/main">
+  <p:cSld>
+    <p:spTree>
+      <p:nvGrpSpPr>
+        <p:cNvPr id="1" name=""/>
+        <p:cNvGrpSpPr/>
+        <p:nvPr/>
+      </p:nvGrpSpPr>
+      <p:grpSpPr>
+        <a:xfrm>
+          <a:off x="0" y="0"/>
+          <a:ext cx="0" cy="0"/>
+          <a:chOff x="0" y="0"/>
+          <a:chExt cx="0" cy="0"/>
+        </a:xfrm>
+      </p:grpSpPr>
+      <p:sp>
+        <p:nvSpPr>
+          <p:cNvPr id="2" name="Заголовок 1">
+            <a:extLst>
+              <a:ext uri="{FF2B5EF4-FFF2-40B4-BE49-F238E27FC236}">
+                <a16:creationId xmlns:a16="http://schemas.microsoft.com/office/drawing/2014/main" id="{3B33D82E-F63A-5021-2B09-B2A66B267EDB}"/>
+              </a:ext>
+            </a:extLst>
+          </p:cNvPr>
+          <p:cNvSpPr>
+            <a:spLocks noGrp="1"/>
+          </p:cNvSpPr>
+          <p:nvPr>
+            <p:ph type="title"/>
+          </p:nvPr>
+        </p:nvSpPr>
+        <p:spPr>
+          <a:xfrm>
+            <a:off x="1410308" y="188640"/>
+            <a:ext cx="9371384" cy="725487"/>
+          </a:xfrm>
+        </p:spPr>
+        <p:txBody>
+          <a:bodyPr>
+            <a:normAutofit fontScale="90000"/>
+          </a:bodyPr>
+          <a:lstStyle/>
+          <a:p>
+            <a:pPr algn="ctr" eaLnBrk="1" fontAlgn="auto" hangingPunct="1">
+              <a:spcAft>
+                <a:spcPts val="0"/>
+              </a:spcAft>
+              <a:defRPr/>
+            </a:pPr>
+            <a:r>
+              <a:rPr lang="ru-RU" b="1" dirty="0"/>
+              <a:t>Проверка опытного образца на модельных сценариях</a:t>
+            </a:r>
+          </a:p>
+        </p:txBody>
+      </p:sp>
+      <p:sp>
+        <p:nvSpPr>
+          <p:cNvPr id="17411" name="Номер слайда 3">
+            <a:extLst>
+              <a:ext uri="{FF2B5EF4-FFF2-40B4-BE49-F238E27FC236}">
+                <a16:creationId xmlns:a16="http://schemas.microsoft.com/office/drawing/2014/main" id="{9128E344-CB6D-30B1-5D0C-2C232C7371E1}"/>
+              </a:ext>
+            </a:extLst>
+          </p:cNvPr>
+          <p:cNvSpPr>
+            <a:spLocks noGrp="1"/>
+          </p:cNvSpPr>
+          <p:nvPr>
+            <p:ph type="sldNum" sz="quarter" idx="10"/>
+          </p:nvPr>
+        </p:nvSpPr>
+        <p:spPr bwMode="auto">
+          <a:noFill/>
+          <a:extLst>
+            <a:ext uri="{909E8E84-426E-40DD-AFC4-6F175D3DCCD1}">
+              <a14:hiddenFill xmlns:a14="http://schemas.microsoft.com/office/drawing/2010/main">
+                <a:solidFill>
+                  <a:srgbClr val="FFFFFF"/>
+                </a:solidFill>
+              </a14:hiddenFill>
+            </a:ext>
+            <a:ext uri="{91240B29-F687-4F45-9708-019B960494DF}">
+              <a14:hiddenLine xmlns:a14="http://schemas.microsoft.com/office/drawing/2010/main" w="9525">
+                <a:solidFill>
+                  <a:srgbClr val="000000"/>
+                </a:solidFill>
+                <a:miter lim="800000"/>
+                <a:headEnd/>
+                <a:tailEnd/>
+              </a14:hiddenLine>
+            </a:ext>
+          </a:extLst>
+        </p:spPr>
+        <p:txBody>
+          <a:bodyPr/>
+          <a:lstStyle>
+            <a:lvl1pPr>
+              <a:spcBef>
+                <a:spcPts val="600"/>
+              </a:spcBef>
+              <a:buClr>
+                <a:schemeClr val="accent1"/>
+              </a:buClr>
+              <a:buSzPct val="70000"/>
+              <a:buFont typeface="Wingdings" pitchFamily="2" charset="2"/>
+              <a:buChar char=""/>
+              <a:defRPr sz="2400">
+                <a:solidFill>
+                  <a:schemeClr val="tx1"/>
+                </a:solidFill>
+                <a:latin typeface="Times New Roman" panose="02020603050405020304" pitchFamily="18" charset="0"/>
+              </a:defRPr>
+            </a:lvl1pPr>
+            <a:lvl2pPr marL="742950" indent="-285750">
+              <a:spcBef>
+                <a:spcPct val="20000"/>
+              </a:spcBef>
+              <a:buClr>
+                <a:schemeClr val="accent1"/>
+              </a:buClr>
+              <a:buSzPct val="80000"/>
+              <a:buFont typeface="Wingdings 2" pitchFamily="2" charset="2"/>
+              <a:buChar char=""/>
+              <a:defRPr sz="2100">
+                <a:solidFill>
+                  <a:schemeClr val="tx1"/>
+                </a:solidFill>
+                <a:latin typeface="Times New Roman" panose="02020603050405020304" pitchFamily="18" charset="0"/>
+              </a:defRPr>
+            </a:lvl2pPr>
+            <a:lvl3pPr marL="1143000" indent="-228600">
+              <a:spcBef>
+                <a:spcPct val="20000"/>
+              </a:spcBef>
+              <a:buClr>
+                <a:srgbClr val="4471A6"/>
+              </a:buClr>
+              <a:buSzPct val="60000"/>
+              <a:buFont typeface="Wingdings" pitchFamily="2" charset="2"/>
+              <a:buChar char=""/>
+              <a:defRPr sz="2400">
+                <a:solidFill>
+                  <a:schemeClr val="tx1"/>
+                </a:solidFill>
+                <a:latin typeface="Times New Roman" panose="02020603050405020304" pitchFamily="18" charset="0"/>
+              </a:defRPr>
+            </a:lvl3pPr>
+            <a:lvl4pPr marL="1600200" indent="-228600">
+              <a:spcBef>
+                <a:spcPct val="20000"/>
+              </a:spcBef>
+              <a:buClr>
+                <a:srgbClr val="B2C1DB"/>
+              </a:buClr>
+              <a:buSzPct val="60000"/>
+              <a:buFont typeface="Wingdings" pitchFamily="2" charset="2"/>
+              <a:buChar char=""/>
+              <a:defRPr sz="2000">
+                <a:solidFill>
+                  <a:schemeClr val="tx1"/>
+                </a:solidFill>
+                <a:latin typeface="Times New Roman" panose="02020603050405020304" pitchFamily="18" charset="0"/>
+              </a:defRPr>
+            </a:lvl4pPr>
+            <a:lvl5pPr marL="2057400" indent="-228600">
+              <a:spcBef>
+                <a:spcPct val="20000"/>
+              </a:spcBef>
+              <a:buClr>
+                <a:srgbClr val="DCB3B2"/>
+              </a:buClr>
+              <a:buSzPct val="68000"/>
+              <a:buFont typeface="Wingdings 2" pitchFamily="2" charset="2"/>
+              <a:buChar char=""/>
+              <a:defRPr sz="1600">
+                <a:solidFill>
+                  <a:schemeClr val="tx1"/>
+                </a:solidFill>
+                <a:latin typeface="Times New Roman" panose="02020603050405020304" pitchFamily="18" charset="0"/>
+              </a:defRPr>
+            </a:lvl5pPr>
+            <a:lvl6pPr marL="2514600" indent="-228600" eaLnBrk="0" fontAlgn="base" hangingPunct="0">
+              <a:spcBef>
+                <a:spcPct val="20000"/>
+              </a:spcBef>
+              <a:spcAft>
+                <a:spcPct val="0"/>
+              </a:spcAft>
+              <a:buClr>
+                <a:srgbClr val="DCB3B2"/>
+              </a:buClr>
+              <a:buSzPct val="68000"/>
+              <a:buFont typeface="Wingdings 2" pitchFamily="2" charset="2"/>
+              <a:buChar char=""/>
+              <a:defRPr sz="1600">
+                <a:solidFill>
+                  <a:schemeClr val="tx1"/>
+                </a:solidFill>
+                <a:latin typeface="Times New Roman" panose="02020603050405020304" pitchFamily="18" charset="0"/>
+              </a:defRPr>
+            </a:lvl6pPr>
+            <a:lvl7pPr marL="2971800" indent="-228600" eaLnBrk="0" fontAlgn="base" hangingPunct="0">
+              <a:spcBef>
+                <a:spcPct val="20000"/>
+              </a:spcBef>
+              <a:spcAft>
+                <a:spcPct val="0"/>
+              </a:spcAft>
+              <a:buClr>
+                <a:srgbClr val="DCB3B2"/>
+              </a:buClr>
+              <a:buSzPct val="68000"/>
+              <a:buFont typeface="Wingdings 2" pitchFamily="2" charset="2"/>
+              <a:buChar char=""/>
+              <a:defRPr sz="1600">
+                <a:solidFill>
+                  <a:schemeClr val="tx1"/>
+                </a:solidFill>
+                <a:latin typeface="Times New Roman" panose="02020603050405020304" pitchFamily="18" charset="0"/>
+              </a:defRPr>
+            </a:lvl7pPr>
+            <a:lvl8pPr marL="3429000" indent="-228600" eaLnBrk="0" fontAlgn="base" hangingPunct="0">
+              <a:spcBef>
+                <a:spcPct val="20000"/>
+              </a:spcBef>
+              <a:spcAft>
+                <a:spcPct val="0"/>
+              </a:spcAft>
+              <a:buClr>
+                <a:srgbClr val="DCB3B2"/>
+              </a:buClr>
+              <a:buSzPct val="68000"/>
+              <a:buFont typeface="Wingdings 2" pitchFamily="2" charset="2"/>
+              <a:buChar char=""/>
+              <a:defRPr sz="1600">
+                <a:solidFill>
+                  <a:schemeClr val="tx1"/>
+                </a:solidFill>
+                <a:latin typeface="Times New Roman" panose="02020603050405020304" pitchFamily="18" charset="0"/>
+              </a:defRPr>
+            </a:lvl8pPr>
+            <a:lvl9pPr marL="3886200" indent="-228600" eaLnBrk="0" fontAlgn="base" hangingPunct="0">
+              <a:spcBef>
+                <a:spcPct val="20000"/>
+              </a:spcBef>
+              <a:spcAft>
+                <a:spcPct val="0"/>
+              </a:spcAft>
+              <a:buClr>
+                <a:srgbClr val="DCB3B2"/>
+              </a:buClr>
+              <a:buSzPct val="68000"/>
+              <a:buFont typeface="Wingdings 2" pitchFamily="2" charset="2"/>
+              <a:buChar char=""/>
+              <a:defRPr sz="1600">
+                <a:solidFill>
+                  <a:schemeClr val="tx1"/>
+                </a:solidFill>
+                <a:latin typeface="Times New Roman" panose="02020603050405020304" pitchFamily="18" charset="0"/>
+              </a:defRPr>
+            </a:lvl9pPr>
+          </a:lstStyle>
+          <a:p>
+            <a:pPr>
+              <a:spcBef>
+                <a:spcPct val="0"/>
+              </a:spcBef>
+              <a:buClrTx/>
+              <a:buSzTx/>
+              <a:buFontTx/>
+              <a:buNone/>
+            </a:pPr>
+            <a:fld id="{BD0BA0DF-D6E9-5943-8648-144AA2B3FB25}" type="slidenum">
+              <a:rPr lang="en-US" altLang="ru-RU" sz="1400">
+                <a:solidFill>
+                  <a:srgbClr val="FFFFFF"/>
+                </a:solidFill>
+              </a:rPr>
+              <a:pPr>
+                <a:spcBef>
+                  <a:spcPct val="0"/>
+                </a:spcBef>
+                <a:buClrTx/>
+                <a:buSzTx/>
+                <a:buFontTx/>
+                <a:buNone/>
+              </a:pPr>
+              <a:t>12</a:t>
+            </a:fld>
+            <a:endParaRPr lang="en-US" altLang="ru-RU" sz="1400">
+              <a:solidFill>
+                <a:srgbClr val="FFFFFF"/>
+              </a:solidFill>
+            </a:endParaRPr>
+          </a:p>
+        </p:txBody>
+      </p:sp>
+      <p:sp>
+        <p:nvSpPr>
+          <p:cNvPr id="3" name="TextBox 2">
+            <a:extLst>
+              <a:ext uri="{FF2B5EF4-FFF2-40B4-BE49-F238E27FC236}">
+                <a16:creationId xmlns:a16="http://schemas.microsoft.com/office/drawing/2014/main" id="{B3C41950-77A6-CCB6-210C-0D34263A6521}"/>
+              </a:ext>
+            </a:extLst>
+          </p:cNvPr>
+          <p:cNvSpPr txBox="1"/>
+          <p:nvPr/>
+        </p:nvSpPr>
+        <p:spPr>
+          <a:xfrm>
+            <a:off x="695325" y="5799522"/>
+            <a:ext cx="4521460" cy="307777"/>
+          </a:xfrm>
+          <a:prstGeom prst="rect">
+            <a:avLst/>
+          </a:prstGeom>
+          <a:noFill/>
+        </p:spPr>
+        <p:txBody>
+          <a:bodyPr wrap="square" rtlCol="0">
+            <a:spAutoFit/>
+          </a:bodyPr>
+          <a:lstStyle/>
+          <a:p>
+            <a:r>
+              <a:rPr lang="ru-RU" sz="1400" dirty="0">
+                <a:latin typeface="+mn-lt"/>
+              </a:rPr>
+              <a:t>результаты для каждого запуска</a:t>
+            </a:r>
+          </a:p>
+        </p:txBody>
+      </p:sp>
+      <p:sp>
+        <p:nvSpPr>
+          <p:cNvPr id="8" name="object 3">
+            <a:extLst>
+              <a:ext uri="{FF2B5EF4-FFF2-40B4-BE49-F238E27FC236}">
+                <a16:creationId xmlns:a16="http://schemas.microsoft.com/office/drawing/2014/main" id="{01BF58F6-9883-E5B5-2241-39C201B9AA55}"/>
+              </a:ext>
+            </a:extLst>
+          </p:cNvPr>
+          <p:cNvSpPr txBox="1"/>
+          <p:nvPr/>
+        </p:nvSpPr>
+        <p:spPr>
+          <a:xfrm>
+            <a:off x="687870" y="1075471"/>
+            <a:ext cx="9928225" cy="4230004"/>
+          </a:xfrm>
+          <a:prstGeom prst="rect">
+            <a:avLst/>
+          </a:prstGeom>
+        </p:spPr>
+        <p:txBody>
+          <a:bodyPr vert="horz" wrap="square" lIns="0" tIns="13335" rIns="0" bIns="0" rtlCol="0">
+            <a:spAutoFit/>
+          </a:bodyPr>
+          <a:lstStyle/>
+          <a:p>
+            <a:pPr marL="285115" marR="10160" indent="-273050" algn="just">
+              <a:spcBef>
+                <a:spcPts val="600"/>
+              </a:spcBef>
+              <a:buClr>
+                <a:srgbClr val="4F81BC"/>
+              </a:buClr>
+              <a:buSzPct val="69230"/>
+              <a:buFont typeface="Wingdings"/>
+              <a:buChar char=""/>
+              <a:tabLst>
+                <a:tab pos="285115" algn="l"/>
+              </a:tabLst>
+            </a:pPr>
+            <a:r>
+              <a:rPr lang="ru-RU" sz="2400" dirty="0">
+                <a:latin typeface="Times New Roman"/>
+                <a:cs typeface="Times New Roman"/>
+              </a:rPr>
+              <a:t>легитимную запись из ожидаемого контекста --- обращение к области из участка кода, которому разрешено её изменять до фиксации области как неизменяемой; сценарий проверяет отсутствие ложных срабатываний на законном пути исполнения;</a:t>
+            </a:r>
+          </a:p>
+          <a:p>
+            <a:pPr marL="285115" marR="10160" indent="-273050" algn="just">
+              <a:spcBef>
+                <a:spcPts val="600"/>
+              </a:spcBef>
+              <a:buClr>
+                <a:srgbClr val="4F81BC"/>
+              </a:buClr>
+              <a:buSzPct val="69230"/>
+              <a:buFont typeface="Wingdings"/>
+              <a:buChar char=""/>
+              <a:tabLst>
+                <a:tab pos="285115" algn="l"/>
+              </a:tabLst>
+            </a:pPr>
+            <a:r>
+              <a:rPr lang="ru-RU" sz="2400" dirty="0">
+                <a:latin typeface="Times New Roman"/>
+                <a:cs typeface="Times New Roman"/>
+              </a:rPr>
+              <a:t>запись из постороннего модуля --- обращение на запись из модуля, которому изменять область не положено; сценарий проверяет корректность отлова и атрибуцию на уровне модуля-инициатора;</a:t>
+            </a:r>
+          </a:p>
+          <a:p>
+            <a:pPr marL="285115" marR="10160" indent="-273050" algn="just">
+              <a:spcBef>
+                <a:spcPts val="600"/>
+              </a:spcBef>
+              <a:buClr>
+                <a:srgbClr val="4F81BC"/>
+              </a:buClr>
+              <a:buSzPct val="69230"/>
+              <a:buFont typeface="Wingdings"/>
+              <a:buChar char=""/>
+              <a:tabLst>
+                <a:tab pos="285115" algn="l"/>
+              </a:tabLst>
+            </a:pPr>
+            <a:r>
+              <a:rPr lang="ru-RU" sz="2400" dirty="0">
+                <a:latin typeface="Times New Roman"/>
+                <a:cs typeface="Times New Roman"/>
+              </a:rPr>
+              <a:t>запись из посторонней функции того же модуля --- обращение из участка кода, отличного от легитимного, в пределах одного модуля; сценарий проверяет способность атрибуции различать инициатора на уровне функции;</a:t>
+            </a:r>
+          </a:p>
+        </p:txBody>
+      </p:sp>
     </p:spTree>
     <p:extLst>
       <p:ext uri="{BB962C8B-B14F-4D97-AF65-F5344CB8AC3E}">
@@ -6607,7 +7121,451 @@
 </p:sld>
 </file>
 
-<file path=ppt/slides/slide12.xml><?xml version="1.0" encoding="utf-8"?>
+<file path=ppt/slides/slide13.xml><?xml version="1.0" encoding="utf-8"?>
+<p:sld xmlns:a="http://schemas.openxmlformats.org/drawingml/2006/main" xmlns:r="http://schemas.openxmlformats.org/officeDocument/2006/relationships" xmlns:p="http://schemas.openxmlformats.org/presentationml/2006/main">
+  <p:cSld>
+    <p:spTree>
+      <p:nvGrpSpPr>
+        <p:cNvPr id="1" name=""/>
+        <p:cNvGrpSpPr/>
+        <p:nvPr/>
+      </p:nvGrpSpPr>
+      <p:grpSpPr>
+        <a:xfrm>
+          <a:off x="0" y="0"/>
+          <a:ext cx="0" cy="0"/>
+          <a:chOff x="0" y="0"/>
+          <a:chExt cx="0" cy="0"/>
+        </a:xfrm>
+      </p:grpSpPr>
+      <p:sp>
+        <p:nvSpPr>
+          <p:cNvPr id="2" name="Заголовок 1">
+            <a:extLst>
+              <a:ext uri="{FF2B5EF4-FFF2-40B4-BE49-F238E27FC236}">
+                <a16:creationId xmlns:a16="http://schemas.microsoft.com/office/drawing/2014/main" id="{3B33D82E-F63A-5021-2B09-B2A66B267EDB}"/>
+              </a:ext>
+            </a:extLst>
+          </p:cNvPr>
+          <p:cNvSpPr>
+            <a:spLocks noGrp="1"/>
+          </p:cNvSpPr>
+          <p:nvPr>
+            <p:ph type="title"/>
+          </p:nvPr>
+        </p:nvSpPr>
+        <p:spPr>
+          <a:xfrm>
+            <a:off x="1252166" y="188640"/>
+            <a:ext cx="9371384" cy="725487"/>
+          </a:xfrm>
+        </p:spPr>
+        <p:txBody>
+          <a:bodyPr>
+            <a:normAutofit fontScale="90000"/>
+          </a:bodyPr>
+          <a:lstStyle/>
+          <a:p>
+            <a:pPr algn="ctr" eaLnBrk="1" fontAlgn="auto" hangingPunct="1">
+              <a:spcAft>
+                <a:spcPts val="0"/>
+              </a:spcAft>
+              <a:defRPr/>
+            </a:pPr>
+            <a:r>
+              <a:rPr lang="ru-RU" b="1" dirty="0"/>
+              <a:t>Проверка опытного образца на модельных сценариях</a:t>
+            </a:r>
+          </a:p>
+        </p:txBody>
+      </p:sp>
+      <p:sp>
+        <p:nvSpPr>
+          <p:cNvPr id="17411" name="Номер слайда 3">
+            <a:extLst>
+              <a:ext uri="{FF2B5EF4-FFF2-40B4-BE49-F238E27FC236}">
+                <a16:creationId xmlns:a16="http://schemas.microsoft.com/office/drawing/2014/main" id="{9128E344-CB6D-30B1-5D0C-2C232C7371E1}"/>
+              </a:ext>
+            </a:extLst>
+          </p:cNvPr>
+          <p:cNvSpPr>
+            <a:spLocks noGrp="1"/>
+          </p:cNvSpPr>
+          <p:nvPr>
+            <p:ph type="sldNum" sz="quarter" idx="10"/>
+          </p:nvPr>
+        </p:nvSpPr>
+        <p:spPr bwMode="auto">
+          <a:noFill/>
+          <a:extLst>
+            <a:ext uri="{909E8E84-426E-40DD-AFC4-6F175D3DCCD1}">
+              <a14:hiddenFill xmlns:a14="http://schemas.microsoft.com/office/drawing/2010/main">
+                <a:solidFill>
+                  <a:srgbClr val="FFFFFF"/>
+                </a:solidFill>
+              </a14:hiddenFill>
+            </a:ext>
+            <a:ext uri="{91240B29-F687-4F45-9708-019B960494DF}">
+              <a14:hiddenLine xmlns:a14="http://schemas.microsoft.com/office/drawing/2010/main" w="9525">
+                <a:solidFill>
+                  <a:srgbClr val="000000"/>
+                </a:solidFill>
+                <a:miter lim="800000"/>
+                <a:headEnd/>
+                <a:tailEnd/>
+              </a14:hiddenLine>
+            </a:ext>
+          </a:extLst>
+        </p:spPr>
+        <p:txBody>
+          <a:bodyPr/>
+          <a:lstStyle>
+            <a:lvl1pPr>
+              <a:spcBef>
+                <a:spcPts val="600"/>
+              </a:spcBef>
+              <a:buClr>
+                <a:schemeClr val="accent1"/>
+              </a:buClr>
+              <a:buSzPct val="70000"/>
+              <a:buFont typeface="Wingdings" pitchFamily="2" charset="2"/>
+              <a:buChar char=""/>
+              <a:defRPr sz="2400">
+                <a:solidFill>
+                  <a:schemeClr val="tx1"/>
+                </a:solidFill>
+                <a:latin typeface="Times New Roman" panose="02020603050405020304" pitchFamily="18" charset="0"/>
+              </a:defRPr>
+            </a:lvl1pPr>
+            <a:lvl2pPr marL="742950" indent="-285750">
+              <a:spcBef>
+                <a:spcPct val="20000"/>
+              </a:spcBef>
+              <a:buClr>
+                <a:schemeClr val="accent1"/>
+              </a:buClr>
+              <a:buSzPct val="80000"/>
+              <a:buFont typeface="Wingdings 2" pitchFamily="2" charset="2"/>
+              <a:buChar char=""/>
+              <a:defRPr sz="2100">
+                <a:solidFill>
+                  <a:schemeClr val="tx1"/>
+                </a:solidFill>
+                <a:latin typeface="Times New Roman" panose="02020603050405020304" pitchFamily="18" charset="0"/>
+              </a:defRPr>
+            </a:lvl2pPr>
+            <a:lvl3pPr marL="1143000" indent="-228600">
+              <a:spcBef>
+                <a:spcPct val="20000"/>
+              </a:spcBef>
+              <a:buClr>
+                <a:srgbClr val="4471A6"/>
+              </a:buClr>
+              <a:buSzPct val="60000"/>
+              <a:buFont typeface="Wingdings" pitchFamily="2" charset="2"/>
+              <a:buChar char=""/>
+              <a:defRPr sz="2400">
+                <a:solidFill>
+                  <a:schemeClr val="tx1"/>
+                </a:solidFill>
+                <a:latin typeface="Times New Roman" panose="02020603050405020304" pitchFamily="18" charset="0"/>
+              </a:defRPr>
+            </a:lvl3pPr>
+            <a:lvl4pPr marL="1600200" indent="-228600">
+              <a:spcBef>
+                <a:spcPct val="20000"/>
+              </a:spcBef>
+              <a:buClr>
+                <a:srgbClr val="B2C1DB"/>
+              </a:buClr>
+              <a:buSzPct val="60000"/>
+              <a:buFont typeface="Wingdings" pitchFamily="2" charset="2"/>
+              <a:buChar char=""/>
+              <a:defRPr sz="2000">
+                <a:solidFill>
+                  <a:schemeClr val="tx1"/>
+                </a:solidFill>
+                <a:latin typeface="Times New Roman" panose="02020603050405020304" pitchFamily="18" charset="0"/>
+              </a:defRPr>
+            </a:lvl4pPr>
+            <a:lvl5pPr marL="2057400" indent="-228600">
+              <a:spcBef>
+                <a:spcPct val="20000"/>
+              </a:spcBef>
+              <a:buClr>
+                <a:srgbClr val="DCB3B2"/>
+              </a:buClr>
+              <a:buSzPct val="68000"/>
+              <a:buFont typeface="Wingdings 2" pitchFamily="2" charset="2"/>
+              <a:buChar char=""/>
+              <a:defRPr sz="1600">
+                <a:solidFill>
+                  <a:schemeClr val="tx1"/>
+                </a:solidFill>
+                <a:latin typeface="Times New Roman" panose="02020603050405020304" pitchFamily="18" charset="0"/>
+              </a:defRPr>
+            </a:lvl5pPr>
+            <a:lvl6pPr marL="2514600" indent="-228600" eaLnBrk="0" fontAlgn="base" hangingPunct="0">
+              <a:spcBef>
+                <a:spcPct val="20000"/>
+              </a:spcBef>
+              <a:spcAft>
+                <a:spcPct val="0"/>
+              </a:spcAft>
+              <a:buClr>
+                <a:srgbClr val="DCB3B2"/>
+              </a:buClr>
+              <a:buSzPct val="68000"/>
+              <a:buFont typeface="Wingdings 2" pitchFamily="2" charset="2"/>
+              <a:buChar char=""/>
+              <a:defRPr sz="1600">
+                <a:solidFill>
+                  <a:schemeClr val="tx1"/>
+                </a:solidFill>
+                <a:latin typeface="Times New Roman" panose="02020603050405020304" pitchFamily="18" charset="0"/>
+              </a:defRPr>
+            </a:lvl6pPr>
+            <a:lvl7pPr marL="2971800" indent="-228600" eaLnBrk="0" fontAlgn="base" hangingPunct="0">
+              <a:spcBef>
+                <a:spcPct val="20000"/>
+              </a:spcBef>
+              <a:spcAft>
+                <a:spcPct val="0"/>
+              </a:spcAft>
+              <a:buClr>
+                <a:srgbClr val="DCB3B2"/>
+              </a:buClr>
+              <a:buSzPct val="68000"/>
+              <a:buFont typeface="Wingdings 2" pitchFamily="2" charset="2"/>
+              <a:buChar char=""/>
+              <a:defRPr sz="1600">
+                <a:solidFill>
+                  <a:schemeClr val="tx1"/>
+                </a:solidFill>
+                <a:latin typeface="Times New Roman" panose="02020603050405020304" pitchFamily="18" charset="0"/>
+              </a:defRPr>
+            </a:lvl7pPr>
+            <a:lvl8pPr marL="3429000" indent="-228600" eaLnBrk="0" fontAlgn="base" hangingPunct="0">
+              <a:spcBef>
+                <a:spcPct val="20000"/>
+              </a:spcBef>
+              <a:spcAft>
+                <a:spcPct val="0"/>
+              </a:spcAft>
+              <a:buClr>
+                <a:srgbClr val="DCB3B2"/>
+              </a:buClr>
+              <a:buSzPct val="68000"/>
+              <a:buFont typeface="Wingdings 2" pitchFamily="2" charset="2"/>
+              <a:buChar char=""/>
+              <a:defRPr sz="1600">
+                <a:solidFill>
+                  <a:schemeClr val="tx1"/>
+                </a:solidFill>
+                <a:latin typeface="Times New Roman" panose="02020603050405020304" pitchFamily="18" charset="0"/>
+              </a:defRPr>
+            </a:lvl8pPr>
+            <a:lvl9pPr marL="3886200" indent="-228600" eaLnBrk="0" fontAlgn="base" hangingPunct="0">
+              <a:spcBef>
+                <a:spcPct val="20000"/>
+              </a:spcBef>
+              <a:spcAft>
+                <a:spcPct val="0"/>
+              </a:spcAft>
+              <a:buClr>
+                <a:srgbClr val="DCB3B2"/>
+              </a:buClr>
+              <a:buSzPct val="68000"/>
+              <a:buFont typeface="Wingdings 2" pitchFamily="2" charset="2"/>
+              <a:buChar char=""/>
+              <a:defRPr sz="1600">
+                <a:solidFill>
+                  <a:schemeClr val="tx1"/>
+                </a:solidFill>
+                <a:latin typeface="Times New Roman" panose="02020603050405020304" pitchFamily="18" charset="0"/>
+              </a:defRPr>
+            </a:lvl9pPr>
+          </a:lstStyle>
+          <a:p>
+            <a:pPr>
+              <a:spcBef>
+                <a:spcPct val="0"/>
+              </a:spcBef>
+              <a:buClrTx/>
+              <a:buSzTx/>
+              <a:buFontTx/>
+              <a:buNone/>
+            </a:pPr>
+            <a:fld id="{BD0BA0DF-D6E9-5943-8648-144AA2B3FB25}" type="slidenum">
+              <a:rPr lang="en-US" altLang="ru-RU" sz="1400">
+                <a:solidFill>
+                  <a:srgbClr val="FFFFFF"/>
+                </a:solidFill>
+              </a:rPr>
+              <a:pPr>
+                <a:spcBef>
+                  <a:spcPct val="0"/>
+                </a:spcBef>
+                <a:buClrTx/>
+                <a:buSzTx/>
+                <a:buFontTx/>
+                <a:buNone/>
+              </a:pPr>
+              <a:t>13</a:t>
+            </a:fld>
+            <a:endParaRPr lang="en-US" altLang="ru-RU" sz="1400">
+              <a:solidFill>
+                <a:srgbClr val="FFFFFF"/>
+              </a:solidFill>
+            </a:endParaRPr>
+          </a:p>
+        </p:txBody>
+      </p:sp>
+      <p:sp>
+        <p:nvSpPr>
+          <p:cNvPr id="3" name="TextBox 2">
+            <a:extLst>
+              <a:ext uri="{FF2B5EF4-FFF2-40B4-BE49-F238E27FC236}">
+                <a16:creationId xmlns:a16="http://schemas.microsoft.com/office/drawing/2014/main" id="{B3C41950-77A6-CCB6-210C-0D34263A6521}"/>
+              </a:ext>
+            </a:extLst>
+          </p:cNvPr>
+          <p:cNvSpPr txBox="1"/>
+          <p:nvPr/>
+        </p:nvSpPr>
+        <p:spPr>
+          <a:xfrm>
+            <a:off x="695325" y="5799522"/>
+            <a:ext cx="4521460" cy="307777"/>
+          </a:xfrm>
+          <a:prstGeom prst="rect">
+            <a:avLst/>
+          </a:prstGeom>
+          <a:noFill/>
+        </p:spPr>
+        <p:txBody>
+          <a:bodyPr wrap="square" rtlCol="0">
+            <a:spAutoFit/>
+          </a:bodyPr>
+          <a:lstStyle/>
+          <a:p>
+            <a:r>
+              <a:rPr lang="ru-RU" sz="1400" dirty="0">
+                <a:latin typeface="+mn-lt"/>
+              </a:rPr>
+              <a:t>результаты для каждого запуска</a:t>
+            </a:r>
+          </a:p>
+        </p:txBody>
+      </p:sp>
+      <p:sp>
+        <p:nvSpPr>
+          <p:cNvPr id="4" name="object 3">
+            <a:extLst>
+              <a:ext uri="{FF2B5EF4-FFF2-40B4-BE49-F238E27FC236}">
+                <a16:creationId xmlns:a16="http://schemas.microsoft.com/office/drawing/2014/main" id="{C30A61B9-BBAA-083A-BB53-2D9B41C7C274}"/>
+              </a:ext>
+            </a:extLst>
+          </p:cNvPr>
+          <p:cNvSpPr txBox="1"/>
+          <p:nvPr/>
+        </p:nvSpPr>
+        <p:spPr>
+          <a:xfrm>
+            <a:off x="973745" y="1052736"/>
+            <a:ext cx="9928225" cy="3122009"/>
+          </a:xfrm>
+          <a:prstGeom prst="rect">
+            <a:avLst/>
+          </a:prstGeom>
+        </p:spPr>
+        <p:txBody>
+          <a:bodyPr vert="horz" wrap="square" lIns="0" tIns="13335" rIns="0" bIns="0" rtlCol="0">
+            <a:spAutoFit/>
+          </a:bodyPr>
+          <a:lstStyle/>
+          <a:p>
+            <a:pPr marL="285115" marR="10160" indent="-273050" algn="just">
+              <a:spcBef>
+                <a:spcPts val="600"/>
+              </a:spcBef>
+              <a:buClr>
+                <a:srgbClr val="4F81BC"/>
+              </a:buClr>
+              <a:buSzPct val="69230"/>
+              <a:buFont typeface="Wingdings"/>
+              <a:buChar char=""/>
+              <a:tabLst>
+                <a:tab pos="285115" algn="l"/>
+              </a:tabLst>
+            </a:pPr>
+            <a:r>
+              <a:rPr lang="ru-RU" sz="2400" dirty="0">
+                <a:latin typeface="Times New Roman"/>
+                <a:cs typeface="Times New Roman"/>
+              </a:rPr>
+              <a:t>запись вследствие переполнения соседнего буфера --- модификацию охраняемой области в результате выхода записи за границы смежного буфера; сценарий воспроизводит типовой механизм эксплуатации;</a:t>
+            </a:r>
+          </a:p>
+          <a:p>
+            <a:pPr marL="285115" marR="10160" indent="-273050" algn="just">
+              <a:spcBef>
+                <a:spcPts val="600"/>
+              </a:spcBef>
+              <a:buClr>
+                <a:srgbClr val="4F81BC"/>
+              </a:buClr>
+              <a:buSzPct val="69230"/>
+              <a:buFont typeface="Wingdings"/>
+              <a:buChar char=""/>
+              <a:tabLst>
+                <a:tab pos="285115" algn="l"/>
+              </a:tabLst>
+            </a:pPr>
+            <a:r>
+              <a:rPr lang="ru-RU" sz="2400" dirty="0">
+                <a:latin typeface="Times New Roman"/>
+                <a:cs typeface="Times New Roman"/>
+              </a:rPr>
+              <a:t>контрольное обращение к незащищённой области --- обращение к области, не помещённой под охрану; сценарий проверяет избирательность контроля, при которой подобное обращение не должно порождать событий.</a:t>
+            </a:r>
+          </a:p>
+          <a:p>
+            <a:pPr marL="285115" marR="10160" indent="-273050" algn="just">
+              <a:spcBef>
+                <a:spcPts val="600"/>
+              </a:spcBef>
+              <a:buClr>
+                <a:srgbClr val="4F81BC"/>
+              </a:buClr>
+              <a:buSzPct val="69230"/>
+              <a:buFont typeface="Wingdings"/>
+              <a:buChar char=""/>
+              <a:tabLst>
+                <a:tab pos="285115" algn="l"/>
+              </a:tabLst>
+            </a:pPr>
+            <a:endParaRPr lang="ru-RU" sz="2400" dirty="0">
+              <a:latin typeface="Times New Roman"/>
+              <a:cs typeface="Times New Roman"/>
+            </a:endParaRPr>
+          </a:p>
+        </p:txBody>
+      </p:sp>
+    </p:spTree>
+    <p:extLst>
+      <p:ext uri="{BB962C8B-B14F-4D97-AF65-F5344CB8AC3E}">
+        <p14:creationId xmlns:p14="http://schemas.microsoft.com/office/powerpoint/2010/main" val="2589589396"/>
+      </p:ext>
+    </p:extLst>
+  </p:cSld>
+  <p:clrMapOvr>
+    <a:masterClrMapping/>
+  </p:clrMapOvr>
+</p:sld>
+</file>
+
+<file path=ppt/slides/slide14.xml><?xml version="1.0" encoding="utf-8"?>
 <p:sld xmlns:a="http://schemas.openxmlformats.org/drawingml/2006/main" xmlns:r="http://schemas.openxmlformats.org/officeDocument/2006/relationships" xmlns:p="http://schemas.openxmlformats.org/presentationml/2006/main">
   <p:cSld>
     <p:spTree>
@@ -6898,7 +7856,7 @@
                 <a:buFontTx/>
                 <a:buNone/>
               </a:pPr>
-              <a:t>12</a:t>
+              <a:t>14</a:t>
             </a:fld>
             <a:endParaRPr lang="en-US" altLang="ru-RU" sz="1400">
               <a:solidFill>
@@ -7155,7 +8113,7 @@
 </p:sld>
 </file>
 
-<file path=ppt/slides/slide13.xml><?xml version="1.0" encoding="utf-8"?>
+<file path=ppt/slides/slide15.xml><?xml version="1.0" encoding="utf-8"?>
 <p:sld xmlns:a="http://schemas.openxmlformats.org/drawingml/2006/main" xmlns:r="http://schemas.openxmlformats.org/officeDocument/2006/relationships" xmlns:p="http://schemas.openxmlformats.org/presentationml/2006/main">
   <p:cSld>
     <p:spTree>
@@ -7462,7 +8420,7 @@
                 <a:buFontTx/>
                 <a:buNone/>
               </a:pPr>
-              <a:t>13</a:t>
+              <a:t>15</a:t>
             </a:fld>
             <a:endParaRPr lang="en-US" altLang="ru-RU" sz="1400">
               <a:solidFill>
@@ -18920,7 +19878,7 @@
         </p:nvSpPr>
         <p:spPr>
           <a:xfrm>
-            <a:off x="1046163" y="2420888"/>
+            <a:off x="1046163" y="2060848"/>
             <a:ext cx="9928225" cy="3273425"/>
           </a:xfrm>
           <a:prstGeom prst="rect">
@@ -19581,7 +20539,7 @@
         </p:nvSpPr>
         <p:spPr>
           <a:xfrm>
-            <a:off x="1981200" y="274638"/>
+            <a:off x="1981199" y="836712"/>
             <a:ext cx="7467600" cy="725487"/>
           </a:xfrm>
         </p:spPr>
@@ -19855,10 +20813,10 @@
       </p:sp>
       <p:sp>
         <p:nvSpPr>
-          <p:cNvPr id="4" name="object 3">
+          <p:cNvPr id="3" name="object 3">
             <a:extLst>
               <a:ext uri="{FF2B5EF4-FFF2-40B4-BE49-F238E27FC236}">
-                <a16:creationId xmlns:a16="http://schemas.microsoft.com/office/drawing/2014/main" id="{E44420D4-9086-1F38-E173-8E93BDA29C4B}"/>
+                <a16:creationId xmlns:a16="http://schemas.microsoft.com/office/drawing/2014/main" id="{B62B12E4-5C21-FD14-1CCA-C8FCE518D9B5}"/>
               </a:ext>
             </a:extLst>
           </p:cNvPr>
@@ -19867,8 +20825,8 @@
         </p:nvSpPr>
         <p:spPr>
           <a:xfrm>
-            <a:off x="695400" y="1340768"/>
-            <a:ext cx="9843770" cy="890628"/>
+            <a:off x="750887" y="1988840"/>
+            <a:ext cx="9928225" cy="2439770"/>
           </a:xfrm>
           <a:prstGeom prst="rect">
             <a:avLst/>
@@ -19880,113 +20838,87 @@
           </a:bodyPr>
           <a:lstStyle/>
           <a:p>
-            <a:pPr marL="12700">
-              <a:lnSpc>
-                <a:spcPct val="100000"/>
-              </a:lnSpc>
+            <a:pPr marL="983615" marR="5080" lvl="1" indent="-514350" algn="just">
               <a:spcBef>
                 <a:spcPts val="105"/>
               </a:spcBef>
+              <a:buClr>
+                <a:srgbClr val="4F81BC"/>
+              </a:buClr>
+              <a:buSzPct val="69230"/>
+              <a:buFont typeface="+mj-lt"/>
+              <a:buAutoNum type="arabicPeriod"/>
+              <a:tabLst>
+                <a:tab pos="285115" algn="l"/>
+              </a:tabLst>
             </a:pPr>
             <a:r>
-              <a:rPr sz="2600" b="1" dirty="0">
-                <a:latin typeface="Times New Roman"/>
-                <a:cs typeface="Times New Roman"/>
-              </a:rPr>
-              <a:t>Основные</a:t>
-            </a:r>
-            <a:r>
-              <a:rPr sz="2600" b="1" spc="-105" dirty="0">
-                <a:latin typeface="Times New Roman"/>
-                <a:cs typeface="Times New Roman"/>
-              </a:rPr>
-              <a:t> </a:t>
-            </a:r>
-            <a:r>
-              <a:rPr sz="2600" b="1" dirty="0">
-                <a:latin typeface="Times New Roman"/>
-                <a:cs typeface="Times New Roman"/>
-              </a:rPr>
-              <a:t>задачи</a:t>
-            </a:r>
-            <a:r>
-              <a:rPr sz="2600" b="1" spc="-70" dirty="0">
-                <a:latin typeface="Times New Roman"/>
-                <a:cs typeface="Times New Roman"/>
-              </a:rPr>
-              <a:t> </a:t>
-            </a:r>
-            <a:r>
-              <a:rPr sz="2600" b="1" dirty="0">
-                <a:latin typeface="Times New Roman"/>
-                <a:cs typeface="Times New Roman"/>
-              </a:rPr>
-              <a:t>на</a:t>
-            </a:r>
-            <a:r>
-              <a:rPr sz="2600" b="1" spc="-65" dirty="0">
-                <a:latin typeface="Times New Roman"/>
-                <a:cs typeface="Times New Roman"/>
-              </a:rPr>
-              <a:t> </a:t>
-            </a:r>
-            <a:r>
-              <a:rPr sz="2600" b="1" spc="-10" dirty="0">
-                <a:latin typeface="Times New Roman"/>
-                <a:cs typeface="Times New Roman"/>
-              </a:rPr>
-              <a:t>семестр:</a:t>
-            </a:r>
-            <a:endParaRPr sz="2600" dirty="0">
-              <a:latin typeface="Times New Roman"/>
-              <a:cs typeface="Times New Roman"/>
-            </a:endParaRPr>
+              <a:rPr lang="ru-RU" sz="2600" dirty="0">
+                <a:latin typeface="Times New Roman"/>
+                <a:cs typeface="Times New Roman"/>
+              </a:rPr>
+              <a:t>выбор технологического стека и разработка методики контекстного мониторинга</a:t>
+            </a:r>
+            <a:r>
+              <a:rPr lang="en-US" sz="2600" dirty="0">
+                <a:latin typeface="Times New Roman"/>
+                <a:cs typeface="Times New Roman"/>
+              </a:rPr>
+              <a:t>;</a:t>
+            </a:r>
           </a:p>
           <a:p>
-            <a:pPr>
-              <a:lnSpc>
-                <a:spcPct val="100000"/>
-              </a:lnSpc>
-              <a:spcBef>
-                <a:spcPts val="605"/>
-              </a:spcBef>
+            <a:pPr marL="983615" marR="5080" lvl="1" indent="-514350" algn="just">
+              <a:spcBef>
+                <a:spcPts val="105"/>
+              </a:spcBef>
+              <a:buClr>
+                <a:srgbClr val="4F81BC"/>
+              </a:buClr>
+              <a:buSzPct val="69230"/>
+              <a:buFont typeface="+mj-lt"/>
+              <a:buAutoNum type="arabicPeriod"/>
+              <a:tabLst>
+                <a:tab pos="285115" algn="l"/>
+              </a:tabLst>
             </a:pPr>
             <a:r>
+              <a:rPr lang="ru-RU" sz="2600" dirty="0">
+                <a:latin typeface="Times New Roman"/>
+                <a:cs typeface="Times New Roman"/>
+              </a:rPr>
+              <a:t>разработка опытного образца модуля перехвата событий доступа к памяти</a:t>
+            </a:r>
+            <a:r>
               <a:rPr lang="en-US" sz="2600" dirty="0">
-                <a:solidFill>
-                  <a:srgbClr val="FF0000"/>
-                </a:solidFill>
-                <a:highlight>
-                  <a:srgbClr val="FFFF00"/>
-                </a:highlight>
-                <a:latin typeface="Times New Roman"/>
-                <a:cs typeface="Times New Roman"/>
-              </a:rPr>
-              <a:t>TODO</a:t>
-            </a:r>
-            <a:r>
-              <a:rPr lang="ru-RU" sz="2600">
-                <a:solidFill>
-                  <a:srgbClr val="FF0000"/>
-                </a:solidFill>
-                <a:highlight>
-                  <a:srgbClr val="FFFF00"/>
-                </a:highlight>
-                <a:latin typeface="Times New Roman"/>
-                <a:cs typeface="Times New Roman"/>
-              </a:rPr>
-              <a:t>О</a:t>
-            </a:r>
-            <a:endParaRPr sz="2600" dirty="0">
-              <a:solidFill>
-                <a:srgbClr val="FF0000"/>
-              </a:solidFill>
-              <a:highlight>
-                <a:srgbClr val="FFFF00"/>
-              </a:highlight>
-              <a:latin typeface="Times New Roman"/>
-              <a:cs typeface="Times New Roman"/>
-            </a:endParaRPr>
+                <a:latin typeface="Times New Roman"/>
+                <a:cs typeface="Times New Roman"/>
+              </a:rPr>
+              <a:t>;</a:t>
+            </a:r>
+          </a:p>
+          <a:p>
+            <a:pPr marL="983615" marR="5080" lvl="1" indent="-514350" algn="just">
+              <a:spcBef>
+                <a:spcPts val="105"/>
+              </a:spcBef>
+              <a:buClr>
+                <a:srgbClr val="4F81BC"/>
+              </a:buClr>
+              <a:buSzPct val="69230"/>
+              <a:buFont typeface="+mj-lt"/>
+              <a:buAutoNum type="arabicPeriod"/>
+              <a:tabLst>
+                <a:tab pos="285115" algn="l"/>
+              </a:tabLst>
+            </a:pPr>
+            <a:r>
+              <a:rPr lang="ru-RU" sz="2600" dirty="0">
+                <a:latin typeface="Times New Roman"/>
+                <a:cs typeface="Times New Roman"/>
+              </a:rPr>
+              <a:t>валидация опытного образца на модельных сценариях доступа к памяти.</a:t>
+            </a:r>
           </a:p>
         </p:txBody>
       </p:sp>
@@ -20033,12 +20965,14 @@
         </p:nvSpPr>
         <p:spPr>
           <a:xfrm>
-            <a:off x="1981200" y="274638"/>
-            <a:ext cx="7467600" cy="725487"/>
+            <a:off x="1338262" y="116632"/>
+            <a:ext cx="9515475" cy="864096"/>
           </a:xfrm>
         </p:spPr>
         <p:txBody>
-          <a:bodyPr/>
+          <a:bodyPr>
+            <a:normAutofit fontScale="90000"/>
+          </a:bodyPr>
           <a:lstStyle/>
           <a:p>
             <a:pPr algn="ctr" eaLnBrk="1" fontAlgn="auto" hangingPunct="1">
@@ -20048,32 +20982,9 @@
               <a:defRPr/>
             </a:pPr>
             <a:r>
-              <a:rPr lang="en-US" sz="3200" dirty="0">
-                <a:solidFill>
-                  <a:srgbClr val="FF0000"/>
-                </a:solidFill>
-                <a:highlight>
-                  <a:srgbClr val="FFFF00"/>
-                </a:highlight>
-                <a:latin typeface="Times New Roman"/>
-                <a:cs typeface="Times New Roman"/>
-              </a:rPr>
-              <a:t>TODO </a:t>
-            </a:r>
-            <a:r>
-              <a:rPr lang="ru-RU" sz="3200" dirty="0">
-                <a:solidFill>
-                  <a:srgbClr val="FF0000"/>
-                </a:solidFill>
-                <a:highlight>
-                  <a:srgbClr val="FFFF00"/>
-                </a:highlight>
-                <a:latin typeface="Times New Roman"/>
-                <a:cs typeface="Times New Roman"/>
-              </a:rPr>
-              <a:t>ГЛАВА 1</a:t>
-            </a:r>
-            <a:endParaRPr lang="ru-RU" b="1" dirty="0"/>
+              <a:rPr lang="ru-RU" b="1" dirty="0"/>
+              <a:t>Методика контекстного мониторинга и защиты памяти</a:t>
+            </a:r>
           </a:p>
         </p:txBody>
       </p:sp>
@@ -20319,7 +21230,158 @@
           </a:p>
         </p:txBody>
       </p:sp>
+      <p:pic>
+        <p:nvPicPr>
+          <p:cNvPr id="4" name="Picture 3">
+            <a:extLst>
+              <a:ext uri="{FF2B5EF4-FFF2-40B4-BE49-F238E27FC236}">
+                <a16:creationId xmlns:a16="http://schemas.microsoft.com/office/drawing/2014/main" id="{FC32D21F-8CAB-9FF7-5466-B73E7E5AE705}"/>
+              </a:ext>
+            </a:extLst>
+          </p:cNvPr>
+          <p:cNvPicPr>
+            <a:picLocks noChangeAspect="1"/>
+          </p:cNvPicPr>
+          <p:nvPr/>
+        </p:nvPicPr>
+        <p:blipFill>
+          <a:blip r:embed="rId2">
+            <a:extLst>
+              <a:ext uri="{28A0092B-C50C-407E-A947-70E740481C1C}">
+                <a14:useLocalDpi xmlns:a14="http://schemas.microsoft.com/office/drawing/2010/main" val="0"/>
+              </a:ext>
+            </a:extLst>
+          </a:blip>
+          <a:stretch>
+            <a:fillRect/>
+          </a:stretch>
+        </p:blipFill>
+        <p:spPr>
+          <a:xfrm>
+            <a:off x="1847528" y="980728"/>
+            <a:ext cx="2880320" cy="4985443"/>
+          </a:xfrm>
+          <a:prstGeom prst="rect">
+            <a:avLst/>
+          </a:prstGeom>
+        </p:spPr>
+      </p:pic>
+      <p:pic>
+        <p:nvPicPr>
+          <p:cNvPr id="6" name="Picture 5">
+            <a:extLst>
+              <a:ext uri="{FF2B5EF4-FFF2-40B4-BE49-F238E27FC236}">
+                <a16:creationId xmlns:a16="http://schemas.microsoft.com/office/drawing/2014/main" id="{373284AD-9D1A-E0F0-F4FE-597F4054E12E}"/>
+              </a:ext>
+            </a:extLst>
+          </p:cNvPr>
+          <p:cNvPicPr>
+            <a:picLocks noChangeAspect="1"/>
+          </p:cNvPicPr>
+          <p:nvPr/>
+        </p:nvPicPr>
+        <p:blipFill>
+          <a:blip r:embed="rId3">
+            <a:extLst>
+              <a:ext uri="{28A0092B-C50C-407E-A947-70E740481C1C}">
+                <a14:useLocalDpi xmlns:a14="http://schemas.microsoft.com/office/drawing/2010/main" val="0"/>
+              </a:ext>
+            </a:extLst>
+          </a:blip>
+          <a:stretch>
+            <a:fillRect/>
+          </a:stretch>
+        </p:blipFill>
+        <p:spPr>
+          <a:xfrm>
+            <a:off x="7248128" y="980728"/>
+            <a:ext cx="2376264" cy="4985443"/>
+          </a:xfrm>
+          <a:prstGeom prst="rect">
+            <a:avLst/>
+          </a:prstGeom>
+        </p:spPr>
+      </p:pic>
+      <p:sp>
+        <p:nvSpPr>
+          <p:cNvPr id="7" name="TextBox 6">
+            <a:extLst>
+              <a:ext uri="{FF2B5EF4-FFF2-40B4-BE49-F238E27FC236}">
+                <a16:creationId xmlns:a16="http://schemas.microsoft.com/office/drawing/2014/main" id="{130FBE36-01CE-DAFB-D170-80129E244C99}"/>
+              </a:ext>
+            </a:extLst>
+          </p:cNvPr>
+          <p:cNvSpPr txBox="1"/>
+          <p:nvPr/>
+        </p:nvSpPr>
+        <p:spPr>
+          <a:xfrm>
+            <a:off x="1271464" y="6092825"/>
+            <a:ext cx="4824536" cy="307777"/>
+          </a:xfrm>
+          <a:prstGeom prst="rect">
+            <a:avLst/>
+          </a:prstGeom>
+          <a:noFill/>
+        </p:spPr>
+        <p:txBody>
+          <a:bodyPr wrap="square" rtlCol="0">
+            <a:spAutoFit/>
+          </a:bodyPr>
+          <a:lstStyle/>
+          <a:p>
+            <a:r>
+              <a:rPr lang="ru-RU" sz="1400" dirty="0">
+                <a:latin typeface="+mn-lt"/>
+              </a:rPr>
+              <a:t>Рисунок 1 – Блок-схема методики контекстного мониторинга</a:t>
+            </a:r>
+          </a:p>
+        </p:txBody>
+      </p:sp>
+      <p:sp>
+        <p:nvSpPr>
+          <p:cNvPr id="8" name="TextBox 7">
+            <a:extLst>
+              <a:ext uri="{FF2B5EF4-FFF2-40B4-BE49-F238E27FC236}">
+                <a16:creationId xmlns:a16="http://schemas.microsoft.com/office/drawing/2014/main" id="{AC404A2E-462C-D49F-AE68-1B78EFE9B2D7}"/>
+              </a:ext>
+            </a:extLst>
+          </p:cNvPr>
+          <p:cNvSpPr txBox="1"/>
+          <p:nvPr/>
+        </p:nvSpPr>
+        <p:spPr>
+          <a:xfrm>
+            <a:off x="6816080" y="6092824"/>
+            <a:ext cx="3672408" cy="307777"/>
+          </a:xfrm>
+          <a:prstGeom prst="rect">
+            <a:avLst/>
+          </a:prstGeom>
+          <a:noFill/>
+        </p:spPr>
+        <p:txBody>
+          <a:bodyPr wrap="square" rtlCol="0">
+            <a:spAutoFit/>
+          </a:bodyPr>
+          <a:lstStyle/>
+          <a:p>
+            <a:r>
+              <a:rPr lang="ru-RU" sz="1400" dirty="0">
+                <a:latin typeface="+mn-lt"/>
+              </a:rPr>
+              <a:t>Рисунок 2 – Блок-схема алгоритма атрибуции</a:t>
+            </a:r>
+          </a:p>
+        </p:txBody>
+      </p:sp>
     </p:spTree>
+    <p:extLst>
+      <p:ext uri="{BB962C8B-B14F-4D97-AF65-F5344CB8AC3E}">
+        <p14:creationId xmlns:p14="http://schemas.microsoft.com/office/powerpoint/2010/main" val="3664846225"/>
+      </p:ext>
+    </p:extLst>
   </p:cSld>
   <p:clrMapOvr>
     <a:masterClrMapping/>

--- a/part2/Презентация.pptx
+++ b/part2/Презентация.pptx
@@ -5,10 +5,10 @@
     <p:sldMasterId id="2147483672" r:id="rId1"/>
   </p:sldMasterIdLst>
   <p:notesMasterIdLst>
-    <p:notesMasterId r:id="rId17"/>
+    <p:notesMasterId r:id="rId19"/>
   </p:notesMasterIdLst>
   <p:handoutMasterIdLst>
-    <p:handoutMasterId r:id="rId18"/>
+    <p:handoutMasterId r:id="rId20"/>
   </p:handoutMasterIdLst>
   <p:sldIdLst>
     <p:sldId id="256" r:id="rId2"/>
@@ -23,9 +23,11 @@
     <p:sldId id="353" r:id="rId11"/>
     <p:sldId id="358" r:id="rId12"/>
     <p:sldId id="354" r:id="rId13"/>
-    <p:sldId id="359" r:id="rId14"/>
+    <p:sldId id="362" r:id="rId14"/>
     <p:sldId id="344" r:id="rId15"/>
     <p:sldId id="355" r:id="rId16"/>
+    <p:sldId id="361" r:id="rId17"/>
+    <p:sldId id="360" r:id="rId18"/>
   </p:sldIdLst>
   <p:sldSz cx="12192000" cy="6858000"/>
   <p:notesSz cx="6858000" cy="9144000"/>
@@ -295,7 +297,7 @@
               <a:pPr>
                 <a:defRPr/>
               </a:pPr>
-              <a:t>12.06.2026</a:t>
+              <a:t>16.06.2026</a:t>
             </a:fld>
             <a:endParaRPr lang="ru-RU"/>
           </a:p>
@@ -536,7 +538,7 @@
               <a:pPr>
                 <a:defRPr/>
               </a:pPr>
-              <a:t>12.06.2026</a:t>
+              <a:t>16.06.2026</a:t>
             </a:fld>
             <a:endParaRPr lang="ru-RU"/>
           </a:p>
@@ -1161,6 +1163,96 @@
         </p:txBody>
       </p:sp>
     </p:spTree>
+  </p:cSld>
+  <p:clrMapOvr>
+    <a:masterClrMapping/>
+  </p:clrMapOvr>
+</p:notes>
+</file>
+
+<file path=ppt/notesSlides/notesSlide2.xml><?xml version="1.0" encoding="utf-8"?>
+<p:notes xmlns:a="http://schemas.openxmlformats.org/drawingml/2006/main" xmlns:r="http://schemas.openxmlformats.org/officeDocument/2006/relationships" xmlns:p="http://schemas.openxmlformats.org/presentationml/2006/main">
+  <p:cSld>
+    <p:spTree>
+      <p:nvGrpSpPr>
+        <p:cNvPr id="1" name=""/>
+        <p:cNvGrpSpPr/>
+        <p:nvPr/>
+      </p:nvGrpSpPr>
+      <p:grpSpPr>
+        <a:xfrm>
+          <a:off x="0" y="0"/>
+          <a:ext cx="0" cy="0"/>
+          <a:chOff x="0" y="0"/>
+          <a:chExt cx="0" cy="0"/>
+        </a:xfrm>
+      </p:grpSpPr>
+      <p:sp>
+        <p:nvSpPr>
+          <p:cNvPr id="2" name="Slide Image Placeholder 1"/>
+          <p:cNvSpPr>
+            <a:spLocks noGrp="1" noRot="1" noChangeAspect="1"/>
+          </p:cNvSpPr>
+          <p:nvPr>
+            <p:ph type="sldImg"/>
+          </p:nvPr>
+        </p:nvSpPr>
+        <p:spPr/>
+      </p:sp>
+      <p:sp>
+        <p:nvSpPr>
+          <p:cNvPr id="3" name="Notes Placeholder 2"/>
+          <p:cNvSpPr>
+            <a:spLocks noGrp="1"/>
+          </p:cNvSpPr>
+          <p:nvPr>
+            <p:ph type="body" idx="1"/>
+          </p:nvPr>
+        </p:nvSpPr>
+        <p:spPr/>
+        <p:txBody>
+          <a:bodyPr/>
+          <a:lstStyle/>
+          <a:p>
+            <a:endParaRPr lang="ru-RU" dirty="0"/>
+          </a:p>
+        </p:txBody>
+      </p:sp>
+      <p:sp>
+        <p:nvSpPr>
+          <p:cNvPr id="4" name="Slide Number Placeholder 3"/>
+          <p:cNvSpPr>
+            <a:spLocks noGrp="1"/>
+          </p:cNvSpPr>
+          <p:nvPr>
+            <p:ph type="sldNum" sz="quarter" idx="5"/>
+          </p:nvPr>
+        </p:nvSpPr>
+        <p:spPr/>
+        <p:txBody>
+          <a:bodyPr/>
+          <a:lstStyle/>
+          <a:p>
+            <a:pPr>
+              <a:defRPr/>
+            </a:pPr>
+            <a:fld id="{CE30FF1B-434B-0F41-BB90-ADED13DA2E6A}" type="slidenum">
+              <a:rPr lang="ru-RU" altLang="ru-RU" smtClean="0"/>
+              <a:pPr>
+                <a:defRPr/>
+              </a:pPr>
+              <a:t>12</a:t>
+            </a:fld>
+            <a:endParaRPr lang="ru-RU" altLang="ru-RU"/>
+          </a:p>
+        </p:txBody>
+      </p:sp>
+    </p:spTree>
+    <p:extLst>
+      <p:ext uri="{BB962C8B-B14F-4D97-AF65-F5344CB8AC3E}">
+        <p14:creationId xmlns:p14="http://schemas.microsoft.com/office/powerpoint/2010/main" val="925450913"/>
+      </p:ext>
+    </p:extLst>
   </p:cSld>
   <p:clrMapOvr>
     <a:masterClrMapping/>
@@ -3561,7 +3653,7 @@
         </p:nvSpPr>
         <p:spPr>
           <a:xfrm>
-            <a:off x="3238500" y="1248237"/>
+            <a:off x="3274285" y="1295448"/>
             <a:ext cx="8953500" cy="1561306"/>
           </a:xfrm>
         </p:spPr>
@@ -4998,13 +5090,22 @@
               <a:buNone/>
             </a:pPr>
             <a:r>
+              <a:rPr lang="en-US" altLang="ru-RU" sz="2000" dirty="0">
+                <a:solidFill>
+                  <a:srgbClr val="AAA9B2"/>
+                </a:solidFill>
+                <a:cs typeface="Times New Roman" panose="02020603050405020304" pitchFamily="18" charset="0"/>
+              </a:rPr>
+              <a:t>2026 </a:t>
+            </a:r>
+            <a:r>
               <a:rPr lang="ru-RU" altLang="ru-RU" sz="2000" dirty="0">
                 <a:solidFill>
                   <a:srgbClr val="AAA9B2"/>
                 </a:solidFill>
                 <a:cs typeface="Times New Roman" panose="02020603050405020304" pitchFamily="18" charset="0"/>
               </a:rPr>
-              <a:t>Город и год защиты</a:t>
+              <a:t>Москва</a:t>
             </a:r>
           </a:p>
         </p:txBody>
@@ -5976,7 +6077,7 @@
         </p:nvSpPr>
         <p:spPr>
           <a:xfrm>
-            <a:off x="1981200" y="274638"/>
+            <a:off x="2063552" y="-31895"/>
             <a:ext cx="7467600" cy="725487"/>
           </a:xfrm>
         </p:spPr>
@@ -6253,7 +6354,7 @@
         </p:nvSpPr>
         <p:spPr>
           <a:xfrm>
-            <a:off x="3719736" y="6046192"/>
+            <a:off x="3719736" y="6307336"/>
             <a:ext cx="4521460" cy="307777"/>
           </a:xfrm>
           <a:prstGeom prst="rect">
@@ -6273,9 +6374,51 @@
               </a:rPr>
               <a:t>Рисунок 3 – Блок-схема работы агента опытного образца</a:t>
             </a:r>
+            <a:endParaRPr lang="ru-RU" sz="1400" dirty="0">
+              <a:highlight>
+                <a:srgbClr val="FFFF00"/>
+              </a:highlight>
+              <a:latin typeface="+mn-lt"/>
+            </a:endParaRPr>
           </a:p>
         </p:txBody>
       </p:sp>
+      <p:pic>
+        <p:nvPicPr>
+          <p:cNvPr id="8" name="Picture 7">
+            <a:extLst>
+              <a:ext uri="{FF2B5EF4-FFF2-40B4-BE49-F238E27FC236}">
+                <a16:creationId xmlns:a16="http://schemas.microsoft.com/office/drawing/2014/main" id="{397CD300-3D13-D66E-858A-479031D5A47D}"/>
+              </a:ext>
+            </a:extLst>
+          </p:cNvPr>
+          <p:cNvPicPr>
+            <a:picLocks noChangeAspect="1"/>
+          </p:cNvPicPr>
+          <p:nvPr/>
+        </p:nvPicPr>
+        <p:blipFill>
+          <a:blip r:embed="rId2">
+            <a:extLst>
+              <a:ext uri="{28A0092B-C50C-407E-A947-70E740481C1C}">
+                <a14:useLocalDpi xmlns:a14="http://schemas.microsoft.com/office/drawing/2010/main" val="0"/>
+              </a:ext>
+            </a:extLst>
+          </a:blip>
+          <a:stretch>
+            <a:fillRect/>
+          </a:stretch>
+        </p:blipFill>
+        <p:spPr>
+          <a:xfrm>
+            <a:off x="3071664" y="612659"/>
+            <a:ext cx="5547519" cy="5775611"/>
+          </a:xfrm>
+          <a:prstGeom prst="rect">
+            <a:avLst/>
+          </a:prstGeom>
+        </p:spPr>
+      </p:pic>
     </p:spTree>
     <p:extLst>
       <p:ext uri="{BB962C8B-B14F-4D97-AF65-F5344CB8AC3E}">
@@ -6601,8 +6744,8 @@
         </p:nvSpPr>
         <p:spPr>
           <a:xfrm>
-            <a:off x="4223792" y="5301208"/>
-            <a:ext cx="4521460" cy="307777"/>
+            <a:off x="3071664" y="4149080"/>
+            <a:ext cx="5544616" cy="307777"/>
           </a:xfrm>
           <a:prstGeom prst="rect">
             <a:avLst/>
@@ -6619,48 +6762,41 @@
               <a:rPr lang="ru-RU" sz="1400" dirty="0">
                 <a:latin typeface="+mn-lt"/>
               </a:rPr>
-              <a:t>А ещё тут будет формат вывода</a:t>
+              <a:t>Рисунок 4 – Формат записи о перехваченом событии доступа</a:t>
             </a:r>
           </a:p>
         </p:txBody>
       </p:sp>
-      <p:sp>
-        <p:nvSpPr>
-          <p:cNvPr id="4" name="TextBox 3">
+      <p:pic>
+        <p:nvPicPr>
+          <p:cNvPr id="6" name="Picture 5">
             <a:extLst>
               <a:ext uri="{FF2B5EF4-FFF2-40B4-BE49-F238E27FC236}">
-                <a16:creationId xmlns:a16="http://schemas.microsoft.com/office/drawing/2014/main" id="{A744DB5E-5E2E-A79F-635E-22A7881E6F84}"/>
+                <a16:creationId xmlns:a16="http://schemas.microsoft.com/office/drawing/2014/main" id="{63CA213A-72D1-DD7A-3CAF-974287511F9F}"/>
               </a:ext>
             </a:extLst>
           </p:cNvPr>
-          <p:cNvSpPr txBox="1"/>
+          <p:cNvPicPr>
+            <a:picLocks noChangeAspect="1"/>
+          </p:cNvPicPr>
           <p:nvPr/>
-        </p:nvSpPr>
+        </p:nvPicPr>
+        <p:blipFill>
+          <a:blip r:embed="rId2"/>
+          <a:stretch>
+            <a:fillRect/>
+          </a:stretch>
+        </p:blipFill>
         <p:spPr>
           <a:xfrm>
-            <a:off x="919808" y="4085456"/>
-            <a:ext cx="4521460" cy="307777"/>
+            <a:off x="2918969" y="2276872"/>
+            <a:ext cx="6354062" cy="1495634"/>
           </a:xfrm>
           <a:prstGeom prst="rect">
             <a:avLst/>
           </a:prstGeom>
-          <a:noFill/>
         </p:spPr>
-        <p:txBody>
-          <a:bodyPr wrap="square" rtlCol="0">
-            <a:spAutoFit/>
-          </a:bodyPr>
-          <a:lstStyle/>
-          <a:p>
-            <a:r>
-              <a:rPr lang="ru-RU" sz="1400" dirty="0">
-                <a:latin typeface="+mn-lt"/>
-              </a:rPr>
-              <a:t>Вот тут будут какие-нибудь листинги кода?????</a:t>
-            </a:r>
-          </a:p>
-        </p:txBody>
-      </p:sp>
+      </p:pic>
     </p:spTree>
     <p:extLst>
       <p:ext uri="{BB962C8B-B14F-4D97-AF65-F5344CB8AC3E}">
@@ -6709,7 +6845,7 @@
         </p:nvSpPr>
         <p:spPr>
           <a:xfrm>
-            <a:off x="1410308" y="188640"/>
+            <a:off x="1410308" y="327249"/>
             <a:ext cx="9371384" cy="725487"/>
           </a:xfrm>
         </p:spPr>
@@ -6976,43 +7112,6 @@
       </p:sp>
       <p:sp>
         <p:nvSpPr>
-          <p:cNvPr id="3" name="TextBox 2">
-            <a:extLst>
-              <a:ext uri="{FF2B5EF4-FFF2-40B4-BE49-F238E27FC236}">
-                <a16:creationId xmlns:a16="http://schemas.microsoft.com/office/drawing/2014/main" id="{B3C41950-77A6-CCB6-210C-0D34263A6521}"/>
-              </a:ext>
-            </a:extLst>
-          </p:cNvPr>
-          <p:cNvSpPr txBox="1"/>
-          <p:nvPr/>
-        </p:nvSpPr>
-        <p:spPr>
-          <a:xfrm>
-            <a:off x="695325" y="5799522"/>
-            <a:ext cx="4521460" cy="307777"/>
-          </a:xfrm>
-          <a:prstGeom prst="rect">
-            <a:avLst/>
-          </a:prstGeom>
-          <a:noFill/>
-        </p:spPr>
-        <p:txBody>
-          <a:bodyPr wrap="square" rtlCol="0">
-            <a:spAutoFit/>
-          </a:bodyPr>
-          <a:lstStyle/>
-          <a:p>
-            <a:r>
-              <a:rPr lang="ru-RU" sz="1400" dirty="0">
-                <a:latin typeface="+mn-lt"/>
-              </a:rPr>
-              <a:t>результаты для каждого запуска</a:t>
-            </a:r>
-          </a:p>
-        </p:txBody>
-      </p:sp>
-      <p:sp>
-        <p:nvSpPr>
           <p:cNvPr id="8" name="object 3">
             <a:extLst>
               <a:ext uri="{FF2B5EF4-FFF2-40B4-BE49-F238E27FC236}">
@@ -7025,8 +7124,8 @@
         </p:nvSpPr>
         <p:spPr>
           <a:xfrm>
-            <a:off x="687870" y="1075471"/>
-            <a:ext cx="9928225" cy="4230004"/>
+            <a:off x="479376" y="1124744"/>
+            <a:ext cx="10873283" cy="4753224"/>
           </a:xfrm>
           <a:prstGeom prst="rect">
             <a:avLst/>
@@ -7038,7 +7137,7 @@
           </a:bodyPr>
           <a:lstStyle/>
           <a:p>
-            <a:pPr marL="285115" marR="10160" indent="-273050" algn="just">
+            <a:pPr marL="469265" marR="10160" indent="-457200" algn="just">
               <a:spcBef>
                 <a:spcPts val="600"/>
               </a:spcBef>
@@ -7046,22 +7145,89 @@
                 <a:srgbClr val="4F81BC"/>
               </a:buClr>
               <a:buSzPct val="69230"/>
-              <a:buFont typeface="Wingdings"/>
-              <a:buChar char=""/>
+              <a:buFont typeface="+mj-lt"/>
+              <a:buAutoNum type="arabicPeriod"/>
               <a:tabLst>
                 <a:tab pos="285115" algn="l"/>
               </a:tabLst>
             </a:pPr>
             <a:r>
+              <a:rPr lang="ru-RU" sz="2400" b="1" dirty="0">
+                <a:latin typeface="Times New Roman"/>
+                <a:cs typeface="Times New Roman"/>
+              </a:rPr>
+              <a:t>Легитимная запись из ожидаемого контекста – </a:t>
+            </a:r>
+            <a:r>
               <a:rPr lang="ru-RU" sz="2400" dirty="0">
                 <a:latin typeface="Times New Roman"/>
                 <a:cs typeface="Times New Roman"/>
               </a:rPr>
-              <a:t>легитимную запись из ожидаемого контекста --- обращение к области из участка кода, которому разрешено её изменять до фиксации области как неизменяемой; сценарий проверяет отсутствие ложных срабатываний на законном пути исполнения;</a:t>
-            </a:r>
+              <a:t>обращение к области из участка кода, которому разрешено её изменять</a:t>
+            </a:r>
+            <a:r>
+              <a:rPr lang="en-US" sz="2400" dirty="0">
+                <a:latin typeface="Times New Roman"/>
+                <a:cs typeface="Times New Roman"/>
+              </a:rPr>
+              <a:t>;</a:t>
+            </a:r>
+            <a:r>
+              <a:rPr lang="ru-RU" sz="2400" dirty="0">
+                <a:latin typeface="Times New Roman"/>
+                <a:cs typeface="Times New Roman"/>
+              </a:rPr>
+              <a:t> Переменная </a:t>
+            </a:r>
+            <a:r>
+              <a:rPr lang="en-US" sz="2400" dirty="0" err="1">
+                <a:latin typeface="Times New Roman"/>
+                <a:cs typeface="Times New Roman"/>
+              </a:rPr>
+              <a:t>critical_flag</a:t>
+            </a:r>
+            <a:r>
+              <a:rPr lang="en-US" sz="2400" dirty="0">
+                <a:latin typeface="Times New Roman"/>
+                <a:cs typeface="Times New Roman"/>
+              </a:rPr>
+              <a:t> </a:t>
+            </a:r>
+            <a:r>
+              <a:rPr lang="ru-RU" sz="2400" dirty="0">
+                <a:latin typeface="Times New Roman"/>
+                <a:cs typeface="Times New Roman"/>
+              </a:rPr>
+              <a:t>инициализируется из функции </a:t>
+            </a:r>
+            <a:r>
+              <a:rPr lang="en-US" sz="2400" dirty="0">
+                <a:latin typeface="Times New Roman"/>
+                <a:cs typeface="Times New Roman"/>
+              </a:rPr>
+              <a:t>main</a:t>
+            </a:r>
+            <a:r>
+              <a:rPr lang="ru-RU" sz="2400" dirty="0">
+                <a:latin typeface="Times New Roman"/>
+                <a:cs typeface="Times New Roman"/>
+              </a:rPr>
+              <a:t>;</a:t>
+            </a:r>
+            <a:r>
+              <a:rPr lang="en-US" sz="2400" dirty="0">
+                <a:latin typeface="Times New Roman"/>
+                <a:cs typeface="Times New Roman"/>
+              </a:rPr>
+              <a:t> </a:t>
+            </a:r>
+            <a:endParaRPr lang="ru-RU" sz="2400" dirty="0">
+              <a:latin typeface="Times New Roman"/>
+              <a:cs typeface="Times New Roman"/>
+            </a:endParaRPr>
           </a:p>
           <a:p>
-            <a:pPr marL="285115" marR="10160" indent="-273050" algn="just">
+            <a:pPr marL="469265" marR="10160" indent="-457200" algn="just">
               <a:spcBef>
                 <a:spcPts val="600"/>
               </a:spcBef>
@@ -7069,22 +7235,29 @@
                 <a:srgbClr val="4F81BC"/>
               </a:buClr>
               <a:buSzPct val="69230"/>
-              <a:buFont typeface="Wingdings"/>
-              <a:buChar char=""/>
+              <a:buFont typeface="+mj-lt"/>
+              <a:buAutoNum type="arabicPeriod"/>
               <a:tabLst>
                 <a:tab pos="285115" algn="l"/>
               </a:tabLst>
             </a:pPr>
             <a:r>
+              <a:rPr lang="ru-RU" sz="2400" b="1" dirty="0">
+                <a:latin typeface="Times New Roman"/>
+                <a:cs typeface="Times New Roman"/>
+              </a:rPr>
+              <a:t>Запись из постороннего модуля – </a:t>
+            </a:r>
+            <a:r>
               <a:rPr lang="ru-RU" sz="2400" dirty="0">
                 <a:latin typeface="Times New Roman"/>
                 <a:cs typeface="Times New Roman"/>
               </a:rPr>
-              <a:t>запись из постороннего модуля --- обращение на запись из модуля, которому изменять область не положено; сценарий проверяет корректность отлова и атрибуцию на уровне модуля-инициатора;</a:t>
+              <a:t>обращение на запись из динамической библиотеки, которой изменять область не положено;</a:t>
             </a:r>
           </a:p>
           <a:p>
-            <a:pPr marL="285115" marR="10160" indent="-273050" algn="just">
+            <a:pPr marL="469265" marR="10160" indent="-457200" algn="just">
               <a:spcBef>
                 <a:spcPts val="600"/>
               </a:spcBef>
@@ -7092,18 +7265,85 @@
                 <a:srgbClr val="4F81BC"/>
               </a:buClr>
               <a:buSzPct val="69230"/>
-              <a:buFont typeface="Wingdings"/>
-              <a:buChar char=""/>
+              <a:buFont typeface="+mj-lt"/>
+              <a:buAutoNum type="arabicPeriod"/>
               <a:tabLst>
                 <a:tab pos="285115" algn="l"/>
               </a:tabLst>
             </a:pPr>
             <a:r>
+              <a:rPr lang="ru-RU" sz="2400" b="1" dirty="0">
+                <a:latin typeface="Times New Roman"/>
+                <a:cs typeface="Times New Roman"/>
+              </a:rPr>
+              <a:t>Запись из посторонней функции того же модуля – </a:t>
+            </a:r>
+            <a:r>
               <a:rPr lang="ru-RU" sz="2400" dirty="0">
                 <a:latin typeface="Times New Roman"/>
                 <a:cs typeface="Times New Roman"/>
               </a:rPr>
-              <a:t>запись из посторонней функции того же модуля --- обращение из участка кода, отличного от легитимного, в пределах одного модуля; сценарий проверяет способность атрибуции различать инициатора на уровне функции;</a:t>
+              <a:t>обращение из участка кода, отличного от легитимного, в пределах одного модуля;</a:t>
+            </a:r>
+          </a:p>
+          <a:p>
+            <a:pPr marL="469265" marR="10160" indent="-457200" algn="just">
+              <a:spcBef>
+                <a:spcPts val="600"/>
+              </a:spcBef>
+              <a:buClr>
+                <a:srgbClr val="4F81BC"/>
+              </a:buClr>
+              <a:buSzPct val="69230"/>
+              <a:buFont typeface="+mj-lt"/>
+              <a:buAutoNum type="arabicPeriod"/>
+              <a:tabLst>
+                <a:tab pos="285115" algn="l"/>
+              </a:tabLst>
+            </a:pPr>
+            <a:r>
+              <a:rPr lang="ru-RU" sz="2400" b="1" dirty="0">
+                <a:latin typeface="Times New Roman"/>
+                <a:cs typeface="Times New Roman"/>
+              </a:rPr>
+              <a:t>Запись вследствие переполнения соседнего буфера – </a:t>
+            </a:r>
+            <a:r>
+              <a:rPr lang="ru-RU" sz="2400" dirty="0">
+                <a:latin typeface="Times New Roman"/>
+                <a:cs typeface="Times New Roman"/>
+              </a:rPr>
+              <a:t>модификацию охраняемой области в результате выхода записи за границы смежного буфера;</a:t>
+            </a:r>
+          </a:p>
+          <a:p>
+            <a:pPr marL="469265" marR="10160" indent="-457200" algn="just">
+              <a:spcBef>
+                <a:spcPts val="600"/>
+              </a:spcBef>
+              <a:buClr>
+                <a:srgbClr val="4F81BC"/>
+              </a:buClr>
+              <a:buSzPct val="69230"/>
+              <a:buFont typeface="+mj-lt"/>
+              <a:buAutoNum type="arabicPeriod"/>
+              <a:tabLst>
+                <a:tab pos="285115" algn="l"/>
+              </a:tabLst>
+            </a:pPr>
+            <a:r>
+              <a:rPr lang="ru-RU" sz="2400" b="1" dirty="0">
+                <a:latin typeface="Times New Roman"/>
+                <a:cs typeface="Times New Roman"/>
+              </a:rPr>
+              <a:t>Контрольное обращение к незащищённой области – </a:t>
+            </a:r>
+            <a:r>
+              <a:rPr lang="ru-RU" sz="2400" dirty="0">
+                <a:latin typeface="Times New Roman"/>
+                <a:cs typeface="Times New Roman"/>
+              </a:rPr>
+              <a:t>обращение к области, не помещённой под охрану; сценарий проверяет избирательность контроля, при которой подобное обращение не должно порождать событий.</a:t>
             </a:r>
           </a:p>
         </p:txBody>
@@ -7156,7 +7396,7 @@
         </p:nvSpPr>
         <p:spPr>
           <a:xfrm>
-            <a:off x="1252166" y="188640"/>
+            <a:off x="1410308" y="118282"/>
             <a:ext cx="9371384" cy="725487"/>
           </a:xfrm>
         </p:spPr>
@@ -7181,252 +7421,10 @@
       </p:sp>
       <p:sp>
         <p:nvSpPr>
-          <p:cNvPr id="17411" name="Номер слайда 3">
+          <p:cNvPr id="17" name="object 4">
             <a:extLst>
               <a:ext uri="{FF2B5EF4-FFF2-40B4-BE49-F238E27FC236}">
-                <a16:creationId xmlns:a16="http://schemas.microsoft.com/office/drawing/2014/main" id="{9128E344-CB6D-30B1-5D0C-2C232C7371E1}"/>
-              </a:ext>
-            </a:extLst>
-          </p:cNvPr>
-          <p:cNvSpPr>
-            <a:spLocks noGrp="1"/>
-          </p:cNvSpPr>
-          <p:nvPr>
-            <p:ph type="sldNum" sz="quarter" idx="10"/>
-          </p:nvPr>
-        </p:nvSpPr>
-        <p:spPr bwMode="auto">
-          <a:noFill/>
-          <a:extLst>
-            <a:ext uri="{909E8E84-426E-40DD-AFC4-6F175D3DCCD1}">
-              <a14:hiddenFill xmlns:a14="http://schemas.microsoft.com/office/drawing/2010/main">
-                <a:solidFill>
-                  <a:srgbClr val="FFFFFF"/>
-                </a:solidFill>
-              </a14:hiddenFill>
-            </a:ext>
-            <a:ext uri="{91240B29-F687-4F45-9708-019B960494DF}">
-              <a14:hiddenLine xmlns:a14="http://schemas.microsoft.com/office/drawing/2010/main" w="9525">
-                <a:solidFill>
-                  <a:srgbClr val="000000"/>
-                </a:solidFill>
-                <a:miter lim="800000"/>
-                <a:headEnd/>
-                <a:tailEnd/>
-              </a14:hiddenLine>
-            </a:ext>
-          </a:extLst>
-        </p:spPr>
-        <p:txBody>
-          <a:bodyPr/>
-          <a:lstStyle>
-            <a:lvl1pPr>
-              <a:spcBef>
-                <a:spcPts val="600"/>
-              </a:spcBef>
-              <a:buClr>
-                <a:schemeClr val="accent1"/>
-              </a:buClr>
-              <a:buSzPct val="70000"/>
-              <a:buFont typeface="Wingdings" pitchFamily="2" charset="2"/>
-              <a:buChar char=""/>
-              <a:defRPr sz="2400">
-                <a:solidFill>
-                  <a:schemeClr val="tx1"/>
-                </a:solidFill>
-                <a:latin typeface="Times New Roman" panose="02020603050405020304" pitchFamily="18" charset="0"/>
-              </a:defRPr>
-            </a:lvl1pPr>
-            <a:lvl2pPr marL="742950" indent="-285750">
-              <a:spcBef>
-                <a:spcPct val="20000"/>
-              </a:spcBef>
-              <a:buClr>
-                <a:schemeClr val="accent1"/>
-              </a:buClr>
-              <a:buSzPct val="80000"/>
-              <a:buFont typeface="Wingdings 2" pitchFamily="2" charset="2"/>
-              <a:buChar char=""/>
-              <a:defRPr sz="2100">
-                <a:solidFill>
-                  <a:schemeClr val="tx1"/>
-                </a:solidFill>
-                <a:latin typeface="Times New Roman" panose="02020603050405020304" pitchFamily="18" charset="0"/>
-              </a:defRPr>
-            </a:lvl2pPr>
-            <a:lvl3pPr marL="1143000" indent="-228600">
-              <a:spcBef>
-                <a:spcPct val="20000"/>
-              </a:spcBef>
-              <a:buClr>
-                <a:srgbClr val="4471A6"/>
-              </a:buClr>
-              <a:buSzPct val="60000"/>
-              <a:buFont typeface="Wingdings" pitchFamily="2" charset="2"/>
-              <a:buChar char=""/>
-              <a:defRPr sz="2400">
-                <a:solidFill>
-                  <a:schemeClr val="tx1"/>
-                </a:solidFill>
-                <a:latin typeface="Times New Roman" panose="02020603050405020304" pitchFamily="18" charset="0"/>
-              </a:defRPr>
-            </a:lvl3pPr>
-            <a:lvl4pPr marL="1600200" indent="-228600">
-              <a:spcBef>
-                <a:spcPct val="20000"/>
-              </a:spcBef>
-              <a:buClr>
-                <a:srgbClr val="B2C1DB"/>
-              </a:buClr>
-              <a:buSzPct val="60000"/>
-              <a:buFont typeface="Wingdings" pitchFamily="2" charset="2"/>
-              <a:buChar char=""/>
-              <a:defRPr sz="2000">
-                <a:solidFill>
-                  <a:schemeClr val="tx1"/>
-                </a:solidFill>
-                <a:latin typeface="Times New Roman" panose="02020603050405020304" pitchFamily="18" charset="0"/>
-              </a:defRPr>
-            </a:lvl4pPr>
-            <a:lvl5pPr marL="2057400" indent="-228600">
-              <a:spcBef>
-                <a:spcPct val="20000"/>
-              </a:spcBef>
-              <a:buClr>
-                <a:srgbClr val="DCB3B2"/>
-              </a:buClr>
-              <a:buSzPct val="68000"/>
-              <a:buFont typeface="Wingdings 2" pitchFamily="2" charset="2"/>
-              <a:buChar char=""/>
-              <a:defRPr sz="1600">
-                <a:solidFill>
-                  <a:schemeClr val="tx1"/>
-                </a:solidFill>
-                <a:latin typeface="Times New Roman" panose="02020603050405020304" pitchFamily="18" charset="0"/>
-              </a:defRPr>
-            </a:lvl5pPr>
-            <a:lvl6pPr marL="2514600" indent="-228600" eaLnBrk="0" fontAlgn="base" hangingPunct="0">
-              <a:spcBef>
-                <a:spcPct val="20000"/>
-              </a:spcBef>
-              <a:spcAft>
-                <a:spcPct val="0"/>
-              </a:spcAft>
-              <a:buClr>
-                <a:srgbClr val="DCB3B2"/>
-              </a:buClr>
-              <a:buSzPct val="68000"/>
-              <a:buFont typeface="Wingdings 2" pitchFamily="2" charset="2"/>
-              <a:buChar char=""/>
-              <a:defRPr sz="1600">
-                <a:solidFill>
-                  <a:schemeClr val="tx1"/>
-                </a:solidFill>
-                <a:latin typeface="Times New Roman" panose="02020603050405020304" pitchFamily="18" charset="0"/>
-              </a:defRPr>
-            </a:lvl6pPr>
-            <a:lvl7pPr marL="2971800" indent="-228600" eaLnBrk="0" fontAlgn="base" hangingPunct="0">
-              <a:spcBef>
-                <a:spcPct val="20000"/>
-              </a:spcBef>
-              <a:spcAft>
-                <a:spcPct val="0"/>
-              </a:spcAft>
-              <a:buClr>
-                <a:srgbClr val="DCB3B2"/>
-              </a:buClr>
-              <a:buSzPct val="68000"/>
-              <a:buFont typeface="Wingdings 2" pitchFamily="2" charset="2"/>
-              <a:buChar char=""/>
-              <a:defRPr sz="1600">
-                <a:solidFill>
-                  <a:schemeClr val="tx1"/>
-                </a:solidFill>
-                <a:latin typeface="Times New Roman" panose="02020603050405020304" pitchFamily="18" charset="0"/>
-              </a:defRPr>
-            </a:lvl7pPr>
-            <a:lvl8pPr marL="3429000" indent="-228600" eaLnBrk="0" fontAlgn="base" hangingPunct="0">
-              <a:spcBef>
-                <a:spcPct val="20000"/>
-              </a:spcBef>
-              <a:spcAft>
-                <a:spcPct val="0"/>
-              </a:spcAft>
-              <a:buClr>
-                <a:srgbClr val="DCB3B2"/>
-              </a:buClr>
-              <a:buSzPct val="68000"/>
-              <a:buFont typeface="Wingdings 2" pitchFamily="2" charset="2"/>
-              <a:buChar char=""/>
-              <a:defRPr sz="1600">
-                <a:solidFill>
-                  <a:schemeClr val="tx1"/>
-                </a:solidFill>
-                <a:latin typeface="Times New Roman" panose="02020603050405020304" pitchFamily="18" charset="0"/>
-              </a:defRPr>
-            </a:lvl8pPr>
-            <a:lvl9pPr marL="3886200" indent="-228600" eaLnBrk="0" fontAlgn="base" hangingPunct="0">
-              <a:spcBef>
-                <a:spcPct val="20000"/>
-              </a:spcBef>
-              <a:spcAft>
-                <a:spcPct val="0"/>
-              </a:spcAft>
-              <a:buClr>
-                <a:srgbClr val="DCB3B2"/>
-              </a:buClr>
-              <a:buSzPct val="68000"/>
-              <a:buFont typeface="Wingdings 2" pitchFamily="2" charset="2"/>
-              <a:buChar char=""/>
-              <a:defRPr sz="1600">
-                <a:solidFill>
-                  <a:schemeClr val="tx1"/>
-                </a:solidFill>
-                <a:latin typeface="Times New Roman" panose="02020603050405020304" pitchFamily="18" charset="0"/>
-              </a:defRPr>
-            </a:lvl9pPr>
-          </a:lstStyle>
-          <a:p>
-            <a:pPr>
-              <a:spcBef>
-                <a:spcPct val="0"/>
-              </a:spcBef>
-              <a:buClrTx/>
-              <a:buSzTx/>
-              <a:buFontTx/>
-              <a:buNone/>
-            </a:pPr>
-            <a:fld id="{BD0BA0DF-D6E9-5943-8648-144AA2B3FB25}" type="slidenum">
-              <a:rPr lang="en-US" altLang="ru-RU" sz="1400">
-                <a:solidFill>
-                  <a:srgbClr val="FFFFFF"/>
-                </a:solidFill>
-              </a:rPr>
-              <a:pPr>
-                <a:spcBef>
-                  <a:spcPct val="0"/>
-                </a:spcBef>
-                <a:buClrTx/>
-                <a:buSzTx/>
-                <a:buFontTx/>
-                <a:buNone/>
-              </a:pPr>
-              <a:t>13</a:t>
-            </a:fld>
-            <a:endParaRPr lang="en-US" altLang="ru-RU" sz="1400">
-              <a:solidFill>
-                <a:srgbClr val="FFFFFF"/>
-              </a:solidFill>
-            </a:endParaRPr>
-          </a:p>
-        </p:txBody>
-      </p:sp>
-      <p:sp>
-        <p:nvSpPr>
-          <p:cNvPr id="3" name="TextBox 2">
-            <a:extLst>
-              <a:ext uri="{FF2B5EF4-FFF2-40B4-BE49-F238E27FC236}">
-                <a16:creationId xmlns:a16="http://schemas.microsoft.com/office/drawing/2014/main" id="{B3C41950-77A6-CCB6-210C-0D34263A6521}"/>
+                <a16:creationId xmlns:a16="http://schemas.microsoft.com/office/drawing/2014/main" id="{734676EB-CF10-21AE-55B1-F0A3F83A6A2E}"/>
               </a:ext>
             </a:extLst>
           </p:cNvPr>
@@ -7435,127 +7433,534 @@
         </p:nvSpPr>
         <p:spPr>
           <a:xfrm>
-            <a:off x="695325" y="5799522"/>
-            <a:ext cx="4521460" cy="307777"/>
-          </a:xfrm>
-          <a:prstGeom prst="rect">
-            <a:avLst/>
-          </a:prstGeom>
-          <a:noFill/>
-        </p:spPr>
-        <p:txBody>
-          <a:bodyPr wrap="square" rtlCol="0">
-            <a:spAutoFit/>
-          </a:bodyPr>
-          <a:lstStyle/>
-          <a:p>
-            <a:r>
-              <a:rPr lang="ru-RU" sz="1400" dirty="0">
-                <a:latin typeface="+mn-lt"/>
-              </a:rPr>
-              <a:t>результаты для каждого запуска</a:t>
-            </a:r>
-          </a:p>
-        </p:txBody>
-      </p:sp>
-      <p:sp>
-        <p:nvSpPr>
-          <p:cNvPr id="4" name="object 3">
-            <a:extLst>
-              <a:ext uri="{FF2B5EF4-FFF2-40B4-BE49-F238E27FC236}">
-                <a16:creationId xmlns:a16="http://schemas.microsoft.com/office/drawing/2014/main" id="{C30A61B9-BBAA-083A-BB53-2D9B41C7C274}"/>
-              </a:ext>
-            </a:extLst>
-          </p:cNvPr>
-          <p:cNvSpPr txBox="1"/>
-          <p:nvPr/>
-        </p:nvSpPr>
-        <p:spPr>
-          <a:xfrm>
-            <a:off x="973745" y="1052736"/>
-            <a:ext cx="9928225" cy="3122009"/>
+            <a:off x="1559496" y="1124744"/>
+            <a:ext cx="7929827" cy="258404"/>
           </a:xfrm>
           <a:prstGeom prst="rect">
             <a:avLst/>
           </a:prstGeom>
         </p:spPr>
         <p:txBody>
-          <a:bodyPr vert="horz" wrap="square" lIns="0" tIns="13335" rIns="0" bIns="0" rtlCol="0">
+          <a:bodyPr vert="horz" wrap="square" lIns="0" tIns="12065" rIns="0" bIns="0" rtlCol="0">
             <a:spAutoFit/>
           </a:bodyPr>
           <a:lstStyle/>
           <a:p>
-            <a:pPr marL="285115" marR="10160" indent="-273050" algn="just">
-              <a:spcBef>
-                <a:spcPts val="600"/>
-              </a:spcBef>
-              <a:buClr>
-                <a:srgbClr val="4F81BC"/>
-              </a:buClr>
-              <a:buSzPct val="69230"/>
-              <a:buFont typeface="Wingdings"/>
-              <a:buChar char=""/>
-              <a:tabLst>
-                <a:tab pos="285115" algn="l"/>
-              </a:tabLst>
+            <a:pPr marL="12700">
+              <a:lnSpc>
+                <a:spcPct val="100000"/>
+              </a:lnSpc>
+              <a:spcBef>
+                <a:spcPts val="95"/>
+              </a:spcBef>
             </a:pPr>
             <a:r>
-              <a:rPr lang="ru-RU" sz="2400" dirty="0">
-                <a:latin typeface="Times New Roman"/>
-                <a:cs typeface="Times New Roman"/>
-              </a:rPr>
-              <a:t>запись вследствие переполнения соседнего буфера --- модификацию охраняемой области в результате выхода записи за границы смежного буфера; сценарий воспроизводит типовой механизм эксплуатации;</a:t>
-            </a:r>
-          </a:p>
-          <a:p>
-            <a:pPr marL="285115" marR="10160" indent="-273050" algn="just">
-              <a:spcBef>
-                <a:spcPts val="600"/>
-              </a:spcBef>
-              <a:buClr>
-                <a:srgbClr val="4F81BC"/>
-              </a:buClr>
-              <a:buSzPct val="69230"/>
-              <a:buFont typeface="Wingdings"/>
-              <a:buChar char=""/>
-              <a:tabLst>
-                <a:tab pos="285115" algn="l"/>
-              </a:tabLst>
-            </a:pPr>
-            <a:r>
-              <a:rPr lang="ru-RU" sz="2400" dirty="0">
-                <a:latin typeface="Times New Roman"/>
-                <a:cs typeface="Times New Roman"/>
-              </a:rPr>
-              <a:t>контрольное обращение к незащищённой области --- обращение к области, не помещённой под охрану; сценарий проверяет избирательность контроля, при которой подобное обращение не должно порождать событий.</a:t>
-            </a:r>
-          </a:p>
-          <a:p>
-            <a:pPr marL="285115" marR="10160" indent="-273050" algn="just">
-              <a:spcBef>
-                <a:spcPts val="600"/>
-              </a:spcBef>
-              <a:buClr>
-                <a:srgbClr val="4F81BC"/>
-              </a:buClr>
-              <a:buSzPct val="69230"/>
-              <a:buFont typeface="Wingdings"/>
-              <a:buChar char=""/>
-              <a:tabLst>
-                <a:tab pos="285115" algn="l"/>
-              </a:tabLst>
-            </a:pPr>
-            <a:endParaRPr lang="ru-RU" sz="2400" dirty="0">
+              <a:rPr lang="ru-RU" sz="1600" spc="-10" dirty="0">
+                <a:latin typeface="Times New Roman"/>
+                <a:cs typeface="Times New Roman"/>
+              </a:rPr>
+              <a:t>Таблица</a:t>
+            </a:r>
+            <a:r>
+              <a:rPr sz="1600" spc="-15" dirty="0">
+                <a:latin typeface="Times New Roman"/>
+                <a:cs typeface="Times New Roman"/>
+              </a:rPr>
+              <a:t> </a:t>
+            </a:r>
+            <a:r>
+              <a:rPr lang="ru-RU" sz="1600" spc="-15" dirty="0">
+                <a:latin typeface="Times New Roman"/>
+                <a:cs typeface="Times New Roman"/>
+              </a:rPr>
+              <a:t>2</a:t>
+            </a:r>
+            <a:r>
+              <a:rPr sz="1600" spc="-40" dirty="0">
+                <a:latin typeface="Times New Roman"/>
+                <a:cs typeface="Times New Roman"/>
+              </a:rPr>
+              <a:t> </a:t>
+            </a:r>
+            <a:r>
+              <a:rPr sz="1600" dirty="0">
+                <a:latin typeface="Times New Roman"/>
+                <a:cs typeface="Times New Roman"/>
+              </a:rPr>
+              <a:t>–</a:t>
+            </a:r>
+            <a:r>
+              <a:rPr sz="1600" spc="-35" dirty="0">
+                <a:latin typeface="Times New Roman"/>
+                <a:cs typeface="Times New Roman"/>
+              </a:rPr>
+              <a:t> </a:t>
+            </a:r>
+            <a:r>
+              <a:rPr lang="ru-RU" sz="1600" spc="-35" dirty="0">
+                <a:latin typeface="Times New Roman"/>
+                <a:cs typeface="Times New Roman"/>
+              </a:rPr>
+              <a:t>Результаты валидации</a:t>
+            </a:r>
+            <a:endParaRPr sz="1600" dirty="0">
               <a:latin typeface="Times New Roman"/>
               <a:cs typeface="Times New Roman"/>
             </a:endParaRPr>
           </a:p>
         </p:txBody>
       </p:sp>
+      <p:graphicFrame>
+        <p:nvGraphicFramePr>
+          <p:cNvPr id="18" name="Table 17">
+            <a:extLst>
+              <a:ext uri="{FF2B5EF4-FFF2-40B4-BE49-F238E27FC236}">
+                <a16:creationId xmlns:a16="http://schemas.microsoft.com/office/drawing/2014/main" id="{C984B5C1-73F4-0849-0D4F-F149666CE247}"/>
+              </a:ext>
+            </a:extLst>
+          </p:cNvPr>
+          <p:cNvGraphicFramePr>
+            <a:graphicFrameLocks noGrp="1"/>
+          </p:cNvGraphicFramePr>
+          <p:nvPr>
+            <p:extLst>
+              <p:ext uri="{D42A27DB-BD31-4B8C-83A1-F6EECF244321}">
+                <p14:modId xmlns:p14="http://schemas.microsoft.com/office/powerpoint/2010/main" val="2081148393"/>
+              </p:ext>
+            </p:extLst>
+          </p:nvPr>
+        </p:nvGraphicFramePr>
+        <p:xfrm>
+          <a:off x="1127448" y="1556792"/>
+          <a:ext cx="9510228" cy="4104238"/>
+        </p:xfrm>
+        <a:graphic>
+          <a:graphicData uri="http://schemas.openxmlformats.org/drawingml/2006/table">
+            <a:tbl>
+              <a:tblPr firstRow="1" bandRow="1">
+                <a:tableStyleId>{5C22544A-7EE6-4342-B048-85BDC9FD1C3A}</a:tableStyleId>
+              </a:tblPr>
+              <a:tblGrid>
+                <a:gridCol w="2377557">
+                  <a:extLst>
+                    <a:ext uri="{9D8B030D-6E8A-4147-A177-3AD203B41FA5}">
+                      <a16:colId xmlns:a16="http://schemas.microsoft.com/office/drawing/2014/main" val="3229350292"/>
+                    </a:ext>
+                  </a:extLst>
+                </a:gridCol>
+                <a:gridCol w="2377557">
+                  <a:extLst>
+                    <a:ext uri="{9D8B030D-6E8A-4147-A177-3AD203B41FA5}">
+                      <a16:colId xmlns:a16="http://schemas.microsoft.com/office/drawing/2014/main" val="854898450"/>
+                    </a:ext>
+                  </a:extLst>
+                </a:gridCol>
+                <a:gridCol w="2377557">
+                  <a:extLst>
+                    <a:ext uri="{9D8B030D-6E8A-4147-A177-3AD203B41FA5}">
+                      <a16:colId xmlns:a16="http://schemas.microsoft.com/office/drawing/2014/main" val="2896316920"/>
+                    </a:ext>
+                  </a:extLst>
+                </a:gridCol>
+                <a:gridCol w="2377557">
+                  <a:extLst>
+                    <a:ext uri="{9D8B030D-6E8A-4147-A177-3AD203B41FA5}">
+                      <a16:colId xmlns:a16="http://schemas.microsoft.com/office/drawing/2014/main" val="863946790"/>
+                    </a:ext>
+                  </a:extLst>
+                </a:gridCol>
+              </a:tblGrid>
+              <a:tr h="442158">
+                <a:tc>
+                  <a:txBody>
+                    <a:bodyPr/>
+                    <a:lstStyle/>
+                    <a:p>
+                      <a:pPr algn="ctr"/>
+                      <a:r>
+                        <a:rPr lang="ru-RU" dirty="0"/>
+                        <a:t>Сценарий</a:t>
+                      </a:r>
+                    </a:p>
+                  </a:txBody>
+                  <a:tcPr/>
+                </a:tc>
+                <a:tc>
+                  <a:txBody>
+                    <a:bodyPr/>
+                    <a:lstStyle/>
+                    <a:p>
+                      <a:pPr algn="ctr"/>
+                      <a:r>
+                        <a:rPr lang="ru-RU" dirty="0"/>
+                        <a:t>Проверяет</a:t>
+                      </a:r>
+                    </a:p>
+                  </a:txBody>
+                  <a:tcPr/>
+                </a:tc>
+                <a:tc>
+                  <a:txBody>
+                    <a:bodyPr/>
+                    <a:lstStyle/>
+                    <a:p>
+                      <a:pPr algn="ctr"/>
+                      <a:r>
+                        <a:rPr lang="ru-RU" dirty="0"/>
+                        <a:t>Ожидание</a:t>
+                      </a:r>
+                    </a:p>
+                  </a:txBody>
+                  <a:tcPr/>
+                </a:tc>
+                <a:tc>
+                  <a:txBody>
+                    <a:bodyPr/>
+                    <a:lstStyle/>
+                    <a:p>
+                      <a:pPr algn="ctr"/>
+                      <a:r>
+                        <a:rPr lang="ru-RU" dirty="0"/>
+                        <a:t>Фактически</a:t>
+                      </a:r>
+                    </a:p>
+                  </a:txBody>
+                  <a:tcPr/>
+                </a:tc>
+                <a:extLst>
+                  <a:ext uri="{0D108BD9-81ED-4DB2-BD59-A6C34878D82A}">
+                    <a16:rowId xmlns:a16="http://schemas.microsoft.com/office/drawing/2014/main" val="2969738081"/>
+                  </a:ext>
+                </a:extLst>
+              </a:tr>
+              <a:tr h="763177">
+                <a:tc>
+                  <a:txBody>
+                    <a:bodyPr/>
+                    <a:lstStyle/>
+                    <a:p>
+                      <a:pPr algn="ctr"/>
+                      <a:r>
+                        <a:rPr lang="ru-RU" dirty="0"/>
+                        <a:t>Легетимная запись</a:t>
+                      </a:r>
+                    </a:p>
+                  </a:txBody>
+                  <a:tcPr/>
+                </a:tc>
+                <a:tc>
+                  <a:txBody>
+                    <a:bodyPr/>
+                    <a:lstStyle/>
+                    <a:p>
+                      <a:pPr algn="ctr"/>
+                      <a:r>
+                        <a:rPr lang="ru-RU" dirty="0"/>
+                        <a:t>Нет ложных срабатываний</a:t>
+                      </a:r>
+                    </a:p>
+                  </a:txBody>
+                  <a:tcPr/>
+                </a:tc>
+                <a:tc>
+                  <a:txBody>
+                    <a:bodyPr/>
+                    <a:lstStyle/>
+                    <a:p>
+                      <a:pPr algn="ctr"/>
+                      <a:r>
+                        <a:rPr lang="ru-RU" dirty="0"/>
+                        <a:t>Нет события (с опцией </a:t>
+                      </a:r>
+                      <a:r>
+                        <a:rPr lang="en-US" dirty="0"/>
+                        <a:t>--allow)</a:t>
+                      </a:r>
+                      <a:endParaRPr lang="ru-RU" dirty="0"/>
+                    </a:p>
+                  </a:txBody>
+                  <a:tcPr/>
+                </a:tc>
+                <a:tc>
+                  <a:txBody>
+                    <a:bodyPr/>
+                    <a:lstStyle/>
+                    <a:p>
+                      <a:pPr algn="ctr"/>
+                      <a:r>
+                        <a:rPr lang="ru-RU" b="1" dirty="0"/>
+                        <a:t>+</a:t>
+                      </a:r>
+                    </a:p>
+                  </a:txBody>
+                  <a:tcPr/>
+                </a:tc>
+                <a:extLst>
+                  <a:ext uri="{0D108BD9-81ED-4DB2-BD59-A6C34878D82A}">
+                    <a16:rowId xmlns:a16="http://schemas.microsoft.com/office/drawing/2014/main" val="3831913321"/>
+                  </a:ext>
+                </a:extLst>
+              </a:tr>
+              <a:tr h="763177">
+                <a:tc>
+                  <a:txBody>
+                    <a:bodyPr/>
+                    <a:lstStyle/>
+                    <a:p>
+                      <a:pPr algn="ctr"/>
+                      <a:r>
+                        <a:rPr lang="ru-RU" dirty="0"/>
+                        <a:t>Посторонний модуль</a:t>
+                      </a:r>
+                    </a:p>
+                  </a:txBody>
+                  <a:tcPr/>
+                </a:tc>
+                <a:tc>
+                  <a:txBody>
+                    <a:bodyPr/>
+                    <a:lstStyle/>
+                    <a:p>
+                      <a:pPr algn="ctr"/>
+                      <a:r>
+                        <a:rPr lang="ru-RU" dirty="0"/>
+                        <a:t>Атрибуция до модуля</a:t>
+                      </a:r>
+                    </a:p>
+                  </a:txBody>
+                  <a:tcPr/>
+                </a:tc>
+                <a:tc>
+                  <a:txBody>
+                    <a:bodyPr/>
+                    <a:lstStyle/>
+                    <a:p>
+                      <a:pPr algn="ctr"/>
+                      <a:r>
+                        <a:rPr lang="ru-RU" dirty="0"/>
+                        <a:t>Событие, функция из другого модуля</a:t>
+                      </a:r>
+                    </a:p>
+                  </a:txBody>
+                  <a:tcPr/>
+                </a:tc>
+                <a:tc>
+                  <a:txBody>
+                    <a:bodyPr/>
+                    <a:lstStyle/>
+                    <a:p>
+                      <a:pPr algn="ctr"/>
+                      <a:r>
+                        <a:rPr lang="ru-RU" b="1" dirty="0"/>
+                        <a:t>+</a:t>
+                      </a:r>
+                    </a:p>
+                  </a:txBody>
+                  <a:tcPr/>
+                </a:tc>
+                <a:extLst>
+                  <a:ext uri="{0D108BD9-81ED-4DB2-BD59-A6C34878D82A}">
+                    <a16:rowId xmlns:a16="http://schemas.microsoft.com/office/drawing/2014/main" val="538217760"/>
+                  </a:ext>
+                </a:extLst>
+              </a:tr>
+              <a:tr h="732469">
+                <a:tc>
+                  <a:txBody>
+                    <a:bodyPr/>
+                    <a:lstStyle/>
+                    <a:p>
+                      <a:pPr algn="ctr"/>
+                      <a:r>
+                        <a:rPr lang="ru-RU" dirty="0"/>
+                        <a:t>Посторонняя функция</a:t>
+                      </a:r>
+                    </a:p>
+                  </a:txBody>
+                  <a:tcPr/>
+                </a:tc>
+                <a:tc>
+                  <a:txBody>
+                    <a:bodyPr/>
+                    <a:lstStyle/>
+                    <a:p>
+                      <a:pPr algn="ctr"/>
+                      <a:r>
+                        <a:rPr lang="ru-RU" dirty="0"/>
+                        <a:t>Атрибуция до функции</a:t>
+                      </a:r>
+                    </a:p>
+                  </a:txBody>
+                  <a:tcPr/>
+                </a:tc>
+                <a:tc>
+                  <a:txBody>
+                    <a:bodyPr/>
+                    <a:lstStyle/>
+                    <a:p>
+                      <a:pPr algn="ctr"/>
+                      <a:r>
+                        <a:rPr lang="ru-RU" dirty="0"/>
+                        <a:t>Событие, функция из текущего модуля</a:t>
+                      </a:r>
+                    </a:p>
+                  </a:txBody>
+                  <a:tcPr/>
+                </a:tc>
+                <a:tc>
+                  <a:txBody>
+                    <a:bodyPr/>
+                    <a:lstStyle/>
+                    <a:p>
+                      <a:pPr algn="ctr"/>
+                      <a:r>
+                        <a:rPr lang="ru-RU" b="1" dirty="0"/>
+                        <a:t>+</a:t>
+                      </a:r>
+                    </a:p>
+                  </a:txBody>
+                  <a:tcPr/>
+                </a:tc>
+                <a:extLst>
+                  <a:ext uri="{0D108BD9-81ED-4DB2-BD59-A6C34878D82A}">
+                    <a16:rowId xmlns:a16="http://schemas.microsoft.com/office/drawing/2014/main" val="974289879"/>
+                  </a:ext>
+                </a:extLst>
+              </a:tr>
+              <a:tr h="504056">
+                <a:tc>
+                  <a:txBody>
+                    <a:bodyPr/>
+                    <a:lstStyle/>
+                    <a:p>
+                      <a:pPr algn="ctr"/>
+                      <a:r>
+                        <a:rPr lang="ru-RU" dirty="0"/>
+                        <a:t>Переполнение</a:t>
+                      </a:r>
+                    </a:p>
+                  </a:txBody>
+                  <a:tcPr/>
+                </a:tc>
+                <a:tc>
+                  <a:txBody>
+                    <a:bodyPr/>
+                    <a:lstStyle/>
+                    <a:p>
+                      <a:pPr algn="ctr"/>
+                      <a:r>
+                        <a:rPr lang="ru-RU" dirty="0"/>
+                        <a:t>Перехват атаки</a:t>
+                      </a:r>
+                    </a:p>
+                  </a:txBody>
+                  <a:tcPr/>
+                </a:tc>
+                <a:tc>
+                  <a:txBody>
+                    <a:bodyPr/>
+                    <a:lstStyle/>
+                    <a:p>
+                      <a:pPr algn="ctr"/>
+                      <a:r>
+                        <a:rPr lang="ru-RU" dirty="0"/>
+                        <a:t>Событие, флаг изменён</a:t>
+                      </a:r>
+                    </a:p>
+                  </a:txBody>
+                  <a:tcPr/>
+                </a:tc>
+                <a:tc>
+                  <a:txBody>
+                    <a:bodyPr/>
+                    <a:lstStyle/>
+                    <a:p>
+                      <a:pPr algn="ctr"/>
+                      <a:r>
+                        <a:rPr lang="ru-RU" b="1" dirty="0"/>
+                        <a:t>+</a:t>
+                      </a:r>
+                    </a:p>
+                  </a:txBody>
+                  <a:tcPr/>
+                </a:tc>
+                <a:extLst>
+                  <a:ext uri="{0D108BD9-81ED-4DB2-BD59-A6C34878D82A}">
+                    <a16:rowId xmlns:a16="http://schemas.microsoft.com/office/drawing/2014/main" val="532585229"/>
+                  </a:ext>
+                </a:extLst>
+              </a:tr>
+              <a:tr h="763177">
+                <a:tc>
+                  <a:txBody>
+                    <a:bodyPr/>
+                    <a:lstStyle/>
+                    <a:p>
+                      <a:pPr algn="ctr"/>
+                      <a:r>
+                        <a:rPr lang="ru-RU" dirty="0"/>
+                        <a:t>Незащищенная область</a:t>
+                      </a:r>
+                    </a:p>
+                  </a:txBody>
+                  <a:tcPr/>
+                </a:tc>
+                <a:tc>
+                  <a:txBody>
+                    <a:bodyPr/>
+                    <a:lstStyle/>
+                    <a:p>
+                      <a:pPr algn="ctr"/>
+                      <a:r>
+                        <a:rPr lang="ru-RU" dirty="0"/>
+                        <a:t>Избирательность</a:t>
+                      </a:r>
+                    </a:p>
+                  </a:txBody>
+                  <a:tcPr/>
+                </a:tc>
+                <a:tc>
+                  <a:txBody>
+                    <a:bodyPr/>
+                    <a:lstStyle/>
+                    <a:p>
+                      <a:pPr algn="ctr"/>
+                      <a:r>
+                        <a:rPr lang="ru-RU" dirty="0"/>
+                        <a:t>Событий нет</a:t>
+                      </a:r>
+                    </a:p>
+                  </a:txBody>
+                  <a:tcPr/>
+                </a:tc>
+                <a:tc>
+                  <a:txBody>
+                    <a:bodyPr/>
+                    <a:lstStyle/>
+                    <a:p>
+                      <a:pPr algn="ctr"/>
+                      <a:r>
+                        <a:rPr lang="ru-RU" b="1" dirty="0"/>
+                        <a:t>+</a:t>
+                      </a:r>
+                    </a:p>
+                  </a:txBody>
+                  <a:tcPr/>
+                </a:tc>
+                <a:extLst>
+                  <a:ext uri="{0D108BD9-81ED-4DB2-BD59-A6C34878D82A}">
+                    <a16:rowId xmlns:a16="http://schemas.microsoft.com/office/drawing/2014/main" val="4109793134"/>
+                  </a:ext>
+                </a:extLst>
+              </a:tr>
+            </a:tbl>
+          </a:graphicData>
+        </a:graphic>
+      </p:graphicFrame>
     </p:spTree>
     <p:extLst>
       <p:ext uri="{BB962C8B-B14F-4D97-AF65-F5344CB8AC3E}">
-        <p14:creationId xmlns:p14="http://schemas.microsoft.com/office/powerpoint/2010/main" val="2589589396"/>
+        <p14:creationId xmlns:p14="http://schemas.microsoft.com/office/powerpoint/2010/main" val="3190262764"/>
       </p:ext>
     </p:extLst>
   </p:cSld>
@@ -7600,7 +8005,7 @@
         </p:nvSpPr>
         <p:spPr>
           <a:xfrm>
-            <a:off x="1981200" y="274638"/>
+            <a:off x="2362200" y="548680"/>
             <a:ext cx="7467600" cy="725487"/>
           </a:xfrm>
         </p:spPr>
@@ -7880,8 +8285,8 @@
         </p:nvSpPr>
         <p:spPr>
           <a:xfrm>
-            <a:off x="630123" y="926439"/>
-            <a:ext cx="9926320" cy="1472967"/>
+            <a:off x="1132840" y="1844824"/>
+            <a:ext cx="9926320" cy="2396297"/>
           </a:xfrm>
           <a:prstGeom prst="rect">
             <a:avLst/>
@@ -8035,7 +8440,7 @@
               <a:t> </a:t>
             </a:r>
             <a:r>
-              <a:rPr sz="2600" dirty="0">
+              <a:rPr sz="2600" dirty="0" err="1">
                 <a:latin typeface="Times New Roman"/>
                 <a:cs typeface="Times New Roman"/>
               </a:rPr>
@@ -8056,22 +8461,15 @@
               <a:t>семестр</a:t>
             </a:r>
             <a:r>
-              <a:rPr sz="2600" spc="-10" dirty="0">
-                <a:latin typeface="Times New Roman"/>
-                <a:cs typeface="Times New Roman"/>
-              </a:rPr>
-              <a:t>.</a:t>
-            </a:r>
-            <a:endParaRPr lang="ru-RU" sz="2600" spc="-10" dirty="0">
-              <a:latin typeface="Times New Roman"/>
-              <a:cs typeface="Times New Roman"/>
-            </a:endParaRPr>
+              <a:rPr lang="ru-RU" sz="2600" spc="-10" dirty="0">
+                <a:latin typeface="Times New Roman"/>
+                <a:cs typeface="Times New Roman"/>
+              </a:rPr>
+              <a:t>:</a:t>
+            </a:r>
           </a:p>
           <a:p>
-            <a:pPr marL="285115" indent="-272415" algn="just">
-              <a:lnSpc>
-                <a:spcPct val="100000"/>
-              </a:lnSpc>
+            <a:pPr marL="742315" lvl="1" indent="-272415" algn="just">
               <a:spcBef>
                 <a:spcPts val="600"/>
               </a:spcBef>
@@ -8086,22 +8484,69 @@
               </a:tabLst>
             </a:pPr>
             <a:r>
-              <a:rPr lang="en-US" sz="2800" dirty="0">
-                <a:solidFill>
-                  <a:srgbClr val="FF0000"/>
-                </a:solidFill>
-                <a:highlight>
-                  <a:srgbClr val="FFFF00"/>
-                </a:highlight>
-                <a:latin typeface="Times New Roman"/>
-                <a:cs typeface="Times New Roman"/>
-              </a:rPr>
-              <a:t>TODO</a:t>
-            </a:r>
-            <a:endParaRPr lang="ru-RU" sz="2600" dirty="0">
+              <a:rPr lang="ru-RU" sz="2600" spc="-65" dirty="0">
+                <a:latin typeface="Times New Roman"/>
+                <a:cs typeface="Times New Roman"/>
+              </a:rPr>
+              <a:t>разработана методика контекстного мониторинга доступа к памяти</a:t>
+            </a:r>
+            <a:r>
+              <a:rPr lang="en-US" sz="2600" spc="-65" dirty="0">
+                <a:latin typeface="Times New Roman"/>
+                <a:cs typeface="Times New Roman"/>
+              </a:rPr>
+              <a:t>;</a:t>
+            </a:r>
+          </a:p>
+          <a:p>
+            <a:pPr marL="742315" lvl="1" indent="-272415" algn="just">
+              <a:spcBef>
+                <a:spcPts val="600"/>
+              </a:spcBef>
+              <a:buClr>
+                <a:srgbClr val="4F81BC"/>
+              </a:buClr>
+              <a:buSzPct val="69230"/>
+              <a:buFont typeface="Wingdings"/>
+              <a:buChar char=""/>
+              <a:tabLst>
+                <a:tab pos="285115" algn="l"/>
+              </a:tabLst>
+            </a:pPr>
+            <a:r>
+              <a:rPr lang="ru-RU" sz="2600" spc="-65" dirty="0">
+                <a:latin typeface="Times New Roman"/>
+                <a:cs typeface="Times New Roman"/>
+              </a:rPr>
+              <a:t>разработан опытный образец модуля перехвата;</a:t>
+            </a:r>
+            <a:endParaRPr lang="en-US" sz="2600" spc="-65" dirty="0">
               <a:latin typeface="Times New Roman"/>
               <a:cs typeface="Times New Roman"/>
             </a:endParaRPr>
+          </a:p>
+          <a:p>
+            <a:pPr marL="742315" lvl="1" indent="-272415" algn="just">
+              <a:spcBef>
+                <a:spcPts val="600"/>
+              </a:spcBef>
+              <a:buClr>
+                <a:srgbClr val="4F81BC"/>
+              </a:buClr>
+              <a:buSzPct val="69230"/>
+              <a:buFont typeface="Wingdings"/>
+              <a:buChar char=""/>
+              <a:tabLst>
+                <a:tab pos="285115" algn="l"/>
+              </a:tabLst>
+            </a:pPr>
+            <a:r>
+              <a:rPr lang="ru-RU" sz="2600" spc="-65" dirty="0">
+                <a:latin typeface="Times New Roman"/>
+                <a:cs typeface="Times New Roman"/>
+              </a:rPr>
+              <a:t>проведена валидация образца на пяти модельных сценариях.</a:t>
+            </a:r>
           </a:p>
         </p:txBody>
       </p:sp>
@@ -8148,7 +8593,7 @@
         </p:nvSpPr>
         <p:spPr>
           <a:xfrm>
-            <a:off x="1981200" y="274638"/>
+            <a:off x="2362200" y="692696"/>
             <a:ext cx="7467600" cy="725487"/>
           </a:xfrm>
         </p:spPr>
@@ -8444,8 +8889,8 @@
         </p:nvSpPr>
         <p:spPr>
           <a:xfrm>
-            <a:off x="839416" y="1484784"/>
-            <a:ext cx="7194550" cy="520014"/>
+            <a:off x="875420" y="1916832"/>
+            <a:ext cx="10441160" cy="2669320"/>
           </a:xfrm>
           <a:prstGeom prst="rect">
             <a:avLst/>
@@ -8475,33 +8920,90 @@
               </a:tabLst>
             </a:pPr>
             <a:r>
-              <a:rPr sz="2600" dirty="0" err="1">
-                <a:latin typeface="Times New Roman"/>
-                <a:cs typeface="Times New Roman"/>
-              </a:rPr>
-              <a:t>Разработка</a:t>
-            </a:r>
-            <a:r>
               <a:rPr lang="ru-RU" sz="2600" dirty="0">
                 <a:latin typeface="Times New Roman"/>
                 <a:cs typeface="Times New Roman"/>
               </a:rPr>
-              <a:t> </a:t>
-            </a:r>
-            <a:r>
-              <a:rPr lang="en-US" sz="2800" dirty="0">
-                <a:solidFill>
-                  <a:srgbClr val="FF0000"/>
-                </a:solidFill>
-                <a:highlight>
-                  <a:srgbClr val="FFFF00"/>
-                </a:highlight>
-                <a:latin typeface="Times New Roman"/>
-                <a:cs typeface="Times New Roman"/>
-              </a:rPr>
-              <a:t>TODO</a:t>
-            </a:r>
-            <a:endParaRPr sz="2600" dirty="0">
+              <a:t>расширение контроля с записи на чтение и исполнение для реализации остальных прикладных сценариев</a:t>
+            </a:r>
+            <a:r>
+              <a:rPr lang="en-US" sz="2600" dirty="0">
+                <a:latin typeface="Times New Roman"/>
+                <a:cs typeface="Times New Roman"/>
+              </a:rPr>
+              <a:t>;</a:t>
+            </a:r>
+          </a:p>
+          <a:p>
+            <a:pPr marL="285115" indent="-272415">
+              <a:lnSpc>
+                <a:spcPct val="100000"/>
+              </a:lnSpc>
+              <a:spcBef>
+                <a:spcPts val="695"/>
+              </a:spcBef>
+              <a:buClr>
+                <a:srgbClr val="4F81BC"/>
+              </a:buClr>
+              <a:buSzPct val="69230"/>
+              <a:buFont typeface="Wingdings"/>
+              <a:buChar char=""/>
+              <a:tabLst>
+                <a:tab pos="285115" algn="l"/>
+              </a:tabLst>
+            </a:pPr>
+            <a:r>
+              <a:rPr lang="ru-RU" sz="2600" dirty="0">
+                <a:latin typeface="Times New Roman"/>
+                <a:cs typeface="Times New Roman"/>
+              </a:rPr>
+              <a:t>добавление режима работы, при котором происходит подключение к уже работающему процессу</a:t>
+            </a:r>
+            <a:r>
+              <a:rPr lang="en-US" sz="2600" dirty="0">
+                <a:latin typeface="Times New Roman"/>
+                <a:cs typeface="Times New Roman"/>
+              </a:rPr>
+              <a:t>;</a:t>
+            </a:r>
+            <a:endParaRPr lang="ru-RU" sz="2600" dirty="0">
+              <a:latin typeface="Times New Roman"/>
+              <a:cs typeface="Times New Roman"/>
+            </a:endParaRPr>
+          </a:p>
+          <a:p>
+            <a:pPr marL="285115" indent="-272415">
+              <a:lnSpc>
+                <a:spcPct val="100000"/>
+              </a:lnSpc>
+              <a:spcBef>
+                <a:spcPts val="695"/>
+              </a:spcBef>
+              <a:buClr>
+                <a:srgbClr val="4F81BC"/>
+              </a:buClr>
+              <a:buSzPct val="69230"/>
+              <a:buFont typeface="Wingdings"/>
+              <a:buChar char=""/>
+              <a:tabLst>
+                <a:tab pos="285115" algn="l"/>
+              </a:tabLst>
+            </a:pPr>
+            <a:r>
+              <a:rPr lang="ru-RU" sz="2600" dirty="0">
+                <a:latin typeface="Times New Roman"/>
+                <a:cs typeface="Times New Roman"/>
+              </a:rPr>
+              <a:t>расширение реакции на нарушение от регистрации к активному пресечению</a:t>
+            </a:r>
+            <a:r>
+              <a:rPr lang="en-US" sz="2600" dirty="0">
+                <a:latin typeface="Times New Roman"/>
+                <a:cs typeface="Times New Roman"/>
+              </a:rPr>
+              <a:t>.</a:t>
+            </a:r>
+            <a:endParaRPr lang="ru-RU" sz="2600" dirty="0">
               <a:latin typeface="Times New Roman"/>
               <a:cs typeface="Times New Roman"/>
             </a:endParaRPr>
@@ -8512,6 +9014,1149 @@
     <p:extLst>
       <p:ext uri="{BB962C8B-B14F-4D97-AF65-F5344CB8AC3E}">
         <p14:creationId xmlns:p14="http://schemas.microsoft.com/office/powerpoint/2010/main" val="306485176"/>
+      </p:ext>
+    </p:extLst>
+  </p:cSld>
+  <p:clrMapOvr>
+    <a:masterClrMapping/>
+  </p:clrMapOvr>
+</p:sld>
+</file>
+
+<file path=ppt/slides/slide16.xml><?xml version="1.0" encoding="utf-8"?>
+<p:sld xmlns:a="http://schemas.openxmlformats.org/drawingml/2006/main" xmlns:r="http://schemas.openxmlformats.org/officeDocument/2006/relationships" xmlns:p="http://schemas.openxmlformats.org/presentationml/2006/main">
+  <p:cSld>
+    <p:spTree>
+      <p:nvGrpSpPr>
+        <p:cNvPr id="1" name=""/>
+        <p:cNvGrpSpPr/>
+        <p:nvPr/>
+      </p:nvGrpSpPr>
+      <p:grpSpPr>
+        <a:xfrm>
+          <a:off x="0" y="0"/>
+          <a:ext cx="0" cy="0"/>
+          <a:chOff x="0" y="0"/>
+          <a:chExt cx="0" cy="0"/>
+        </a:xfrm>
+      </p:grpSpPr>
+      <p:sp>
+        <p:nvSpPr>
+          <p:cNvPr id="2" name="Заголовок 1">
+            <a:extLst>
+              <a:ext uri="{FF2B5EF4-FFF2-40B4-BE49-F238E27FC236}">
+                <a16:creationId xmlns:a16="http://schemas.microsoft.com/office/drawing/2014/main" id="{3C940B60-36BD-317D-1F5F-7638BBC9759D}"/>
+              </a:ext>
+            </a:extLst>
+          </p:cNvPr>
+          <p:cNvSpPr>
+            <a:spLocks noGrp="1"/>
+          </p:cNvSpPr>
+          <p:nvPr>
+            <p:ph type="title"/>
+          </p:nvPr>
+        </p:nvSpPr>
+        <p:spPr>
+          <a:xfrm>
+            <a:off x="1487488" y="332656"/>
+            <a:ext cx="8959688" cy="725487"/>
+          </a:xfrm>
+        </p:spPr>
+        <p:txBody>
+          <a:bodyPr>
+            <a:normAutofit fontScale="90000"/>
+          </a:bodyPr>
+          <a:lstStyle/>
+          <a:p>
+            <a:pPr algn="ctr" eaLnBrk="1" fontAlgn="auto" hangingPunct="1">
+              <a:spcAft>
+                <a:spcPts val="0"/>
+              </a:spcAft>
+              <a:defRPr/>
+            </a:pPr>
+            <a:r>
+              <a:rPr lang="ru-RU" b="1" dirty="0"/>
+              <a:t>Внедрение </a:t>
+            </a:r>
+            <a:r>
+              <a:rPr lang="en-US" b="1" dirty="0" err="1"/>
+              <a:t>mprotect</a:t>
+            </a:r>
+            <a:r>
+              <a:rPr lang="en-US" b="1" dirty="0"/>
+              <a:t> </a:t>
+            </a:r>
+            <a:r>
+              <a:rPr lang="ru-RU" b="1" dirty="0"/>
+              <a:t>в исполняемую программу</a:t>
+            </a:r>
+          </a:p>
+        </p:txBody>
+      </p:sp>
+      <p:sp>
+        <p:nvSpPr>
+          <p:cNvPr id="18435" name="Номер слайда 3">
+            <a:extLst>
+              <a:ext uri="{FF2B5EF4-FFF2-40B4-BE49-F238E27FC236}">
+                <a16:creationId xmlns:a16="http://schemas.microsoft.com/office/drawing/2014/main" id="{5D9A7D45-53C2-9697-518B-3663D636309E}"/>
+              </a:ext>
+            </a:extLst>
+          </p:cNvPr>
+          <p:cNvSpPr>
+            <a:spLocks noGrp="1"/>
+          </p:cNvSpPr>
+          <p:nvPr>
+            <p:ph type="sldNum" sz="quarter" idx="10"/>
+          </p:nvPr>
+        </p:nvSpPr>
+        <p:spPr bwMode="auto">
+          <a:noFill/>
+          <a:extLst>
+            <a:ext uri="{909E8E84-426E-40DD-AFC4-6F175D3DCCD1}">
+              <a14:hiddenFill xmlns:a14="http://schemas.microsoft.com/office/drawing/2010/main">
+                <a:solidFill>
+                  <a:srgbClr val="FFFFFF"/>
+                </a:solidFill>
+              </a14:hiddenFill>
+            </a:ext>
+            <a:ext uri="{91240B29-F687-4F45-9708-019B960494DF}">
+              <a14:hiddenLine xmlns:a14="http://schemas.microsoft.com/office/drawing/2010/main" w="9525">
+                <a:solidFill>
+                  <a:srgbClr val="000000"/>
+                </a:solidFill>
+                <a:miter lim="800000"/>
+                <a:headEnd/>
+                <a:tailEnd/>
+              </a14:hiddenLine>
+            </a:ext>
+          </a:extLst>
+        </p:spPr>
+        <p:txBody>
+          <a:bodyPr/>
+          <a:lstStyle>
+            <a:lvl1pPr>
+              <a:spcBef>
+                <a:spcPts val="600"/>
+              </a:spcBef>
+              <a:buClr>
+                <a:schemeClr val="accent1"/>
+              </a:buClr>
+              <a:buSzPct val="70000"/>
+              <a:buFont typeface="Wingdings" pitchFamily="2" charset="2"/>
+              <a:buChar char=""/>
+              <a:defRPr sz="2400">
+                <a:solidFill>
+                  <a:schemeClr val="tx1"/>
+                </a:solidFill>
+                <a:latin typeface="Times New Roman" panose="02020603050405020304" pitchFamily="18" charset="0"/>
+              </a:defRPr>
+            </a:lvl1pPr>
+            <a:lvl2pPr marL="742950" indent="-285750">
+              <a:spcBef>
+                <a:spcPct val="20000"/>
+              </a:spcBef>
+              <a:buClr>
+                <a:schemeClr val="accent1"/>
+              </a:buClr>
+              <a:buSzPct val="80000"/>
+              <a:buFont typeface="Wingdings 2" pitchFamily="2" charset="2"/>
+              <a:buChar char=""/>
+              <a:defRPr sz="2100">
+                <a:solidFill>
+                  <a:schemeClr val="tx1"/>
+                </a:solidFill>
+                <a:latin typeface="Times New Roman" panose="02020603050405020304" pitchFamily="18" charset="0"/>
+              </a:defRPr>
+            </a:lvl2pPr>
+            <a:lvl3pPr marL="1143000" indent="-228600">
+              <a:spcBef>
+                <a:spcPct val="20000"/>
+              </a:spcBef>
+              <a:buClr>
+                <a:srgbClr val="4471A6"/>
+              </a:buClr>
+              <a:buSzPct val="60000"/>
+              <a:buFont typeface="Wingdings" pitchFamily="2" charset="2"/>
+              <a:buChar char=""/>
+              <a:defRPr sz="2400">
+                <a:solidFill>
+                  <a:schemeClr val="tx1"/>
+                </a:solidFill>
+                <a:latin typeface="Times New Roman" panose="02020603050405020304" pitchFamily="18" charset="0"/>
+              </a:defRPr>
+            </a:lvl3pPr>
+            <a:lvl4pPr marL="1600200" indent="-228600">
+              <a:spcBef>
+                <a:spcPct val="20000"/>
+              </a:spcBef>
+              <a:buClr>
+                <a:srgbClr val="B2C1DB"/>
+              </a:buClr>
+              <a:buSzPct val="60000"/>
+              <a:buFont typeface="Wingdings" pitchFamily="2" charset="2"/>
+              <a:buChar char=""/>
+              <a:defRPr sz="2000">
+                <a:solidFill>
+                  <a:schemeClr val="tx1"/>
+                </a:solidFill>
+                <a:latin typeface="Times New Roman" panose="02020603050405020304" pitchFamily="18" charset="0"/>
+              </a:defRPr>
+            </a:lvl4pPr>
+            <a:lvl5pPr marL="2057400" indent="-228600">
+              <a:spcBef>
+                <a:spcPct val="20000"/>
+              </a:spcBef>
+              <a:buClr>
+                <a:srgbClr val="DCB3B2"/>
+              </a:buClr>
+              <a:buSzPct val="68000"/>
+              <a:buFont typeface="Wingdings 2" pitchFamily="2" charset="2"/>
+              <a:buChar char=""/>
+              <a:defRPr sz="1600">
+                <a:solidFill>
+                  <a:schemeClr val="tx1"/>
+                </a:solidFill>
+                <a:latin typeface="Times New Roman" panose="02020603050405020304" pitchFamily="18" charset="0"/>
+              </a:defRPr>
+            </a:lvl5pPr>
+            <a:lvl6pPr marL="2514600" indent="-228600" eaLnBrk="0" fontAlgn="base" hangingPunct="0">
+              <a:spcBef>
+                <a:spcPct val="20000"/>
+              </a:spcBef>
+              <a:spcAft>
+                <a:spcPct val="0"/>
+              </a:spcAft>
+              <a:buClr>
+                <a:srgbClr val="DCB3B2"/>
+              </a:buClr>
+              <a:buSzPct val="68000"/>
+              <a:buFont typeface="Wingdings 2" pitchFamily="2" charset="2"/>
+              <a:buChar char=""/>
+              <a:defRPr sz="1600">
+                <a:solidFill>
+                  <a:schemeClr val="tx1"/>
+                </a:solidFill>
+                <a:latin typeface="Times New Roman" panose="02020603050405020304" pitchFamily="18" charset="0"/>
+              </a:defRPr>
+            </a:lvl6pPr>
+            <a:lvl7pPr marL="2971800" indent="-228600" eaLnBrk="0" fontAlgn="base" hangingPunct="0">
+              <a:spcBef>
+                <a:spcPct val="20000"/>
+              </a:spcBef>
+              <a:spcAft>
+                <a:spcPct val="0"/>
+              </a:spcAft>
+              <a:buClr>
+                <a:srgbClr val="DCB3B2"/>
+              </a:buClr>
+              <a:buSzPct val="68000"/>
+              <a:buFont typeface="Wingdings 2" pitchFamily="2" charset="2"/>
+              <a:buChar char=""/>
+              <a:defRPr sz="1600">
+                <a:solidFill>
+                  <a:schemeClr val="tx1"/>
+                </a:solidFill>
+                <a:latin typeface="Times New Roman" panose="02020603050405020304" pitchFamily="18" charset="0"/>
+              </a:defRPr>
+            </a:lvl7pPr>
+            <a:lvl8pPr marL="3429000" indent="-228600" eaLnBrk="0" fontAlgn="base" hangingPunct="0">
+              <a:spcBef>
+                <a:spcPct val="20000"/>
+              </a:spcBef>
+              <a:spcAft>
+                <a:spcPct val="0"/>
+              </a:spcAft>
+              <a:buClr>
+                <a:srgbClr val="DCB3B2"/>
+              </a:buClr>
+              <a:buSzPct val="68000"/>
+              <a:buFont typeface="Wingdings 2" pitchFamily="2" charset="2"/>
+              <a:buChar char=""/>
+              <a:defRPr sz="1600">
+                <a:solidFill>
+                  <a:schemeClr val="tx1"/>
+                </a:solidFill>
+                <a:latin typeface="Times New Roman" panose="02020603050405020304" pitchFamily="18" charset="0"/>
+              </a:defRPr>
+            </a:lvl8pPr>
+            <a:lvl9pPr marL="3886200" indent="-228600" eaLnBrk="0" fontAlgn="base" hangingPunct="0">
+              <a:spcBef>
+                <a:spcPct val="20000"/>
+              </a:spcBef>
+              <a:spcAft>
+                <a:spcPct val="0"/>
+              </a:spcAft>
+              <a:buClr>
+                <a:srgbClr val="DCB3B2"/>
+              </a:buClr>
+              <a:buSzPct val="68000"/>
+              <a:buFont typeface="Wingdings 2" pitchFamily="2" charset="2"/>
+              <a:buChar char=""/>
+              <a:defRPr sz="1600">
+                <a:solidFill>
+                  <a:schemeClr val="tx1"/>
+                </a:solidFill>
+                <a:latin typeface="Times New Roman" panose="02020603050405020304" pitchFamily="18" charset="0"/>
+              </a:defRPr>
+            </a:lvl9pPr>
+          </a:lstStyle>
+          <a:p>
+            <a:pPr>
+              <a:spcBef>
+                <a:spcPct val="0"/>
+              </a:spcBef>
+              <a:buClrTx/>
+              <a:buSzTx/>
+              <a:buFontTx/>
+              <a:buNone/>
+            </a:pPr>
+            <a:fld id="{39E201F5-8DD3-B04C-94F7-888355455BC2}" type="slidenum">
+              <a:rPr lang="en-US" altLang="ru-RU" sz="1400">
+                <a:solidFill>
+                  <a:srgbClr val="FFFFFF"/>
+                </a:solidFill>
+              </a:rPr>
+              <a:pPr>
+                <a:spcBef>
+                  <a:spcPct val="0"/>
+                </a:spcBef>
+                <a:buClrTx/>
+                <a:buSzTx/>
+                <a:buFontTx/>
+                <a:buNone/>
+              </a:pPr>
+              <a:t>16</a:t>
+            </a:fld>
+            <a:endParaRPr lang="en-US" altLang="ru-RU" sz="1400">
+              <a:solidFill>
+                <a:srgbClr val="FFFFFF"/>
+              </a:solidFill>
+            </a:endParaRPr>
+          </a:p>
+        </p:txBody>
+      </p:sp>
+      <p:sp>
+        <p:nvSpPr>
+          <p:cNvPr id="4" name="TextBox 3">
+            <a:extLst>
+              <a:ext uri="{FF2B5EF4-FFF2-40B4-BE49-F238E27FC236}">
+                <a16:creationId xmlns:a16="http://schemas.microsoft.com/office/drawing/2014/main" id="{DC56B900-1CBB-1A79-9483-2C7F82DC2323}"/>
+              </a:ext>
+            </a:extLst>
+          </p:cNvPr>
+          <p:cNvSpPr txBox="1"/>
+          <p:nvPr/>
+        </p:nvSpPr>
+        <p:spPr>
+          <a:xfrm>
+            <a:off x="4439816" y="5799857"/>
+            <a:ext cx="3096344" cy="307777"/>
+          </a:xfrm>
+          <a:prstGeom prst="rect">
+            <a:avLst/>
+          </a:prstGeom>
+          <a:noFill/>
+        </p:spPr>
+        <p:txBody>
+          <a:bodyPr wrap="square" rtlCol="0">
+            <a:spAutoFit/>
+          </a:bodyPr>
+          <a:lstStyle/>
+          <a:p>
+            <a:r>
+              <a:rPr lang="ru-RU" sz="1400" dirty="0">
+                <a:latin typeface="+mn-lt"/>
+              </a:rPr>
+              <a:t>Рисунок 5 – схема инжекции </a:t>
+            </a:r>
+            <a:r>
+              <a:rPr lang="en-US" sz="1400" dirty="0" err="1">
+                <a:latin typeface="+mn-lt"/>
+              </a:rPr>
+              <a:t>mprotect</a:t>
+            </a:r>
+            <a:endParaRPr lang="ru-RU" sz="1400" dirty="0">
+              <a:latin typeface="+mn-lt"/>
+            </a:endParaRPr>
+          </a:p>
+        </p:txBody>
+      </p:sp>
+      <p:pic>
+        <p:nvPicPr>
+          <p:cNvPr id="5" name="Picture 4">
+            <a:extLst>
+              <a:ext uri="{FF2B5EF4-FFF2-40B4-BE49-F238E27FC236}">
+                <a16:creationId xmlns:a16="http://schemas.microsoft.com/office/drawing/2014/main" id="{7996686A-3A32-8F7D-5DA7-4D82C676ED60}"/>
+              </a:ext>
+            </a:extLst>
+          </p:cNvPr>
+          <p:cNvPicPr>
+            <a:picLocks noChangeAspect="1"/>
+          </p:cNvPicPr>
+          <p:nvPr/>
+        </p:nvPicPr>
+        <p:blipFill>
+          <a:blip r:embed="rId2">
+            <a:extLst>
+              <a:ext uri="{28A0092B-C50C-407E-A947-70E740481C1C}">
+                <a14:useLocalDpi xmlns:a14="http://schemas.microsoft.com/office/drawing/2010/main" val="0"/>
+              </a:ext>
+            </a:extLst>
+          </a:blip>
+          <a:stretch>
+            <a:fillRect/>
+          </a:stretch>
+        </p:blipFill>
+        <p:spPr>
+          <a:xfrm>
+            <a:off x="5004330" y="1323534"/>
+            <a:ext cx="1679284" cy="4210932"/>
+          </a:xfrm>
+          <a:prstGeom prst="rect">
+            <a:avLst/>
+          </a:prstGeom>
+        </p:spPr>
+      </p:pic>
+    </p:spTree>
+    <p:extLst>
+      <p:ext uri="{BB962C8B-B14F-4D97-AF65-F5344CB8AC3E}">
+        <p14:creationId xmlns:p14="http://schemas.microsoft.com/office/powerpoint/2010/main" val="1607713992"/>
+      </p:ext>
+    </p:extLst>
+  </p:cSld>
+  <p:clrMapOvr>
+    <a:masterClrMapping/>
+  </p:clrMapOvr>
+</p:sld>
+</file>
+
+<file path=ppt/slides/slide17.xml><?xml version="1.0" encoding="utf-8"?>
+<p:sld xmlns:a="http://schemas.openxmlformats.org/drawingml/2006/main" xmlns:r="http://schemas.openxmlformats.org/officeDocument/2006/relationships" xmlns:p="http://schemas.openxmlformats.org/presentationml/2006/main">
+  <p:cSld>
+    <p:spTree>
+      <p:nvGrpSpPr>
+        <p:cNvPr id="1" name=""/>
+        <p:cNvGrpSpPr/>
+        <p:nvPr/>
+      </p:nvGrpSpPr>
+      <p:grpSpPr>
+        <a:xfrm>
+          <a:off x="0" y="0"/>
+          <a:ext cx="0" cy="0"/>
+          <a:chOff x="0" y="0"/>
+          <a:chExt cx="0" cy="0"/>
+        </a:xfrm>
+      </p:grpSpPr>
+      <p:sp>
+        <p:nvSpPr>
+          <p:cNvPr id="2" name="Заголовок 1">
+            <a:extLst>
+              <a:ext uri="{FF2B5EF4-FFF2-40B4-BE49-F238E27FC236}">
+                <a16:creationId xmlns:a16="http://schemas.microsoft.com/office/drawing/2014/main" id="{3C940B60-36BD-317D-1F5F-7638BBC9759D}"/>
+              </a:ext>
+            </a:extLst>
+          </p:cNvPr>
+          <p:cNvSpPr>
+            <a:spLocks noGrp="1"/>
+          </p:cNvSpPr>
+          <p:nvPr>
+            <p:ph type="title"/>
+          </p:nvPr>
+        </p:nvSpPr>
+        <p:spPr>
+          <a:xfrm>
+            <a:off x="1888840" y="332656"/>
+            <a:ext cx="8414320" cy="725487"/>
+          </a:xfrm>
+        </p:spPr>
+        <p:txBody>
+          <a:bodyPr>
+            <a:normAutofit/>
+          </a:bodyPr>
+          <a:lstStyle/>
+          <a:p>
+            <a:pPr algn="ctr" eaLnBrk="1" fontAlgn="auto" hangingPunct="1">
+              <a:spcAft>
+                <a:spcPts val="0"/>
+              </a:spcAft>
+              <a:defRPr/>
+            </a:pPr>
+            <a:r>
+              <a:rPr lang="ru-RU" b="1" dirty="0"/>
+              <a:t>Оценка накладных расходов на перехват</a:t>
+            </a:r>
+          </a:p>
+        </p:txBody>
+      </p:sp>
+      <p:sp>
+        <p:nvSpPr>
+          <p:cNvPr id="18435" name="Номер слайда 3">
+            <a:extLst>
+              <a:ext uri="{FF2B5EF4-FFF2-40B4-BE49-F238E27FC236}">
+                <a16:creationId xmlns:a16="http://schemas.microsoft.com/office/drawing/2014/main" id="{5D9A7D45-53C2-9697-518B-3663D636309E}"/>
+              </a:ext>
+            </a:extLst>
+          </p:cNvPr>
+          <p:cNvSpPr>
+            <a:spLocks noGrp="1"/>
+          </p:cNvSpPr>
+          <p:nvPr>
+            <p:ph type="sldNum" sz="quarter" idx="10"/>
+          </p:nvPr>
+        </p:nvSpPr>
+        <p:spPr bwMode="auto">
+          <a:noFill/>
+          <a:extLst>
+            <a:ext uri="{909E8E84-426E-40DD-AFC4-6F175D3DCCD1}">
+              <a14:hiddenFill xmlns:a14="http://schemas.microsoft.com/office/drawing/2010/main">
+                <a:solidFill>
+                  <a:srgbClr val="FFFFFF"/>
+                </a:solidFill>
+              </a14:hiddenFill>
+            </a:ext>
+            <a:ext uri="{91240B29-F687-4F45-9708-019B960494DF}">
+              <a14:hiddenLine xmlns:a14="http://schemas.microsoft.com/office/drawing/2010/main" w="9525">
+                <a:solidFill>
+                  <a:srgbClr val="000000"/>
+                </a:solidFill>
+                <a:miter lim="800000"/>
+                <a:headEnd/>
+                <a:tailEnd/>
+              </a14:hiddenLine>
+            </a:ext>
+          </a:extLst>
+        </p:spPr>
+        <p:txBody>
+          <a:bodyPr/>
+          <a:lstStyle>
+            <a:lvl1pPr>
+              <a:spcBef>
+                <a:spcPts val="600"/>
+              </a:spcBef>
+              <a:buClr>
+                <a:schemeClr val="accent1"/>
+              </a:buClr>
+              <a:buSzPct val="70000"/>
+              <a:buFont typeface="Wingdings" pitchFamily="2" charset="2"/>
+              <a:buChar char=""/>
+              <a:defRPr sz="2400">
+                <a:solidFill>
+                  <a:schemeClr val="tx1"/>
+                </a:solidFill>
+                <a:latin typeface="Times New Roman" panose="02020603050405020304" pitchFamily="18" charset="0"/>
+              </a:defRPr>
+            </a:lvl1pPr>
+            <a:lvl2pPr marL="742950" indent="-285750">
+              <a:spcBef>
+                <a:spcPct val="20000"/>
+              </a:spcBef>
+              <a:buClr>
+                <a:schemeClr val="accent1"/>
+              </a:buClr>
+              <a:buSzPct val="80000"/>
+              <a:buFont typeface="Wingdings 2" pitchFamily="2" charset="2"/>
+              <a:buChar char=""/>
+              <a:defRPr sz="2100">
+                <a:solidFill>
+                  <a:schemeClr val="tx1"/>
+                </a:solidFill>
+                <a:latin typeface="Times New Roman" panose="02020603050405020304" pitchFamily="18" charset="0"/>
+              </a:defRPr>
+            </a:lvl2pPr>
+            <a:lvl3pPr marL="1143000" indent="-228600">
+              <a:spcBef>
+                <a:spcPct val="20000"/>
+              </a:spcBef>
+              <a:buClr>
+                <a:srgbClr val="4471A6"/>
+              </a:buClr>
+              <a:buSzPct val="60000"/>
+              <a:buFont typeface="Wingdings" pitchFamily="2" charset="2"/>
+              <a:buChar char=""/>
+              <a:defRPr sz="2400">
+                <a:solidFill>
+                  <a:schemeClr val="tx1"/>
+                </a:solidFill>
+                <a:latin typeface="Times New Roman" panose="02020603050405020304" pitchFamily="18" charset="0"/>
+              </a:defRPr>
+            </a:lvl3pPr>
+            <a:lvl4pPr marL="1600200" indent="-228600">
+              <a:spcBef>
+                <a:spcPct val="20000"/>
+              </a:spcBef>
+              <a:buClr>
+                <a:srgbClr val="B2C1DB"/>
+              </a:buClr>
+              <a:buSzPct val="60000"/>
+              <a:buFont typeface="Wingdings" pitchFamily="2" charset="2"/>
+              <a:buChar char=""/>
+              <a:defRPr sz="2000">
+                <a:solidFill>
+                  <a:schemeClr val="tx1"/>
+                </a:solidFill>
+                <a:latin typeface="Times New Roman" panose="02020603050405020304" pitchFamily="18" charset="0"/>
+              </a:defRPr>
+            </a:lvl4pPr>
+            <a:lvl5pPr marL="2057400" indent="-228600">
+              <a:spcBef>
+                <a:spcPct val="20000"/>
+              </a:spcBef>
+              <a:buClr>
+                <a:srgbClr val="DCB3B2"/>
+              </a:buClr>
+              <a:buSzPct val="68000"/>
+              <a:buFont typeface="Wingdings 2" pitchFamily="2" charset="2"/>
+              <a:buChar char=""/>
+              <a:defRPr sz="1600">
+                <a:solidFill>
+                  <a:schemeClr val="tx1"/>
+                </a:solidFill>
+                <a:latin typeface="Times New Roman" panose="02020603050405020304" pitchFamily="18" charset="0"/>
+              </a:defRPr>
+            </a:lvl5pPr>
+            <a:lvl6pPr marL="2514600" indent="-228600" eaLnBrk="0" fontAlgn="base" hangingPunct="0">
+              <a:spcBef>
+                <a:spcPct val="20000"/>
+              </a:spcBef>
+              <a:spcAft>
+                <a:spcPct val="0"/>
+              </a:spcAft>
+              <a:buClr>
+                <a:srgbClr val="DCB3B2"/>
+              </a:buClr>
+              <a:buSzPct val="68000"/>
+              <a:buFont typeface="Wingdings 2" pitchFamily="2" charset="2"/>
+              <a:buChar char=""/>
+              <a:defRPr sz="1600">
+                <a:solidFill>
+                  <a:schemeClr val="tx1"/>
+                </a:solidFill>
+                <a:latin typeface="Times New Roman" panose="02020603050405020304" pitchFamily="18" charset="0"/>
+              </a:defRPr>
+            </a:lvl6pPr>
+            <a:lvl7pPr marL="2971800" indent="-228600" eaLnBrk="0" fontAlgn="base" hangingPunct="0">
+              <a:spcBef>
+                <a:spcPct val="20000"/>
+              </a:spcBef>
+              <a:spcAft>
+                <a:spcPct val="0"/>
+              </a:spcAft>
+              <a:buClr>
+                <a:srgbClr val="DCB3B2"/>
+              </a:buClr>
+              <a:buSzPct val="68000"/>
+              <a:buFont typeface="Wingdings 2" pitchFamily="2" charset="2"/>
+              <a:buChar char=""/>
+              <a:defRPr sz="1600">
+                <a:solidFill>
+                  <a:schemeClr val="tx1"/>
+                </a:solidFill>
+                <a:latin typeface="Times New Roman" panose="02020603050405020304" pitchFamily="18" charset="0"/>
+              </a:defRPr>
+            </a:lvl7pPr>
+            <a:lvl8pPr marL="3429000" indent="-228600" eaLnBrk="0" fontAlgn="base" hangingPunct="0">
+              <a:spcBef>
+                <a:spcPct val="20000"/>
+              </a:spcBef>
+              <a:spcAft>
+                <a:spcPct val="0"/>
+              </a:spcAft>
+              <a:buClr>
+                <a:srgbClr val="DCB3B2"/>
+              </a:buClr>
+              <a:buSzPct val="68000"/>
+              <a:buFont typeface="Wingdings 2" pitchFamily="2" charset="2"/>
+              <a:buChar char=""/>
+              <a:defRPr sz="1600">
+                <a:solidFill>
+                  <a:schemeClr val="tx1"/>
+                </a:solidFill>
+                <a:latin typeface="Times New Roman" panose="02020603050405020304" pitchFamily="18" charset="0"/>
+              </a:defRPr>
+            </a:lvl8pPr>
+            <a:lvl9pPr marL="3886200" indent="-228600" eaLnBrk="0" fontAlgn="base" hangingPunct="0">
+              <a:spcBef>
+                <a:spcPct val="20000"/>
+              </a:spcBef>
+              <a:spcAft>
+                <a:spcPct val="0"/>
+              </a:spcAft>
+              <a:buClr>
+                <a:srgbClr val="DCB3B2"/>
+              </a:buClr>
+              <a:buSzPct val="68000"/>
+              <a:buFont typeface="Wingdings 2" pitchFamily="2" charset="2"/>
+              <a:buChar char=""/>
+              <a:defRPr sz="1600">
+                <a:solidFill>
+                  <a:schemeClr val="tx1"/>
+                </a:solidFill>
+                <a:latin typeface="Times New Roman" panose="02020603050405020304" pitchFamily="18" charset="0"/>
+              </a:defRPr>
+            </a:lvl9pPr>
+          </a:lstStyle>
+          <a:p>
+            <a:pPr>
+              <a:spcBef>
+                <a:spcPct val="0"/>
+              </a:spcBef>
+              <a:buClrTx/>
+              <a:buSzTx/>
+              <a:buFontTx/>
+              <a:buNone/>
+            </a:pPr>
+            <a:fld id="{39E201F5-8DD3-B04C-94F7-888355455BC2}" type="slidenum">
+              <a:rPr lang="en-US" altLang="ru-RU" sz="1400">
+                <a:solidFill>
+                  <a:srgbClr val="FFFFFF"/>
+                </a:solidFill>
+              </a:rPr>
+              <a:pPr>
+                <a:spcBef>
+                  <a:spcPct val="0"/>
+                </a:spcBef>
+                <a:buClrTx/>
+                <a:buSzTx/>
+                <a:buFontTx/>
+                <a:buNone/>
+              </a:pPr>
+              <a:t>17</a:t>
+            </a:fld>
+            <a:endParaRPr lang="en-US" altLang="ru-RU" sz="1400">
+              <a:solidFill>
+                <a:srgbClr val="FFFFFF"/>
+              </a:solidFill>
+            </a:endParaRPr>
+          </a:p>
+        </p:txBody>
+      </p:sp>
+      <p:graphicFrame>
+        <p:nvGraphicFramePr>
+          <p:cNvPr id="5" name="Table 4">
+            <a:extLst>
+              <a:ext uri="{FF2B5EF4-FFF2-40B4-BE49-F238E27FC236}">
+                <a16:creationId xmlns:a16="http://schemas.microsoft.com/office/drawing/2014/main" id="{F06AD5FF-8219-0268-78A6-EBE27E28F0EA}"/>
+              </a:ext>
+            </a:extLst>
+          </p:cNvPr>
+          <p:cNvGraphicFramePr>
+            <a:graphicFrameLocks noGrp="1"/>
+          </p:cNvGraphicFramePr>
+          <p:nvPr>
+            <p:extLst>
+              <p:ext uri="{D42A27DB-BD31-4B8C-83A1-F6EECF244321}">
+                <p14:modId xmlns:p14="http://schemas.microsoft.com/office/powerpoint/2010/main" val="1497470481"/>
+              </p:ext>
+            </p:extLst>
+          </p:nvPr>
+        </p:nvGraphicFramePr>
+        <p:xfrm>
+          <a:off x="1559496" y="1529607"/>
+          <a:ext cx="8128000" cy="1483360"/>
+        </p:xfrm>
+        <a:graphic>
+          <a:graphicData uri="http://schemas.openxmlformats.org/drawingml/2006/table">
+            <a:tbl>
+              <a:tblPr firstRow="1" bandRow="1">
+                <a:tableStyleId>{5C22544A-7EE6-4342-B048-85BDC9FD1C3A}</a:tableStyleId>
+              </a:tblPr>
+              <a:tblGrid>
+                <a:gridCol w="4064000">
+                  <a:extLst>
+                    <a:ext uri="{9D8B030D-6E8A-4147-A177-3AD203B41FA5}">
+                      <a16:colId xmlns:a16="http://schemas.microsoft.com/office/drawing/2014/main" val="4292158735"/>
+                    </a:ext>
+                  </a:extLst>
+                </a:gridCol>
+                <a:gridCol w="4064000">
+                  <a:extLst>
+                    <a:ext uri="{9D8B030D-6E8A-4147-A177-3AD203B41FA5}">
+                      <a16:colId xmlns:a16="http://schemas.microsoft.com/office/drawing/2014/main" val="2722238547"/>
+                    </a:ext>
+                  </a:extLst>
+                </a:gridCol>
+              </a:tblGrid>
+              <a:tr h="370840">
+                <a:tc>
+                  <a:txBody>
+                    <a:bodyPr/>
+                    <a:lstStyle/>
+                    <a:p>
+                      <a:pPr algn="ctr"/>
+                      <a:r>
+                        <a:rPr lang="ru-RU" dirty="0"/>
+                        <a:t>Режим исполнения</a:t>
+                      </a:r>
+                    </a:p>
+                  </a:txBody>
+                  <a:tcPr/>
+                </a:tc>
+                <a:tc>
+                  <a:txBody>
+                    <a:bodyPr/>
+                    <a:lstStyle/>
+                    <a:p>
+                      <a:pPr algn="ctr"/>
+                      <a:r>
+                        <a:rPr lang="ru-RU" dirty="0"/>
+                        <a:t>Время на одно обращение</a:t>
+                      </a:r>
+                    </a:p>
+                  </a:txBody>
+                  <a:tcPr/>
+                </a:tc>
+                <a:extLst>
+                  <a:ext uri="{0D108BD9-81ED-4DB2-BD59-A6C34878D82A}">
+                    <a16:rowId xmlns:a16="http://schemas.microsoft.com/office/drawing/2014/main" val="3643035316"/>
+                  </a:ext>
+                </a:extLst>
+              </a:tr>
+              <a:tr h="370840">
+                <a:tc>
+                  <a:txBody>
+                    <a:bodyPr/>
+                    <a:lstStyle/>
+                    <a:p>
+                      <a:pPr algn="ctr"/>
+                      <a:r>
+                        <a:rPr lang="ru-RU" dirty="0"/>
+                        <a:t>Без агента</a:t>
+                      </a:r>
+                    </a:p>
+                  </a:txBody>
+                  <a:tcPr/>
+                </a:tc>
+                <a:tc>
+                  <a:txBody>
+                    <a:bodyPr/>
+                    <a:lstStyle/>
+                    <a:p>
+                      <a:pPr algn="ctr"/>
+                      <a:r>
+                        <a:rPr lang="ru-RU" dirty="0"/>
+                        <a:t>2 нс</a:t>
+                      </a:r>
+                    </a:p>
+                  </a:txBody>
+                  <a:tcPr/>
+                </a:tc>
+                <a:extLst>
+                  <a:ext uri="{0D108BD9-81ED-4DB2-BD59-A6C34878D82A}">
+                    <a16:rowId xmlns:a16="http://schemas.microsoft.com/office/drawing/2014/main" val="2580166632"/>
+                  </a:ext>
+                </a:extLst>
+              </a:tr>
+              <a:tr h="370840">
+                <a:tc>
+                  <a:txBody>
+                    <a:bodyPr/>
+                    <a:lstStyle/>
+                    <a:p>
+                      <a:pPr algn="ctr"/>
+                      <a:r>
+                        <a:rPr lang="ru-RU" dirty="0"/>
+                        <a:t>С агентом, событие не регистрируется</a:t>
+                      </a:r>
+                    </a:p>
+                  </a:txBody>
+                  <a:tcPr/>
+                </a:tc>
+                <a:tc>
+                  <a:txBody>
+                    <a:bodyPr/>
+                    <a:lstStyle/>
+                    <a:p>
+                      <a:pPr algn="ctr"/>
+                      <a:r>
+                        <a:rPr lang="ru-RU" dirty="0"/>
+                        <a:t>223 мкс</a:t>
+                      </a:r>
+                    </a:p>
+                  </a:txBody>
+                  <a:tcPr/>
+                </a:tc>
+                <a:extLst>
+                  <a:ext uri="{0D108BD9-81ED-4DB2-BD59-A6C34878D82A}">
+                    <a16:rowId xmlns:a16="http://schemas.microsoft.com/office/drawing/2014/main" val="3806178057"/>
+                  </a:ext>
+                </a:extLst>
+              </a:tr>
+              <a:tr h="370840">
+                <a:tc>
+                  <a:txBody>
+                    <a:bodyPr/>
+                    <a:lstStyle/>
+                    <a:p>
+                      <a:pPr algn="ctr"/>
+                      <a:r>
+                        <a:rPr lang="ru-RU" dirty="0"/>
+                        <a:t>С агентом, легитимное событие</a:t>
+                      </a:r>
+                    </a:p>
+                  </a:txBody>
+                  <a:tcPr/>
+                </a:tc>
+                <a:tc>
+                  <a:txBody>
+                    <a:bodyPr/>
+                    <a:lstStyle/>
+                    <a:p>
+                      <a:pPr algn="ctr"/>
+                      <a:r>
+                        <a:rPr lang="ru-RU" dirty="0"/>
+                        <a:t>217 мкс</a:t>
+                      </a:r>
+                    </a:p>
+                  </a:txBody>
+                  <a:tcPr/>
+                </a:tc>
+                <a:extLst>
+                  <a:ext uri="{0D108BD9-81ED-4DB2-BD59-A6C34878D82A}">
+                    <a16:rowId xmlns:a16="http://schemas.microsoft.com/office/drawing/2014/main" val="2337319647"/>
+                  </a:ext>
+                </a:extLst>
+              </a:tr>
+            </a:tbl>
+          </a:graphicData>
+        </a:graphic>
+      </p:graphicFrame>
+      <p:sp>
+        <p:nvSpPr>
+          <p:cNvPr id="6" name="object 4">
+            <a:extLst>
+              <a:ext uri="{FF2B5EF4-FFF2-40B4-BE49-F238E27FC236}">
+                <a16:creationId xmlns:a16="http://schemas.microsoft.com/office/drawing/2014/main" id="{1DF367C8-F24C-E551-B223-EFAB686AB31C}"/>
+              </a:ext>
+            </a:extLst>
+          </p:cNvPr>
+          <p:cNvSpPr txBox="1"/>
+          <p:nvPr/>
+        </p:nvSpPr>
+        <p:spPr>
+          <a:xfrm>
+            <a:off x="1900206" y="1194452"/>
+            <a:ext cx="7929827" cy="258404"/>
+          </a:xfrm>
+          <a:prstGeom prst="rect">
+            <a:avLst/>
+          </a:prstGeom>
+        </p:spPr>
+        <p:txBody>
+          <a:bodyPr vert="horz" wrap="square" lIns="0" tIns="12065" rIns="0" bIns="0" rtlCol="0">
+            <a:spAutoFit/>
+          </a:bodyPr>
+          <a:lstStyle/>
+          <a:p>
+            <a:pPr marL="12700">
+              <a:lnSpc>
+                <a:spcPct val="100000"/>
+              </a:lnSpc>
+              <a:spcBef>
+                <a:spcPts val="95"/>
+              </a:spcBef>
+            </a:pPr>
+            <a:r>
+              <a:rPr lang="ru-RU" sz="1600" spc="-10" dirty="0">
+                <a:latin typeface="Times New Roman"/>
+                <a:cs typeface="Times New Roman"/>
+              </a:rPr>
+              <a:t>Таблица</a:t>
+            </a:r>
+            <a:r>
+              <a:rPr sz="1600" spc="-15" dirty="0">
+                <a:latin typeface="Times New Roman"/>
+                <a:cs typeface="Times New Roman"/>
+              </a:rPr>
+              <a:t> </a:t>
+            </a:r>
+            <a:r>
+              <a:rPr lang="ru-RU" sz="1600" spc="-15" dirty="0">
+                <a:latin typeface="Times New Roman"/>
+                <a:cs typeface="Times New Roman"/>
+              </a:rPr>
+              <a:t>3</a:t>
+            </a:r>
+            <a:r>
+              <a:rPr sz="1600" spc="-40" dirty="0">
+                <a:latin typeface="Times New Roman"/>
+                <a:cs typeface="Times New Roman"/>
+              </a:rPr>
+              <a:t> </a:t>
+            </a:r>
+            <a:r>
+              <a:rPr sz="1600" dirty="0">
+                <a:latin typeface="Times New Roman"/>
+                <a:cs typeface="Times New Roman"/>
+              </a:rPr>
+              <a:t>–</a:t>
+            </a:r>
+            <a:r>
+              <a:rPr sz="1600" spc="-35" dirty="0">
+                <a:latin typeface="Times New Roman"/>
+                <a:cs typeface="Times New Roman"/>
+              </a:rPr>
+              <a:t> </a:t>
+            </a:r>
+            <a:r>
+              <a:rPr lang="ru-RU" sz="1600" dirty="0">
+                <a:latin typeface="Times New Roman"/>
+                <a:cs typeface="Times New Roman"/>
+              </a:rPr>
+              <a:t>Накладные расходы инструмента</a:t>
+            </a:r>
+            <a:endParaRPr sz="1600" dirty="0">
+              <a:latin typeface="Times New Roman"/>
+              <a:cs typeface="Times New Roman"/>
+            </a:endParaRPr>
+          </a:p>
+        </p:txBody>
+      </p:sp>
+      <p:sp>
+        <p:nvSpPr>
+          <p:cNvPr id="7" name="object 3">
+            <a:extLst>
+              <a:ext uri="{FF2B5EF4-FFF2-40B4-BE49-F238E27FC236}">
+                <a16:creationId xmlns:a16="http://schemas.microsoft.com/office/drawing/2014/main" id="{76A1BD63-190C-6017-07B5-BBBF4918609F}"/>
+              </a:ext>
+            </a:extLst>
+          </p:cNvPr>
+          <p:cNvSpPr txBox="1"/>
+          <p:nvPr/>
+        </p:nvSpPr>
+        <p:spPr>
+          <a:xfrm>
+            <a:off x="551384" y="3378257"/>
+            <a:ext cx="9928225" cy="3006592"/>
+          </a:xfrm>
+          <a:prstGeom prst="rect">
+            <a:avLst/>
+          </a:prstGeom>
+        </p:spPr>
+        <p:txBody>
+          <a:bodyPr vert="horz" wrap="square" lIns="0" tIns="13335" rIns="0" bIns="0" rtlCol="0">
+            <a:spAutoFit/>
+          </a:bodyPr>
+          <a:lstStyle/>
+          <a:p>
+            <a:pPr marL="983615" marR="5080" lvl="1" indent="-514350" algn="just">
+              <a:spcBef>
+                <a:spcPts val="105"/>
+              </a:spcBef>
+              <a:buClr>
+                <a:srgbClr val="4F81BC"/>
+              </a:buClr>
+              <a:buSzPct val="69230"/>
+              <a:buFont typeface="+mj-lt"/>
+              <a:buAutoNum type="arabicPeriod"/>
+              <a:tabLst>
+                <a:tab pos="285115" algn="l"/>
+              </a:tabLst>
+            </a:pPr>
+            <a:r>
+              <a:rPr lang="ru-RU" sz="2400" dirty="0">
+                <a:latin typeface="Times New Roman"/>
+                <a:cs typeface="Times New Roman"/>
+              </a:rPr>
+              <a:t>результаты в таблице – намеренно худший случай (запись в переменную в цикле)</a:t>
+            </a:r>
+            <a:r>
+              <a:rPr lang="en-US" sz="2400" dirty="0">
+                <a:latin typeface="Times New Roman"/>
+                <a:cs typeface="Times New Roman"/>
+              </a:rPr>
+              <a:t>;</a:t>
+            </a:r>
+            <a:endParaRPr lang="ru-RU" sz="2400" dirty="0">
+              <a:latin typeface="Times New Roman"/>
+              <a:cs typeface="Times New Roman"/>
+            </a:endParaRPr>
+          </a:p>
+          <a:p>
+            <a:pPr marL="983615" marR="5080" lvl="1" indent="-514350" algn="just">
+              <a:spcBef>
+                <a:spcPts val="105"/>
+              </a:spcBef>
+              <a:buClr>
+                <a:srgbClr val="4F81BC"/>
+              </a:buClr>
+              <a:buSzPct val="69230"/>
+              <a:buFont typeface="+mj-lt"/>
+              <a:buAutoNum type="arabicPeriod"/>
+              <a:tabLst>
+                <a:tab pos="285115" algn="l"/>
+              </a:tabLst>
+            </a:pPr>
+            <a:r>
+              <a:rPr lang="ru-RU" sz="2400" dirty="0">
+                <a:latin typeface="Times New Roman"/>
+                <a:cs typeface="Times New Roman"/>
+              </a:rPr>
+              <a:t>реальный сценарий: данные меняются единицы раз за всё время работы целевой программы</a:t>
+            </a:r>
+            <a:r>
+              <a:rPr lang="en-US" sz="2400" dirty="0">
+                <a:latin typeface="Times New Roman"/>
+                <a:cs typeface="Times New Roman"/>
+              </a:rPr>
+              <a:t>;</a:t>
+            </a:r>
+            <a:endParaRPr lang="ru-RU" sz="2400" dirty="0">
+              <a:latin typeface="Times New Roman"/>
+              <a:cs typeface="Times New Roman"/>
+            </a:endParaRPr>
+          </a:p>
+          <a:p>
+            <a:pPr marL="983615" marR="5080" lvl="1" indent="-514350" algn="just">
+              <a:spcBef>
+                <a:spcPts val="105"/>
+              </a:spcBef>
+              <a:buClr>
+                <a:srgbClr val="4F81BC"/>
+              </a:buClr>
+              <a:buSzPct val="69230"/>
+              <a:buFont typeface="+mj-lt"/>
+              <a:buAutoNum type="arabicPeriod"/>
+              <a:tabLst>
+                <a:tab pos="285115" algn="l"/>
+              </a:tabLst>
+            </a:pPr>
+            <a:r>
+              <a:rPr lang="ru-RU" sz="2400" dirty="0">
+                <a:latin typeface="Times New Roman"/>
+                <a:cs typeface="Times New Roman"/>
+              </a:rPr>
+              <a:t>расходы линейны по числу срабатываний, а не по времени работы цели;</a:t>
+            </a:r>
+          </a:p>
+          <a:p>
+            <a:pPr marL="983615" marR="5080" lvl="1" indent="-514350" algn="just">
+              <a:spcBef>
+                <a:spcPts val="105"/>
+              </a:spcBef>
+              <a:buClr>
+                <a:srgbClr val="4F81BC"/>
+              </a:buClr>
+              <a:buSzPct val="69230"/>
+              <a:buFont typeface="+mj-lt"/>
+              <a:buAutoNum type="arabicPeriod"/>
+              <a:tabLst>
+                <a:tab pos="285115" algn="l"/>
+              </a:tabLst>
+            </a:pPr>
+            <a:r>
+              <a:rPr lang="ru-RU" sz="2400" dirty="0">
+                <a:latin typeface="Times New Roman"/>
+                <a:cs typeface="Times New Roman"/>
+              </a:rPr>
+              <a:t>наблюдение без записи в охраняемую область не вносит накладных расходов.</a:t>
+            </a:r>
+          </a:p>
+        </p:txBody>
+      </p:sp>
+    </p:spTree>
+    <p:extLst>
+      <p:ext uri="{BB962C8B-B14F-4D97-AF65-F5344CB8AC3E}">
+        <p14:creationId xmlns:p14="http://schemas.microsoft.com/office/powerpoint/2010/main" val="363583556"/>
       </p:ext>
     </p:extLst>
   </p:cSld>
@@ -10929,8 +12574,8 @@
         </p:nvSpPr>
         <p:spPr>
           <a:xfrm>
-            <a:off x="700723" y="137530"/>
-            <a:ext cx="9926954" cy="725487"/>
+            <a:off x="767408" y="201864"/>
+            <a:ext cx="10071045" cy="725487"/>
           </a:xfrm>
         </p:spPr>
         <p:txBody>
@@ -10947,15 +12592,11 @@
             </a:pPr>
             <a:r>
               <a:rPr lang="ru-RU" sz="3200" b="1" cap="small" spc="15" dirty="0"/>
-              <a:t>Акт</a:t>
-            </a:r>
-            <a:r>
-              <a:rPr lang="ru-RU" sz="3200" b="1" cap="small" spc="-490" dirty="0"/>
-              <a:t>у</a:t>
+              <a:t>Актуа</a:t>
             </a:r>
             <a:r>
               <a:rPr lang="ru-RU" sz="3200" b="1" cap="small" spc="10" dirty="0"/>
-              <a:t>ал</a:t>
+              <a:t>л</a:t>
             </a:r>
             <a:r>
               <a:rPr lang="ru-RU" sz="3200" b="1" cap="small" spc="15" dirty="0"/>
@@ -12018,7 +13659,7 @@
               </a:rPr>
               <a:t>[3].</a:t>
             </a:r>
-            <a:endParaRPr sz="2200">
+            <a:endParaRPr sz="2200" dirty="0">
               <a:latin typeface="Times New Roman"/>
               <a:cs typeface="Times New Roman"/>
             </a:endParaRPr>
@@ -12202,7 +13843,7 @@
               </a:rPr>
               <a:t>[4].</a:t>
             </a:r>
-            <a:endParaRPr sz="2200">
+            <a:endParaRPr sz="2200" dirty="0">
               <a:latin typeface="Times New Roman"/>
               <a:cs typeface="Times New Roman"/>
             </a:endParaRPr>
@@ -12512,7 +14153,7 @@
               </a:rPr>
               <a:t>[5].</a:t>
             </a:r>
-            <a:endParaRPr sz="2200">
+            <a:endParaRPr sz="2200" dirty="0">
               <a:latin typeface="Times New Roman"/>
               <a:cs typeface="Times New Roman"/>
             </a:endParaRPr>
@@ -13878,7 +15519,7 @@
         </p:nvSpPr>
         <p:spPr>
           <a:xfrm>
-            <a:off x="1117600" y="274638"/>
+            <a:off x="1127448" y="174184"/>
             <a:ext cx="9586913" cy="725487"/>
           </a:xfrm>
         </p:spPr>
@@ -14182,7 +15823,7 @@
         </p:nvSpPr>
         <p:spPr>
           <a:xfrm>
-            <a:off x="974484" y="893096"/>
+            <a:off x="911424" y="884437"/>
             <a:ext cx="7929827" cy="258404"/>
           </a:xfrm>
           <a:prstGeom prst="rect">
@@ -14292,20 +15933,7 @@
                 <a:latin typeface="Times New Roman"/>
                 <a:cs typeface="Times New Roman"/>
               </a:rPr>
-              <a:t>разработке инструментов мониторинга </a:t>
-            </a:r>
-            <a:r>
-              <a:rPr lang="en-US" sz="1600" dirty="0">
-                <a:solidFill>
-                  <a:srgbClr val="FF0000"/>
-                </a:solidFill>
-                <a:highlight>
-                  <a:srgbClr val="FFFF00"/>
-                </a:highlight>
-                <a:latin typeface="Times New Roman"/>
-                <a:cs typeface="Times New Roman"/>
-              </a:rPr>
-              <a:t>TODO</a:t>
+              <a:t>разработке инструментов мониторинга</a:t>
             </a:r>
             <a:endParaRPr sz="1600" dirty="0">
               <a:latin typeface="Times New Roman"/>
@@ -15173,7 +16801,7 @@
                         </a:rPr>
                         <a:t>времени.</a:t>
                       </a:r>
-                      <a:endParaRPr sz="1600">
+                      <a:endParaRPr sz="1600" dirty="0">
                         <a:latin typeface="Times New Roman"/>
                         <a:cs typeface="Times New Roman"/>
                       </a:endParaRPr>
@@ -16739,7 +18367,7 @@
                         </a:rPr>
                         <a:t>поддержка</a:t>
                       </a:r>
-                      <a:endParaRPr sz="1600">
+                      <a:endParaRPr sz="1600" dirty="0">
                         <a:latin typeface="Times New Roman"/>
                         <a:cs typeface="Times New Roman"/>
                       </a:endParaRPr>
@@ -16771,7 +18399,7 @@
                         </a:rPr>
                         <a:t>памяти</a:t>
                       </a:r>
-                      <a:endParaRPr sz="1600">
+                      <a:endParaRPr sz="1600" dirty="0">
                         <a:latin typeface="Times New Roman"/>
                         <a:cs typeface="Times New Roman"/>
                       </a:endParaRPr>
@@ -18056,11 +19684,18 @@
               <a:t>   </a:t>
             </a:r>
             <a:r>
-              <a:rPr sz="2600" spc="-10" dirty="0">
-                <a:latin typeface="Times New Roman"/>
-                <a:cs typeface="Times New Roman"/>
-              </a:rPr>
-              <a:t>Проанализировать</a:t>
+              <a:rPr lang="ru-RU" sz="2600" spc="-10" dirty="0">
+                <a:latin typeface="Times New Roman"/>
+                <a:cs typeface="Times New Roman"/>
+              </a:rPr>
+              <a:t>Пр</a:t>
+            </a:r>
+            <a:r>
+              <a:rPr sz="2600" spc="-10" dirty="0" err="1">
+                <a:latin typeface="Times New Roman"/>
+                <a:cs typeface="Times New Roman"/>
+              </a:rPr>
+              <a:t>оанализировать</a:t>
             </a:r>
             <a:r>
               <a:rPr sz="2600" spc="-40" dirty="0">
@@ -18070,7 +19705,7 @@
               <a:t> </a:t>
             </a:r>
             <a:r>
-              <a:rPr sz="2600" dirty="0">
+              <a:rPr sz="2600" dirty="0" err="1">
                 <a:latin typeface="Times New Roman"/>
                 <a:cs typeface="Times New Roman"/>
               </a:rPr>
@@ -18084,11 +19719,18 @@
               <a:t> </a:t>
             </a:r>
             <a:r>
-              <a:rPr sz="2600" spc="-25" dirty="0">
-                <a:latin typeface="Times New Roman"/>
-                <a:cs typeface="Times New Roman"/>
-              </a:rPr>
-              <a:t>подходов</a:t>
+              <a:rPr sz="2600" spc="-25" dirty="0" err="1">
+                <a:latin typeface="Times New Roman"/>
+                <a:cs typeface="Times New Roman"/>
+              </a:rPr>
+              <a:t>подход</a:t>
+            </a:r>
+            <a:r>
+              <a:rPr lang="ru-RU" sz="2600" spc="-25" dirty="0">
+                <a:latin typeface="Times New Roman"/>
+                <a:cs typeface="Times New Roman"/>
+              </a:rPr>
+              <a:t>ы</a:t>
             </a:r>
             <a:r>
               <a:rPr sz="2600" spc="-75" dirty="0">
@@ -18191,11 +19833,32 @@
               </a:tabLst>
             </a:pPr>
             <a:r>
+              <a:rPr lang="ru-RU" sz="2600" spc="-10" dirty="0">
+                <a:latin typeface="Times New Roman"/>
+                <a:cs typeface="Times New Roman"/>
+              </a:rPr>
+              <a:t>С</a:t>
+            </a:r>
+            <a:r>
+              <a:rPr sz="2600" spc="-10" dirty="0" err="1">
+                <a:latin typeface="Times New Roman"/>
+                <a:cs typeface="Times New Roman"/>
+              </a:rPr>
+              <a:t>проектировать</a:t>
+            </a:r>
+            <a:r>
+              <a:rPr sz="2600" dirty="0">
+                <a:latin typeface="Times New Roman"/>
+                <a:cs typeface="Times New Roman"/>
+              </a:rPr>
+              <a:t>	</a:t>
+            </a:r>
+            <a:r>
               <a:rPr sz="2600" spc="-10" dirty="0">
                 <a:latin typeface="Times New Roman"/>
                 <a:cs typeface="Times New Roman"/>
               </a:rPr>
-              <a:t>Спроектировать</a:t>
+              <a:t>архитектуру</a:t>
             </a:r>
             <a:r>
               <a:rPr sz="2600" dirty="0">
@@ -18209,7 +19872,7 @@
                 <a:latin typeface="Times New Roman"/>
                 <a:cs typeface="Times New Roman"/>
               </a:rPr>
-              <a:t>архитектуру</a:t>
+              <a:t>инструмента</a:t>
             </a:r>
             <a:r>
               <a:rPr sz="2600" dirty="0">
@@ -18219,11 +19882,11 @@
               <a:t>	</a:t>
             </a:r>
             <a:r>
-              <a:rPr sz="2600" spc="-10" dirty="0">
-                <a:latin typeface="Times New Roman"/>
-                <a:cs typeface="Times New Roman"/>
-              </a:rPr>
-              <a:t>инструмента</a:t>
+              <a:rPr sz="2600" spc="-25" dirty="0">
+                <a:latin typeface="Times New Roman"/>
+                <a:cs typeface="Times New Roman"/>
+              </a:rPr>
+              <a:t>для</a:t>
             </a:r>
             <a:r>
               <a:rPr sz="2600" dirty="0">
@@ -18237,23 +19900,9 @@
                 <a:latin typeface="Times New Roman"/>
                 <a:cs typeface="Times New Roman"/>
               </a:rPr>
-              <a:t>для</a:t>
-            </a:r>
-            <a:r>
-              <a:rPr sz="2600" dirty="0">
-                <a:latin typeface="Times New Roman"/>
-                <a:cs typeface="Times New Roman"/>
-              </a:rPr>
-              <a:t>	</a:t>
-            </a:r>
-            <a:r>
-              <a:rPr sz="2600" spc="-25" dirty="0">
-                <a:latin typeface="Times New Roman"/>
-                <a:cs typeface="Times New Roman"/>
-              </a:rPr>
               <a:t>контекстного</a:t>
             </a:r>
-            <a:endParaRPr sz="2600">
+            <a:endParaRPr sz="2600" dirty="0">
               <a:latin typeface="Times New Roman"/>
               <a:cs typeface="Times New Roman"/>
             </a:endParaRPr>
@@ -18337,7 +19986,7 @@
               </a:rPr>
               <a:t>памяти;</a:t>
             </a:r>
-            <a:endParaRPr sz="2600">
+            <a:endParaRPr sz="2600" dirty="0">
               <a:latin typeface="Times New Roman"/>
               <a:cs typeface="Times New Roman"/>
             </a:endParaRPr>
@@ -18365,11 +20014,46 @@
               </a:tabLst>
             </a:pPr>
             <a:r>
+              <a:rPr lang="ru-RU" sz="2600" spc="-10" dirty="0">
+                <a:latin typeface="Times New Roman"/>
+                <a:cs typeface="Times New Roman"/>
+              </a:rPr>
+              <a:t>Р</a:t>
+            </a:r>
+            <a:r>
+              <a:rPr sz="2600" spc="-10" dirty="0" err="1">
+                <a:latin typeface="Times New Roman"/>
+                <a:cs typeface="Times New Roman"/>
+              </a:rPr>
+              <a:t>азработать</a:t>
+            </a:r>
+            <a:r>
+              <a:rPr sz="2600" dirty="0">
+                <a:latin typeface="Times New Roman"/>
+                <a:cs typeface="Times New Roman"/>
+              </a:rPr>
+              <a:t>	</a:t>
+            </a:r>
+            <a:r>
+              <a:rPr sz="2600" spc="-50" dirty="0">
+                <a:latin typeface="Times New Roman"/>
+                <a:cs typeface="Times New Roman"/>
+              </a:rPr>
+              <a:t>и</a:t>
+            </a:r>
+            <a:r>
+              <a:rPr sz="2600" dirty="0">
+                <a:latin typeface="Times New Roman"/>
+                <a:cs typeface="Times New Roman"/>
+              </a:rPr>
+              <a:t>	</a:t>
+            </a:r>
+            <a:r>
               <a:rPr sz="2600" spc="-10" dirty="0">
                 <a:latin typeface="Times New Roman"/>
                 <a:cs typeface="Times New Roman"/>
               </a:rPr>
-              <a:t>Разработать</a:t>
+              <a:t>реализовать</a:t>
             </a:r>
             <a:r>
               <a:rPr sz="2600" dirty="0">
@@ -18379,11 +20063,11 @@
               <a:t>	</a:t>
             </a:r>
             <a:r>
-              <a:rPr sz="2600" spc="-50" dirty="0">
-                <a:latin typeface="Times New Roman"/>
-                <a:cs typeface="Times New Roman"/>
-              </a:rPr>
-              <a:t>и</a:t>
+              <a:rPr sz="2600" spc="-10" dirty="0">
+                <a:latin typeface="Times New Roman"/>
+                <a:cs typeface="Times New Roman"/>
+              </a:rPr>
+              <a:t>прототип</a:t>
             </a:r>
             <a:r>
               <a:rPr sz="2600" dirty="0">
@@ -18397,7 +20081,7 @@
                 <a:latin typeface="Times New Roman"/>
                 <a:cs typeface="Times New Roman"/>
               </a:rPr>
-              <a:t>реализовать</a:t>
+              <a:t>инструмента</a:t>
             </a:r>
             <a:r>
               <a:rPr sz="2600" dirty="0">
@@ -18407,83 +20091,55 @@
               <a:t>	</a:t>
             </a:r>
             <a:r>
+              <a:rPr sz="2600" spc="-25" dirty="0">
+                <a:latin typeface="Times New Roman"/>
+                <a:cs typeface="Times New Roman"/>
+              </a:rPr>
+              <a:t>для </a:t>
+            </a:r>
+            <a:r>
+              <a:rPr sz="2600" dirty="0">
+                <a:latin typeface="Times New Roman"/>
+                <a:cs typeface="Times New Roman"/>
+              </a:rPr>
+              <a:t>мониторинга</a:t>
+            </a:r>
+            <a:r>
+              <a:rPr sz="2600" spc="-55" dirty="0">
+                <a:latin typeface="Times New Roman"/>
+                <a:cs typeface="Times New Roman"/>
+              </a:rPr>
+              <a:t> </a:t>
+            </a:r>
+            <a:r>
+              <a:rPr sz="2600" dirty="0">
+                <a:latin typeface="Times New Roman"/>
+                <a:cs typeface="Times New Roman"/>
+              </a:rPr>
+              <a:t>доступа</a:t>
+            </a:r>
+            <a:r>
+              <a:rPr sz="2600" spc="-40" dirty="0">
+                <a:latin typeface="Times New Roman"/>
+                <a:cs typeface="Times New Roman"/>
+              </a:rPr>
+              <a:t> </a:t>
+            </a:r>
+            <a:r>
+              <a:rPr sz="2600" dirty="0">
+                <a:latin typeface="Times New Roman"/>
+                <a:cs typeface="Times New Roman"/>
+              </a:rPr>
+              <a:t>к </a:t>
+            </a:r>
+            <a:r>
               <a:rPr sz="2600" spc="-10" dirty="0">
                 <a:latin typeface="Times New Roman"/>
                 <a:cs typeface="Times New Roman"/>
               </a:rPr>
-              <a:t>прототип</a:t>
-            </a:r>
-            <a:r>
-              <a:rPr sz="2600" dirty="0">
-                <a:latin typeface="Times New Roman"/>
-                <a:cs typeface="Times New Roman"/>
-              </a:rPr>
-              <a:t>	</a:t>
-            </a:r>
-            <a:r>
-              <a:rPr sz="2600" spc="-10" dirty="0">
-                <a:latin typeface="Times New Roman"/>
-                <a:cs typeface="Times New Roman"/>
-              </a:rPr>
-              <a:t>инструмента</a:t>
-            </a:r>
-            <a:r>
-              <a:rPr sz="2600" dirty="0">
-                <a:latin typeface="Times New Roman"/>
-                <a:cs typeface="Times New Roman"/>
-              </a:rPr>
-              <a:t>	</a:t>
-            </a:r>
-            <a:r>
-              <a:rPr sz="2600" spc="-25" dirty="0">
-                <a:latin typeface="Times New Roman"/>
-                <a:cs typeface="Times New Roman"/>
-              </a:rPr>
-              <a:t>для </a:t>
-            </a:r>
-            <a:r>
-              <a:rPr sz="2600" dirty="0">
-                <a:latin typeface="Times New Roman"/>
-                <a:cs typeface="Times New Roman"/>
-              </a:rPr>
-              <a:t>мониторинга</a:t>
-            </a:r>
-            <a:r>
-              <a:rPr sz="2600" spc="-55" dirty="0">
-                <a:latin typeface="Times New Roman"/>
-                <a:cs typeface="Times New Roman"/>
-              </a:rPr>
-              <a:t> </a:t>
-            </a:r>
-            <a:r>
-              <a:rPr sz="2600" dirty="0">
-                <a:latin typeface="Times New Roman"/>
-                <a:cs typeface="Times New Roman"/>
-              </a:rPr>
-              <a:t>доступа</a:t>
-            </a:r>
-            <a:r>
-              <a:rPr sz="2600" spc="-40" dirty="0">
-                <a:latin typeface="Times New Roman"/>
-                <a:cs typeface="Times New Roman"/>
-              </a:rPr>
-              <a:t> </a:t>
-            </a:r>
-            <a:r>
-              <a:rPr sz="2600" dirty="0">
-                <a:latin typeface="Times New Roman"/>
-                <a:cs typeface="Times New Roman"/>
-              </a:rPr>
-              <a:t>к </a:t>
-            </a:r>
-            <a:r>
-              <a:rPr sz="2600" spc="-10" dirty="0">
-                <a:latin typeface="Times New Roman"/>
-                <a:cs typeface="Times New Roman"/>
-              </a:rPr>
               <a:t>памяти;</a:t>
             </a:r>
-            <a:endParaRPr sz="2600">
+            <a:endParaRPr sz="2600" dirty="0">
               <a:latin typeface="Times New Roman"/>
               <a:cs typeface="Times New Roman"/>
             </a:endParaRPr>
@@ -18506,14 +20162,35 @@
               </a:tabLst>
             </a:pPr>
             <a:r>
+              <a:rPr lang="ru-RU" sz="2600" dirty="0">
+                <a:latin typeface="Times New Roman"/>
+                <a:cs typeface="Times New Roman"/>
+              </a:rPr>
+              <a:t>П</a:t>
+            </a:r>
+            <a:r>
+              <a:rPr sz="2600" dirty="0" err="1">
+                <a:latin typeface="Times New Roman"/>
+                <a:cs typeface="Times New Roman"/>
+              </a:rPr>
+              <a:t>ровести</a:t>
+            </a:r>
+            <a:r>
+              <a:rPr sz="2600" spc="-65" dirty="0">
+                <a:latin typeface="Times New Roman"/>
+                <a:cs typeface="Times New Roman"/>
+              </a:rPr>
+              <a:t> </a:t>
+            </a:r>
+            <a:r>
               <a:rPr sz="2600" dirty="0">
                 <a:latin typeface="Times New Roman"/>
                 <a:cs typeface="Times New Roman"/>
               </a:rPr>
-              <a:t>Провести</a:t>
-            </a:r>
-            <a:r>
-              <a:rPr sz="2600" spc="-65" dirty="0">
+              <a:t>тестирование</a:t>
+            </a:r>
+            <a:r>
+              <a:rPr sz="2600" spc="-50" dirty="0">
                 <a:latin typeface="Times New Roman"/>
                 <a:cs typeface="Times New Roman"/>
               </a:rPr>
@@ -18524,37 +20201,23 @@
                 <a:latin typeface="Times New Roman"/>
                 <a:cs typeface="Times New Roman"/>
               </a:rPr>
-              <a:t>тестирование</a:t>
-            </a:r>
-            <a:r>
-              <a:rPr sz="2600" spc="-50" dirty="0">
+              <a:t>разработанного</a:t>
+            </a:r>
+            <a:r>
+              <a:rPr sz="2600" spc="-45" dirty="0">
                 <a:latin typeface="Times New Roman"/>
                 <a:cs typeface="Times New Roman"/>
               </a:rPr>
               <a:t> </a:t>
             </a:r>
             <a:r>
-              <a:rPr sz="2600" dirty="0">
-                <a:latin typeface="Times New Roman"/>
-                <a:cs typeface="Times New Roman"/>
-              </a:rPr>
-              <a:t>разработанного</a:t>
-            </a:r>
-            <a:r>
-              <a:rPr sz="2600" spc="-45" dirty="0">
-                <a:latin typeface="Times New Roman"/>
-                <a:cs typeface="Times New Roman"/>
-              </a:rPr>
-              <a:t> </a:t>
-            </a:r>
-            <a:r>
               <a:rPr sz="2600" spc="-10" dirty="0">
                 <a:latin typeface="Times New Roman"/>
                 <a:cs typeface="Times New Roman"/>
               </a:rPr>
               <a:t>прототипа;</a:t>
             </a:r>
-            <a:endParaRPr sz="2600">
+            <a:endParaRPr sz="2600" dirty="0">
               <a:latin typeface="Times New Roman"/>
               <a:cs typeface="Times New Roman"/>
             </a:endParaRPr>
@@ -19878,8 +21541,8 @@
         </p:nvSpPr>
         <p:spPr>
           <a:xfrm>
-            <a:off x="1046163" y="2060848"/>
-            <a:ext cx="9928225" cy="3273425"/>
+            <a:off x="1046163" y="1916832"/>
+            <a:ext cx="9928225" cy="3704219"/>
           </a:xfrm>
           <a:prstGeom prst="rect">
             <a:avLst/>
@@ -19891,7 +21554,7 @@
           </a:bodyPr>
           <a:lstStyle/>
           <a:p>
-            <a:pPr marL="285115" marR="5080" indent="-273050" algn="just">
+            <a:pPr marL="12065" marR="5080" algn="just">
               <a:lnSpc>
                 <a:spcPct val="100000"/>
               </a:lnSpc>
@@ -19902,8 +21565,6 @@
                 <a:srgbClr val="4F81BC"/>
               </a:buClr>
               <a:buSzPct val="69230"/>
-              <a:buFont typeface="Wingdings"/>
-              <a:buChar char=""/>
               <a:tabLst>
                 <a:tab pos="285115" algn="l"/>
               </a:tabLst>
@@ -20137,15 +21798,50 @@
                 <a:latin typeface="Times New Roman"/>
                 <a:cs typeface="Times New Roman"/>
               </a:rPr>
-              <a:t>источник доступа.</a:t>
-            </a:r>
+              <a:t>источник </a:t>
+            </a:r>
+            <a:r>
+              <a:rPr sz="2600" spc="-10" dirty="0" err="1">
+                <a:latin typeface="Times New Roman"/>
+                <a:cs typeface="Times New Roman"/>
+              </a:rPr>
+              <a:t>доступа</a:t>
+            </a:r>
+            <a:r>
+              <a:rPr sz="2600" spc="-10" dirty="0">
+                <a:latin typeface="Times New Roman"/>
+                <a:cs typeface="Times New Roman"/>
+              </a:rPr>
+              <a:t>.</a:t>
+            </a:r>
+            <a:endParaRPr lang="ru-RU" sz="2600" spc="-10" dirty="0">
+              <a:latin typeface="Times New Roman"/>
+              <a:cs typeface="Times New Roman"/>
+            </a:endParaRPr>
+          </a:p>
+          <a:p>
+            <a:pPr marL="12065" marR="5080" algn="just">
+              <a:lnSpc>
+                <a:spcPct val="100000"/>
+              </a:lnSpc>
+              <a:spcBef>
+                <a:spcPts val="105"/>
+              </a:spcBef>
+              <a:buClr>
+                <a:srgbClr val="4F81BC"/>
+              </a:buClr>
+              <a:buSzPct val="69230"/>
+              <a:tabLst>
+                <a:tab pos="285115" algn="l"/>
+              </a:tabLst>
+            </a:pPr>
             <a:endParaRPr sz="2600" dirty="0">
               <a:latin typeface="Times New Roman"/>
               <a:cs typeface="Times New Roman"/>
             </a:endParaRPr>
           </a:p>
           <a:p>
-            <a:pPr marL="285115" marR="10160" indent="-273050" algn="just">
+            <a:pPr marL="12065" marR="10160" algn="just">
               <a:lnSpc>
                 <a:spcPct val="100000"/>
               </a:lnSpc>
@@ -20156,8 +21852,6 @@
                 <a:srgbClr val="4F81BC"/>
               </a:buClr>
               <a:buSzPct val="69230"/>
-              <a:buFont typeface="Wingdings"/>
-              <a:buChar char=""/>
               <a:tabLst>
                 <a:tab pos="285115" algn="l"/>
               </a:tabLst>

--- a/part2/Презентация.pptx
+++ b/part2/Презентация.pptx
@@ -297,7 +297,7 @@
               <a:pPr>
                 <a:defRPr/>
               </a:pPr>
-              <a:t>16.06.2026</a:t>
+              <a:t>19.06.2026</a:t>
             </a:fld>
             <a:endParaRPr lang="ru-RU"/>
           </a:p>
@@ -538,7 +538,7 @@
               <a:pPr>
                 <a:defRPr/>
               </a:pPr>
-              <a:t>16.06.2026</a:t>
+              <a:t>19.06.2026</a:t>
             </a:fld>
             <a:endParaRPr lang="ru-RU"/>
           </a:p>
@@ -6354,7 +6354,7 @@
         </p:nvSpPr>
         <p:spPr>
           <a:xfrm>
-            <a:off x="3719736" y="6307336"/>
+            <a:off x="1066624" y="6353969"/>
             <a:ext cx="4521460" cy="307777"/>
           </a:xfrm>
           <a:prstGeom prst="rect">
@@ -6411,7 +6411,7 @@
         </p:blipFill>
         <p:spPr>
           <a:xfrm>
-            <a:off x="3071664" y="612659"/>
+            <a:off x="553595" y="559969"/>
             <a:ext cx="5547519" cy="5775611"/>
           </a:xfrm>
           <a:prstGeom prst="rect">
@@ -6419,6 +6419,273 @@
           </a:prstGeom>
         </p:spPr>
       </p:pic>
+      <p:graphicFrame>
+        <p:nvGraphicFramePr>
+          <p:cNvPr id="4" name="Table 3">
+            <a:extLst>
+              <a:ext uri="{FF2B5EF4-FFF2-40B4-BE49-F238E27FC236}">
+                <a16:creationId xmlns:a16="http://schemas.microsoft.com/office/drawing/2014/main" id="{927C7DB5-B6D7-CA81-DF9C-6FF6DE2DE0B3}"/>
+              </a:ext>
+            </a:extLst>
+          </p:cNvPr>
+          <p:cNvGraphicFramePr>
+            <a:graphicFrameLocks noGrp="1"/>
+          </p:cNvGraphicFramePr>
+          <p:nvPr>
+            <p:extLst>
+              <p:ext uri="{D42A27DB-BD31-4B8C-83A1-F6EECF244321}">
+                <p14:modId xmlns:p14="http://schemas.microsoft.com/office/powerpoint/2010/main" val="1848767533"/>
+              </p:ext>
+            </p:extLst>
+          </p:nvPr>
+        </p:nvGraphicFramePr>
+        <p:xfrm>
+          <a:off x="6426865" y="1655768"/>
+          <a:ext cx="4808666" cy="1970004"/>
+        </p:xfrm>
+        <a:graphic>
+          <a:graphicData uri="http://schemas.openxmlformats.org/drawingml/2006/table">
+            <a:tbl>
+              <a:tblPr firstRow="1" bandRow="1">
+                <a:tableStyleId>{5C22544A-7EE6-4342-B048-85BDC9FD1C3A}</a:tableStyleId>
+              </a:tblPr>
+              <a:tblGrid>
+                <a:gridCol w="893271">
+                  <a:extLst>
+                    <a:ext uri="{9D8B030D-6E8A-4147-A177-3AD203B41FA5}">
+                      <a16:colId xmlns:a16="http://schemas.microsoft.com/office/drawing/2014/main" val="4189095062"/>
+                    </a:ext>
+                  </a:extLst>
+                </a:gridCol>
+                <a:gridCol w="3915395">
+                  <a:extLst>
+                    <a:ext uri="{9D8B030D-6E8A-4147-A177-3AD203B41FA5}">
+                      <a16:colId xmlns:a16="http://schemas.microsoft.com/office/drawing/2014/main" val="1280274518"/>
+                    </a:ext>
+                  </a:extLst>
+                </a:gridCol>
+              </a:tblGrid>
+              <a:tr h="443308">
+                <a:tc>
+                  <a:txBody>
+                    <a:bodyPr/>
+                    <a:lstStyle/>
+                    <a:p>
+                      <a:r>
+                        <a:rPr lang="ru-RU" dirty="0"/>
+                        <a:t>Номер блока</a:t>
+                      </a:r>
+                    </a:p>
+                  </a:txBody>
+                  <a:tcPr/>
+                </a:tc>
+                <a:tc>
+                  <a:txBody>
+                    <a:bodyPr/>
+                    <a:lstStyle/>
+                    <a:p>
+                      <a:r>
+                        <a:rPr lang="ru-RU" dirty="0"/>
+                        <a:t>Используемые механизмы </a:t>
+                      </a:r>
+                      <a:r>
+                        <a:rPr lang="en-US" dirty="0" err="1"/>
+                        <a:t>linux</a:t>
+                      </a:r>
+                      <a:endParaRPr lang="ru-RU" dirty="0"/>
+                    </a:p>
+                  </a:txBody>
+                  <a:tcPr/>
+                </a:tc>
+                <a:extLst>
+                  <a:ext uri="{0D108BD9-81ED-4DB2-BD59-A6C34878D82A}">
+                    <a16:rowId xmlns:a16="http://schemas.microsoft.com/office/drawing/2014/main" val="2191017253"/>
+                  </a:ext>
+                </a:extLst>
+              </a:tr>
+              <a:tr h="443308">
+                <a:tc>
+                  <a:txBody>
+                    <a:bodyPr/>
+                    <a:lstStyle/>
+                    <a:p>
+                      <a:endParaRPr lang="ru-RU"/>
+                    </a:p>
+                  </a:txBody>
+                  <a:tcPr/>
+                </a:tc>
+                <a:tc>
+                  <a:txBody>
+                    <a:bodyPr/>
+                    <a:lstStyle/>
+                    <a:p>
+                      <a:endParaRPr lang="ru-RU"/>
+                    </a:p>
+                  </a:txBody>
+                  <a:tcPr/>
+                </a:tc>
+                <a:extLst>
+                  <a:ext uri="{0D108BD9-81ED-4DB2-BD59-A6C34878D82A}">
+                    <a16:rowId xmlns:a16="http://schemas.microsoft.com/office/drawing/2014/main" val="1677471484"/>
+                  </a:ext>
+                </a:extLst>
+              </a:tr>
+              <a:tr h="443308">
+                <a:tc>
+                  <a:txBody>
+                    <a:bodyPr/>
+                    <a:lstStyle/>
+                    <a:p>
+                      <a:endParaRPr lang="ru-RU"/>
+                    </a:p>
+                  </a:txBody>
+                  <a:tcPr/>
+                </a:tc>
+                <a:tc>
+                  <a:txBody>
+                    <a:bodyPr/>
+                    <a:lstStyle/>
+                    <a:p>
+                      <a:endParaRPr lang="ru-RU" dirty="0"/>
+                    </a:p>
+                  </a:txBody>
+                  <a:tcPr/>
+                </a:tc>
+                <a:extLst>
+                  <a:ext uri="{0D108BD9-81ED-4DB2-BD59-A6C34878D82A}">
+                    <a16:rowId xmlns:a16="http://schemas.microsoft.com/office/drawing/2014/main" val="1565111586"/>
+                  </a:ext>
+                </a:extLst>
+              </a:tr>
+              <a:tr h="443308">
+                <a:tc>
+                  <a:txBody>
+                    <a:bodyPr/>
+                    <a:lstStyle/>
+                    <a:p>
+                      <a:endParaRPr lang="ru-RU"/>
+                    </a:p>
+                  </a:txBody>
+                  <a:tcPr/>
+                </a:tc>
+                <a:tc>
+                  <a:txBody>
+                    <a:bodyPr/>
+                    <a:lstStyle/>
+                    <a:p>
+                      <a:endParaRPr lang="ru-RU" dirty="0"/>
+                    </a:p>
+                  </a:txBody>
+                  <a:tcPr/>
+                </a:tc>
+                <a:extLst>
+                  <a:ext uri="{0D108BD9-81ED-4DB2-BD59-A6C34878D82A}">
+                    <a16:rowId xmlns:a16="http://schemas.microsoft.com/office/drawing/2014/main" val="1811387758"/>
+                  </a:ext>
+                </a:extLst>
+              </a:tr>
+            </a:tbl>
+          </a:graphicData>
+        </a:graphic>
+      </p:graphicFrame>
+      <p:sp>
+        <p:nvSpPr>
+          <p:cNvPr id="5" name="object 4">
+            <a:extLst>
+              <a:ext uri="{FF2B5EF4-FFF2-40B4-BE49-F238E27FC236}">
+                <a16:creationId xmlns:a16="http://schemas.microsoft.com/office/drawing/2014/main" id="{FC185531-BC6C-D4F2-61FC-197C34738858}"/>
+              </a:ext>
+            </a:extLst>
+          </p:cNvPr>
+          <p:cNvSpPr txBox="1"/>
+          <p:nvPr/>
+        </p:nvSpPr>
+        <p:spPr>
+          <a:xfrm>
+            <a:off x="6578017" y="1052736"/>
+            <a:ext cx="4896543" cy="504625"/>
+          </a:xfrm>
+          <a:prstGeom prst="rect">
+            <a:avLst/>
+          </a:prstGeom>
+        </p:spPr>
+        <p:txBody>
+          <a:bodyPr vert="horz" wrap="square" lIns="0" tIns="12065" rIns="0" bIns="0" rtlCol="0">
+            <a:spAutoFit/>
+          </a:bodyPr>
+          <a:lstStyle/>
+          <a:p>
+            <a:pPr marL="12700">
+              <a:lnSpc>
+                <a:spcPct val="100000"/>
+              </a:lnSpc>
+              <a:spcBef>
+                <a:spcPts val="95"/>
+              </a:spcBef>
+            </a:pPr>
+            <a:r>
+              <a:rPr lang="ru-RU" sz="1600" spc="-10" dirty="0">
+                <a:latin typeface="Times New Roman"/>
+                <a:cs typeface="Times New Roman"/>
+              </a:rPr>
+              <a:t>Таблица</a:t>
+            </a:r>
+            <a:r>
+              <a:rPr sz="1600" spc="-15" dirty="0">
+                <a:latin typeface="Times New Roman"/>
+                <a:cs typeface="Times New Roman"/>
+              </a:rPr>
+              <a:t> </a:t>
+            </a:r>
+            <a:r>
+              <a:rPr lang="en-US" sz="1600" spc="-15" dirty="0">
+                <a:latin typeface="Times New Roman"/>
+                <a:cs typeface="Times New Roman"/>
+              </a:rPr>
+              <a:t>2</a:t>
+            </a:r>
+            <a:r>
+              <a:rPr sz="1600" spc="-40" dirty="0">
+                <a:latin typeface="Times New Roman"/>
+                <a:cs typeface="Times New Roman"/>
+              </a:rPr>
+              <a:t> </a:t>
+            </a:r>
+            <a:r>
+              <a:rPr sz="1600" dirty="0">
+                <a:latin typeface="Times New Roman"/>
+                <a:cs typeface="Times New Roman"/>
+              </a:rPr>
+              <a:t>–</a:t>
+            </a:r>
+            <a:r>
+              <a:rPr sz="1600" spc="-35" dirty="0">
+                <a:latin typeface="Times New Roman"/>
+                <a:cs typeface="Times New Roman"/>
+              </a:rPr>
+              <a:t> </a:t>
+            </a:r>
+            <a:r>
+              <a:rPr lang="ru-RU" sz="1600" spc="-35" dirty="0">
+                <a:latin typeface="Times New Roman"/>
+                <a:cs typeface="Times New Roman"/>
+              </a:rPr>
+              <a:t>Сопоставление частей блок-схемы с механизмами </a:t>
+            </a:r>
+            <a:r>
+              <a:rPr lang="en-US" sz="1600" spc="-35" dirty="0">
+                <a:latin typeface="Times New Roman"/>
+                <a:cs typeface="Times New Roman"/>
+              </a:rPr>
+              <a:t>Linux</a:t>
+            </a:r>
+            <a:endParaRPr sz="1600" dirty="0">
+              <a:latin typeface="Times New Roman"/>
+              <a:cs typeface="Times New Roman"/>
+            </a:endParaRPr>
+          </a:p>
+        </p:txBody>
+      </p:sp>
     </p:spTree>
     <p:extLst>
       <p:ext uri="{BB962C8B-B14F-4D97-AF65-F5344CB8AC3E}">
@@ -6762,7 +7029,7 @@
               <a:rPr lang="ru-RU" sz="1400" dirty="0">
                 <a:latin typeface="+mn-lt"/>
               </a:rPr>
-              <a:t>Рисунок 4 – Формат записи о перехваченом событии доступа</a:t>
+              <a:t>Рисунок 4 – Формат записи о перехваченном событии доступа</a:t>
             </a:r>
           </a:p>
         </p:txBody>
@@ -7469,11 +7736,11 @@
               <a:t> </a:t>
             </a:r>
             <a:r>
-              <a:rPr lang="ru-RU" sz="1600" spc="-15" dirty="0">
-                <a:latin typeface="Times New Roman"/>
-                <a:cs typeface="Times New Roman"/>
-              </a:rPr>
-              <a:t>2</a:t>
+              <a:rPr lang="en-US" sz="1600" spc="-15" dirty="0">
+                <a:latin typeface="Times New Roman"/>
+                <a:cs typeface="Times New Roman"/>
+              </a:rPr>
+              <a:t>3</a:t>
             </a:r>
             <a:r>
               <a:rPr sz="1600" spc="-40" dirty="0">
@@ -7525,7 +7792,7 @@
           <p:nvPr>
             <p:extLst>
               <p:ext uri="{D42A27DB-BD31-4B8C-83A1-F6EECF244321}">
-                <p14:modId xmlns:p14="http://schemas.microsoft.com/office/powerpoint/2010/main" val="2081148393"/>
+                <p14:modId xmlns:p14="http://schemas.microsoft.com/office/powerpoint/2010/main" val="1305075818"/>
               </p:ext>
             </p:extLst>
           </p:nvPr>
@@ -7642,7 +7909,7 @@
                       <a:pPr algn="ctr"/>
                       <a:r>
                         <a:rPr lang="ru-RU" dirty="0"/>
-                        <a:t>Легетимная запись</a:t>
+                        <a:t>Легитимная запись</a:t>
                       </a:r>
                     </a:p>
                   </a:txBody>
@@ -9367,7 +9634,7 @@
               <a:rPr lang="ru-RU" sz="1400" dirty="0">
                 <a:latin typeface="+mn-lt"/>
               </a:rPr>
-              <a:t>Рисунок 5 – схема инжекции </a:t>
+              <a:t>Рисунок 5 – Схема инжекции </a:t>
             </a:r>
             <a:r>
               <a:rPr lang="en-US" sz="1400" dirty="0" err="1">
@@ -9970,11 +10237,11 @@
               <a:t> </a:t>
             </a:r>
             <a:r>
-              <a:rPr lang="ru-RU" sz="1600" spc="-15" dirty="0">
-                <a:latin typeface="Times New Roman"/>
-                <a:cs typeface="Times New Roman"/>
-              </a:rPr>
-              <a:t>3</a:t>
+              <a:rPr lang="en-US" sz="1600" spc="-15" dirty="0">
+                <a:latin typeface="Times New Roman"/>
+                <a:cs typeface="Times New Roman"/>
+              </a:rPr>
+              <a:t>4</a:t>
             </a:r>
             <a:r>
               <a:rPr sz="1600" spc="-40" dirty="0">
@@ -15957,14 +16224,14 @@
           <p:nvPr>
             <p:extLst>
               <p:ext uri="{D42A27DB-BD31-4B8C-83A1-F6EECF244321}">
-                <p14:modId xmlns:p14="http://schemas.microsoft.com/office/powerpoint/2010/main" val="878548830"/>
+                <p14:modId xmlns:p14="http://schemas.microsoft.com/office/powerpoint/2010/main" val="260372187"/>
               </p:ext>
             </p:extLst>
           </p:nvPr>
         </p:nvGraphicFramePr>
         <p:xfrm>
           <a:off x="479376" y="1285557"/>
-          <a:ext cx="10370183" cy="5297805"/>
+          <a:ext cx="10370183" cy="5489575"/>
         </p:xfrm>
         <a:graphic>
           <a:graphicData uri="http://schemas.openxmlformats.org/drawingml/2006/table">
@@ -16858,13 +17125,10 @@
                         </a:spcBef>
                       </a:pPr>
                       <a:r>
-                        <a:rPr sz="1600" spc="-10" dirty="0">
-                          <a:latin typeface="Times New Roman"/>
-                          <a:cs typeface="Times New Roman"/>
-                        </a:rPr>
-                        <a:t>Автоматизация профилирования памяти</a:t>
+                        <a:rPr lang="ru-RU" sz="1600" dirty="0"/>
+                        <a:t>Семплирующее обнаружение через охранные страницы</a:t>
                       </a:r>
-                      <a:endParaRPr sz="1600">
+                      <a:endParaRPr sz="1600" dirty="0">
                         <a:latin typeface="Times New Roman"/>
                         <a:cs typeface="Times New Roman"/>
                       </a:endParaRPr>
@@ -16914,59 +17178,22 @@
                         </a:spcBef>
                       </a:pPr>
                       <a:r>
-                        <a:rPr sz="1600" dirty="0">
-                          <a:latin typeface="Times New Roman"/>
-                          <a:cs typeface="Times New Roman"/>
-                        </a:rPr>
-                        <a:t>Pagani</a:t>
+                        <a:rPr lang="en-US" sz="1600" dirty="0"/>
+                        <a:t>K. </a:t>
                       </a:r>
                       <a:r>
-                        <a:rPr sz="1600" spc="-65" dirty="0">
-                          <a:latin typeface="Times New Roman"/>
-                          <a:cs typeface="Times New Roman"/>
-                        </a:rPr>
+                        <a:rPr lang="en-US" sz="1600" dirty="0" err="1"/>
+                        <a:t>Serebryany</a:t>
+                      </a:r>
+                      <a:r>
+                        <a:rPr lang="en-US" sz="1600" dirty="0"/>
                         <a:t> </a:t>
                       </a:r>
                       <a:r>
-                        <a:rPr sz="1600" spc="-20" dirty="0">
-                          <a:latin typeface="Times New Roman"/>
-                          <a:cs typeface="Times New Roman"/>
-                        </a:rPr>
-                        <a:t>F.,</a:t>
+                        <a:rPr lang="ru-RU" sz="1600" dirty="0"/>
+                        <a:t>и др.</a:t>
                       </a:r>
-                      <a:r>
-                        <a:rPr sz="1600" spc="-60" dirty="0">
-                          <a:latin typeface="Times New Roman"/>
-                          <a:cs typeface="Times New Roman"/>
-                        </a:rPr>
-                        <a:t> </a:t>
-                      </a:r>
-                      <a:r>
-                        <a:rPr sz="1600" spc="-10" dirty="0">
-                          <a:latin typeface="Times New Roman"/>
-                          <a:cs typeface="Times New Roman"/>
-                        </a:rPr>
-                        <a:t>Balzarotti</a:t>
-                      </a:r>
-                      <a:endParaRPr sz="1600">
-                        <a:latin typeface="Times New Roman"/>
-                        <a:cs typeface="Times New Roman"/>
-                      </a:endParaRPr>
-                    </a:p>
-                    <a:p>
-                      <a:pPr marL="91440">
-                        <a:lnSpc>
-                          <a:spcPct val="100000"/>
-                        </a:lnSpc>
-                      </a:pPr>
-                      <a:r>
-                        <a:rPr sz="1600" spc="-25" dirty="0">
-                          <a:latin typeface="Times New Roman"/>
-                          <a:cs typeface="Times New Roman"/>
-                        </a:rPr>
-                        <a:t>D.</a:t>
-                      </a:r>
-                      <a:endParaRPr sz="1600">
+                      <a:endParaRPr sz="1600" dirty="0">
                         <a:latin typeface="Times New Roman"/>
                         <a:cs typeface="Times New Roman"/>
                       </a:endParaRPr>
@@ -17016,132 +17243,10 @@
                         </a:spcBef>
                       </a:pPr>
                       <a:r>
-                        <a:rPr sz="1600" dirty="0">
-                          <a:latin typeface="Times New Roman"/>
-                          <a:cs typeface="Times New Roman"/>
-                        </a:rPr>
-                        <a:t>AutoProfile:</a:t>
+                        <a:rPr lang="ru-RU" sz="1600" dirty="0"/>
+                        <a:t>GWP-ASan: обнаружение ошибок памяти в продакшене через охранные страницы и перехват сигнала.</a:t>
                       </a:r>
-                      <a:r>
-                        <a:rPr sz="1600" spc="-60" dirty="0">
-                          <a:latin typeface="Times New Roman"/>
-                          <a:cs typeface="Times New Roman"/>
-                        </a:rPr>
-                        <a:t> </a:t>
-                      </a:r>
-                      <a:r>
-                        <a:rPr sz="1600" spc="-10" dirty="0">
-                          <a:latin typeface="Times New Roman"/>
-                          <a:cs typeface="Times New Roman"/>
-                        </a:rPr>
-                        <a:t>автоматическая </a:t>
-                      </a:r>
-                      <a:r>
-                        <a:rPr sz="1600" dirty="0">
-                          <a:latin typeface="Times New Roman"/>
-                          <a:cs typeface="Times New Roman"/>
-                        </a:rPr>
-                        <a:t>генерация</a:t>
-                      </a:r>
-                      <a:r>
-                        <a:rPr sz="1600" spc="-70" dirty="0">
-                          <a:latin typeface="Times New Roman"/>
-                          <a:cs typeface="Times New Roman"/>
-                        </a:rPr>
-                        <a:t> </a:t>
-                      </a:r>
-                      <a:r>
-                        <a:rPr sz="1600" dirty="0">
-                          <a:latin typeface="Times New Roman"/>
-                          <a:cs typeface="Times New Roman"/>
-                        </a:rPr>
-                        <a:t>профилей</a:t>
-                      </a:r>
-                      <a:r>
-                        <a:rPr sz="1600" spc="-90" dirty="0">
-                          <a:latin typeface="Times New Roman"/>
-                          <a:cs typeface="Times New Roman"/>
-                        </a:rPr>
-                        <a:t> </a:t>
-                      </a:r>
-                      <a:r>
-                        <a:rPr sz="1600" spc="-10" dirty="0">
-                          <a:latin typeface="Times New Roman"/>
-                          <a:cs typeface="Times New Roman"/>
-                        </a:rPr>
-                        <a:t>памяти </a:t>
-                      </a:r>
-                      <a:r>
-                        <a:rPr sz="1600" dirty="0">
-                          <a:latin typeface="Times New Roman"/>
-                          <a:cs typeface="Times New Roman"/>
-                        </a:rPr>
-                        <a:t>для</a:t>
-                      </a:r>
-                      <a:r>
-                        <a:rPr sz="1600" spc="-70" dirty="0">
-                          <a:latin typeface="Times New Roman"/>
-                          <a:cs typeface="Times New Roman"/>
-                        </a:rPr>
-                        <a:t> </a:t>
-                      </a:r>
-                      <a:r>
-                        <a:rPr sz="1600" dirty="0">
-                          <a:latin typeface="Times New Roman"/>
-                          <a:cs typeface="Times New Roman"/>
-                        </a:rPr>
-                        <a:t>анализа</a:t>
-                      </a:r>
-                      <a:r>
-                        <a:rPr sz="1600" spc="-35" dirty="0">
-                          <a:latin typeface="Times New Roman"/>
-                          <a:cs typeface="Times New Roman"/>
-                        </a:rPr>
-                        <a:t> </a:t>
-                      </a:r>
-                      <a:r>
-                        <a:rPr sz="1600" dirty="0">
-                          <a:latin typeface="Times New Roman"/>
-                          <a:cs typeface="Times New Roman"/>
-                        </a:rPr>
-                        <a:t>потребления</a:t>
-                      </a:r>
-                      <a:r>
-                        <a:rPr sz="1600" spc="-40" dirty="0">
-                          <a:latin typeface="Times New Roman"/>
-                          <a:cs typeface="Times New Roman"/>
-                        </a:rPr>
-                        <a:t> </a:t>
-                      </a:r>
-                      <a:r>
-                        <a:rPr sz="1600" spc="-50" dirty="0">
-                          <a:latin typeface="Times New Roman"/>
-                          <a:cs typeface="Times New Roman"/>
-                        </a:rPr>
-                        <a:t>и </a:t>
-                      </a:r>
-                      <a:r>
-                        <a:rPr sz="1600" dirty="0">
-                          <a:latin typeface="Times New Roman"/>
-                          <a:cs typeface="Times New Roman"/>
-                        </a:rPr>
-                        <a:t>выявления</a:t>
-                      </a:r>
-                      <a:r>
-                        <a:rPr sz="1600" spc="-55" dirty="0">
-                          <a:latin typeface="Times New Roman"/>
-                          <a:cs typeface="Times New Roman"/>
-                        </a:rPr>
-                        <a:t> </a:t>
-                      </a:r>
-                      <a:r>
-                        <a:rPr sz="1600" spc="-10" dirty="0">
-                          <a:latin typeface="Times New Roman"/>
-                          <a:cs typeface="Times New Roman"/>
-                        </a:rPr>
-                        <a:t>аномалий.</a:t>
-                      </a:r>
-                      <a:endParaRPr sz="1600">
+                      <a:endParaRPr sz="1600" dirty="0">
                         <a:latin typeface="Times New Roman"/>
                         <a:cs typeface="Times New Roman"/>
                       </a:endParaRPr>
@@ -17191,125 +17296,10 @@
                         </a:spcBef>
                       </a:pPr>
                       <a:r>
-                        <a:rPr sz="1600" spc="-10" dirty="0">
-                          <a:latin typeface="Times New Roman"/>
-                          <a:cs typeface="Times New Roman"/>
-                        </a:rPr>
-                        <a:t>Ограниченный</a:t>
+                        <a:rPr lang="ru-RU" sz="1600" dirty="0"/>
+                        <a:t>Охватывает только выделения собственного аллокатора, обнаружение вероятностное, нет атрибуции инициатора, код не защищает.</a:t>
                       </a:r>
-                      <a:r>
-                        <a:rPr sz="1600" spc="15" dirty="0">
-                          <a:latin typeface="Times New Roman"/>
-                          <a:cs typeface="Times New Roman"/>
-                        </a:rPr>
-                        <a:t> </a:t>
-                      </a:r>
-                      <a:r>
-                        <a:rPr sz="1600" spc="-10" dirty="0">
-                          <a:latin typeface="Times New Roman"/>
-                          <a:cs typeface="Times New Roman"/>
-                        </a:rPr>
-                        <a:t>динамический </a:t>
-                      </a:r>
-                      <a:r>
-                        <a:rPr sz="1600" spc="-25" dirty="0">
-                          <a:latin typeface="Times New Roman"/>
-                          <a:cs typeface="Times New Roman"/>
-                        </a:rPr>
-                        <a:t>мониторинг,</a:t>
-                      </a:r>
-                      <a:r>
-                        <a:rPr sz="1600" spc="-20" dirty="0">
-                          <a:latin typeface="Times New Roman"/>
-                          <a:cs typeface="Times New Roman"/>
-                        </a:rPr>
-                        <a:t> </a:t>
-                      </a:r>
-                      <a:r>
-                        <a:rPr sz="1600" dirty="0">
-                          <a:latin typeface="Times New Roman"/>
-                          <a:cs typeface="Times New Roman"/>
-                        </a:rPr>
-                        <a:t>фокус</a:t>
-                      </a:r>
-                      <a:r>
-                        <a:rPr sz="1600" spc="-35" dirty="0">
-                          <a:latin typeface="Times New Roman"/>
-                          <a:cs typeface="Times New Roman"/>
-                        </a:rPr>
-                        <a:t> </a:t>
-                      </a:r>
-                      <a:r>
-                        <a:rPr sz="1600" dirty="0">
-                          <a:latin typeface="Times New Roman"/>
-                          <a:cs typeface="Times New Roman"/>
-                        </a:rPr>
-                        <a:t>на</a:t>
-                      </a:r>
-                      <a:r>
-                        <a:rPr sz="1600" spc="-45" dirty="0">
-                          <a:latin typeface="Times New Roman"/>
-                          <a:cs typeface="Times New Roman"/>
-                        </a:rPr>
-                        <a:t> </a:t>
-                      </a:r>
-                      <a:r>
-                        <a:rPr sz="1600" spc="-10" dirty="0">
-                          <a:latin typeface="Times New Roman"/>
-                          <a:cs typeface="Times New Roman"/>
-                        </a:rPr>
-                        <a:t>автоматизации, </a:t>
-                      </a:r>
-                      <a:r>
-                        <a:rPr sz="1600" dirty="0">
-                          <a:latin typeface="Times New Roman"/>
-                          <a:cs typeface="Times New Roman"/>
-                        </a:rPr>
-                        <a:t>а</a:t>
-                      </a:r>
-                      <a:r>
-                        <a:rPr sz="1600" spc="-10" dirty="0">
-                          <a:latin typeface="Times New Roman"/>
-                          <a:cs typeface="Times New Roman"/>
-                        </a:rPr>
-                        <a:t> </a:t>
-                      </a:r>
-                      <a:r>
-                        <a:rPr sz="1600" dirty="0">
-                          <a:latin typeface="Times New Roman"/>
-                          <a:cs typeface="Times New Roman"/>
-                        </a:rPr>
-                        <a:t>не</a:t>
-                      </a:r>
-                      <a:r>
-                        <a:rPr sz="1600" spc="-15" dirty="0">
-                          <a:latin typeface="Times New Roman"/>
-                          <a:cs typeface="Times New Roman"/>
-                        </a:rPr>
-                        <a:t> </a:t>
-                      </a:r>
-                      <a:r>
-                        <a:rPr sz="1600" dirty="0">
-                          <a:latin typeface="Times New Roman"/>
-                          <a:cs typeface="Times New Roman"/>
-                        </a:rPr>
-                        <a:t>на</a:t>
-                      </a:r>
-                      <a:r>
-                        <a:rPr sz="1600" spc="5" dirty="0">
-                          <a:latin typeface="Times New Roman"/>
-                          <a:cs typeface="Times New Roman"/>
-                        </a:rPr>
-                        <a:t> </a:t>
-                      </a:r>
-                      <a:r>
-                        <a:rPr sz="1600" spc="-10" dirty="0">
-                          <a:latin typeface="Times New Roman"/>
-                          <a:cs typeface="Times New Roman"/>
-                        </a:rPr>
-                        <a:t>интерактивности.</a:t>
-                      </a:r>
-                      <a:endParaRPr sz="1600">
+                      <a:endParaRPr sz="1600" dirty="0">
                         <a:latin typeface="Times New Roman"/>
                         <a:cs typeface="Times New Roman"/>
                       </a:endParaRPr>
@@ -17366,55 +17356,10 @@
                         </a:spcBef>
                       </a:pPr>
                       <a:r>
-                        <a:rPr sz="1600" dirty="0">
-                          <a:latin typeface="Times New Roman"/>
-                          <a:cs typeface="Times New Roman"/>
-                        </a:rPr>
-                        <a:t>Профилирование</a:t>
+                        <a:rPr lang="ru-RU" sz="1600" dirty="0"/>
+                        <a:t>Защищённый аллокатор памяти</a:t>
                       </a:r>
-                      <a:r>
-                        <a:rPr sz="1600" spc="-90" dirty="0">
-                          <a:latin typeface="Times New Roman"/>
-                          <a:cs typeface="Times New Roman"/>
-                        </a:rPr>
-                        <a:t> </a:t>
-                      </a:r>
-                      <a:r>
-                        <a:rPr sz="1600" spc="-25" dirty="0">
-                          <a:latin typeface="Times New Roman"/>
-                          <a:cs typeface="Times New Roman"/>
-                        </a:rPr>
-                        <a:t>для </a:t>
-                      </a:r>
-                      <a:r>
-                        <a:rPr sz="1600" spc="-10" dirty="0">
-                          <a:latin typeface="Times New Roman"/>
-                          <a:cs typeface="Times New Roman"/>
-                        </a:rPr>
-                        <a:t>многоуровневой</a:t>
-                      </a:r>
-                      <a:endParaRPr sz="1600">
-                        <a:latin typeface="Times New Roman"/>
-                        <a:cs typeface="Times New Roman"/>
-                      </a:endParaRPr>
-                    </a:p>
-                    <a:p>
-                      <a:pPr marL="91440">
-                        <a:lnSpc>
-                          <a:spcPct val="100000"/>
-                        </a:lnSpc>
-                        <a:spcBef>
-                          <a:spcPts val="5"/>
-                        </a:spcBef>
-                      </a:pPr>
-                      <a:r>
-                        <a:rPr sz="1600" spc="-10" dirty="0">
-                          <a:latin typeface="Times New Roman"/>
-                          <a:cs typeface="Times New Roman"/>
-                        </a:rPr>
-                        <a:t>памяти</a:t>
-                      </a:r>
-                      <a:endParaRPr sz="1600">
+                      <a:endParaRPr sz="1600" dirty="0">
                         <a:latin typeface="Times New Roman"/>
                         <a:cs typeface="Times New Roman"/>
                       </a:endParaRPr>
@@ -17427,17 +17372,23 @@
                       </a:solidFill>
                       <a:prstDash val="solid"/>
                     </a:lnL>
-                    <a:lnR w="12700">
+                    <a:lnR w="12700" cap="flat" cmpd="sng" algn="ctr">
                       <a:solidFill>
                         <a:srgbClr val="FFFFFF"/>
                       </a:solidFill>
                       <a:prstDash val="solid"/>
+                      <a:round/>
+                      <a:headEnd type="none" w="med" len="med"/>
+                      <a:tailEnd type="none" w="med" len="med"/>
                     </a:lnR>
-                    <a:lnT w="12700">
+                    <a:lnT w="12700" cap="flat" cmpd="sng" algn="ctr">
                       <a:solidFill>
                         <a:srgbClr val="FFFFFF"/>
                       </a:solidFill>
                       <a:prstDash val="solid"/>
+                      <a:round/>
+                      <a:headEnd type="none" w="med" len="med"/>
+                      <a:tailEnd type="none" w="med" len="med"/>
                     </a:lnT>
                     <a:lnB w="12700">
                       <a:solidFill>
@@ -17464,78 +17415,42 @@
                         </a:spcBef>
                       </a:pPr>
                       <a:r>
-                        <a:rPr sz="1600" dirty="0">
-                          <a:latin typeface="Times New Roman"/>
-                          <a:cs typeface="Times New Roman"/>
-                        </a:rPr>
-                        <a:t>Li</a:t>
+                        <a:rPr lang="en-US" sz="1600" dirty="0" err="1"/>
+                        <a:t>GrapheneOS</a:t>
                       </a:r>
-                      <a:r>
-                        <a:rPr sz="1600" spc="-35" dirty="0">
-                          <a:latin typeface="Times New Roman"/>
-                          <a:cs typeface="Times New Roman"/>
-                        </a:rPr>
-                        <a:t> </a:t>
-                      </a:r>
-                      <a:r>
-                        <a:rPr sz="1600" dirty="0">
-                          <a:latin typeface="Times New Roman"/>
-                          <a:cs typeface="Times New Roman"/>
-                        </a:rPr>
-                        <a:t>D.,</a:t>
-                      </a:r>
-                      <a:r>
-                        <a:rPr sz="1600" spc="-35" dirty="0">
-                          <a:latin typeface="Times New Roman"/>
-                          <a:cs typeface="Times New Roman"/>
-                        </a:rPr>
-                        <a:t> </a:t>
-                      </a:r>
-                      <a:r>
-                        <a:rPr sz="1600" dirty="0">
-                          <a:latin typeface="Times New Roman"/>
-                          <a:cs typeface="Times New Roman"/>
-                        </a:rPr>
-                        <a:t>Ryu</a:t>
-                      </a:r>
-                      <a:r>
-                        <a:rPr sz="1600" spc="-35" dirty="0">
-                          <a:latin typeface="Times New Roman"/>
-                          <a:cs typeface="Times New Roman"/>
-                        </a:rPr>
-                        <a:t> </a:t>
-                      </a:r>
-                      <a:r>
-                        <a:rPr sz="1600" spc="-25" dirty="0">
-                          <a:latin typeface="Times New Roman"/>
-                          <a:cs typeface="Times New Roman"/>
-                        </a:rPr>
-                        <a:t>J.</a:t>
-                      </a:r>
-                      <a:endParaRPr sz="1600">
+                      <a:endParaRPr sz="1600" dirty="0">
                         <a:latin typeface="Times New Roman"/>
                         <a:cs typeface="Times New Roman"/>
                       </a:endParaRPr>
                     </a:p>
                   </a:txBody>
                   <a:tcPr marL="0" marR="0" marT="39370" marB="0">
-                    <a:lnL w="12700">
+                    <a:lnL w="12700" cap="flat" cmpd="sng" algn="ctr">
                       <a:solidFill>
                         <a:srgbClr val="FFFFFF"/>
                       </a:solidFill>
                       <a:prstDash val="solid"/>
+                      <a:round/>
+                      <a:headEnd type="none" w="med" len="med"/>
+                      <a:tailEnd type="none" w="med" len="med"/>
                     </a:lnL>
-                    <a:lnR w="12700">
+                    <a:lnR w="12700" cap="flat" cmpd="sng" algn="ctr">
                       <a:solidFill>
                         <a:srgbClr val="FFFFFF"/>
                       </a:solidFill>
                       <a:prstDash val="solid"/>
+                      <a:round/>
+                      <a:headEnd type="none" w="med" len="med"/>
+                      <a:tailEnd type="none" w="med" len="med"/>
                     </a:lnR>
-                    <a:lnT w="12700">
+                    <a:lnT w="12700" cap="flat" cmpd="sng" algn="ctr">
                       <a:solidFill>
                         <a:srgbClr val="FFFFFF"/>
                       </a:solidFill>
                       <a:prstDash val="solid"/>
+                      <a:round/>
+                      <a:headEnd type="none" w="med" len="med"/>
+                      <a:tailEnd type="none" w="med" len="med"/>
                     </a:lnT>
                     <a:lnB w="12700">
                       <a:solidFill>
@@ -17553,7 +17468,7 @@
                     <a:bodyPr/>
                     <a:lstStyle/>
                     <a:p>
-                      <a:pPr marL="91440" algn="just">
+                      <a:pPr marL="91440" algn="l">
                         <a:lnSpc>
                           <a:spcPct val="100000"/>
                         </a:lnSpc>
@@ -17562,155 +17477,42 @@
                         </a:spcBef>
                       </a:pPr>
                       <a:r>
-                        <a:rPr sz="1600" dirty="0">
-                          <a:latin typeface="Times New Roman"/>
-                          <a:cs typeface="Times New Roman"/>
-                        </a:rPr>
-                        <a:t>MTM:</a:t>
+                        <a:rPr lang="ru-RU" sz="1600" dirty="0"/>
+                        <a:t>hardened_malloc: расстановка охранных страниц ограничения прав доступа к страницам.</a:t>
                       </a:r>
-                      <a:r>
-                        <a:rPr sz="1600" spc="-35" dirty="0">
-                          <a:latin typeface="Times New Roman"/>
-                          <a:cs typeface="Times New Roman"/>
-                        </a:rPr>
-                        <a:t> </a:t>
-                      </a:r>
-                      <a:r>
-                        <a:rPr sz="1600" spc="-10" dirty="0">
-                          <a:latin typeface="Times New Roman"/>
-                          <a:cs typeface="Times New Roman"/>
-                        </a:rPr>
-                        <a:t>методы</a:t>
-                      </a:r>
-                      <a:endParaRPr sz="1600">
-                        <a:latin typeface="Times New Roman"/>
-                        <a:cs typeface="Times New Roman"/>
-                      </a:endParaRPr>
-                    </a:p>
-                    <a:p>
-                      <a:pPr marL="91440" marR="196850" algn="just">
-                        <a:lnSpc>
-                          <a:spcPct val="100000"/>
-                        </a:lnSpc>
-                        <a:spcBef>
-                          <a:spcPts val="5"/>
-                        </a:spcBef>
-                      </a:pPr>
-                      <a:r>
-                        <a:rPr sz="1600" dirty="0">
-                          <a:latin typeface="Times New Roman"/>
-                          <a:cs typeface="Times New Roman"/>
-                        </a:rPr>
-                        <a:t>профилирования</a:t>
-                      </a:r>
-                      <a:r>
-                        <a:rPr sz="1600" spc="-30" dirty="0">
-                          <a:latin typeface="Times New Roman"/>
-                          <a:cs typeface="Times New Roman"/>
-                        </a:rPr>
-                        <a:t> </a:t>
-                      </a:r>
-                      <a:r>
-                        <a:rPr sz="1600" dirty="0">
-                          <a:latin typeface="Times New Roman"/>
-                          <a:cs typeface="Times New Roman"/>
-                        </a:rPr>
-                        <a:t>и</a:t>
-                      </a:r>
-                      <a:r>
-                        <a:rPr sz="1600" spc="-70" dirty="0">
-                          <a:latin typeface="Times New Roman"/>
-                          <a:cs typeface="Times New Roman"/>
-                        </a:rPr>
-                        <a:t> </a:t>
-                      </a:r>
-                      <a:r>
-                        <a:rPr sz="1600" spc="-10" dirty="0">
-                          <a:latin typeface="Times New Roman"/>
-                          <a:cs typeface="Times New Roman"/>
-                        </a:rPr>
-                        <a:t>миграции </a:t>
-                      </a:r>
-                      <a:r>
-                        <a:rPr sz="1600" dirty="0">
-                          <a:latin typeface="Times New Roman"/>
-                          <a:cs typeface="Times New Roman"/>
-                        </a:rPr>
-                        <a:t>памяти</a:t>
-                      </a:r>
-                      <a:r>
-                        <a:rPr sz="1600" spc="-15" dirty="0">
-                          <a:latin typeface="Times New Roman"/>
-                          <a:cs typeface="Times New Roman"/>
-                        </a:rPr>
-                        <a:t> </a:t>
-                      </a:r>
-                      <a:r>
-                        <a:rPr sz="1600" dirty="0">
-                          <a:latin typeface="Times New Roman"/>
-                          <a:cs typeface="Times New Roman"/>
-                        </a:rPr>
-                        <a:t>для</a:t>
-                      </a:r>
-                      <a:r>
-                        <a:rPr sz="1600" spc="-40" dirty="0">
-                          <a:latin typeface="Times New Roman"/>
-                          <a:cs typeface="Times New Roman"/>
-                        </a:rPr>
-                        <a:t> </a:t>
-                      </a:r>
-                      <a:r>
-                        <a:rPr sz="1600" spc="-10" dirty="0">
-                          <a:latin typeface="Times New Roman"/>
-                          <a:cs typeface="Times New Roman"/>
-                        </a:rPr>
-                        <a:t>многоуровневых </a:t>
-                      </a:r>
-                      <a:r>
-                        <a:rPr sz="1600" dirty="0">
-                          <a:latin typeface="Times New Roman"/>
-                          <a:cs typeface="Times New Roman"/>
-                        </a:rPr>
-                        <a:t>систем</a:t>
-                      </a:r>
-                      <a:r>
-                        <a:rPr sz="1600" spc="-45" dirty="0">
-                          <a:latin typeface="Times New Roman"/>
-                          <a:cs typeface="Times New Roman"/>
-                        </a:rPr>
-                        <a:t> </a:t>
-                      </a:r>
-                      <a:r>
-                        <a:rPr sz="1600" spc="-10" dirty="0">
-                          <a:latin typeface="Times New Roman"/>
-                          <a:cs typeface="Times New Roman"/>
-                        </a:rPr>
-                        <a:t>памяти</a:t>
-                      </a:r>
-                      <a:endParaRPr sz="1600">
+                      <a:endParaRPr sz="1600" dirty="0">
                         <a:latin typeface="Times New Roman"/>
                         <a:cs typeface="Times New Roman"/>
                       </a:endParaRPr>
                     </a:p>
                   </a:txBody>
                   <a:tcPr marL="0" marR="0" marT="39370" marB="0">
-                    <a:lnL w="12700">
+                    <a:lnL w="12700" cap="flat" cmpd="sng" algn="ctr">
                       <a:solidFill>
                         <a:srgbClr val="FFFFFF"/>
                       </a:solidFill>
                       <a:prstDash val="solid"/>
+                      <a:round/>
+                      <a:headEnd type="none" w="med" len="med"/>
+                      <a:tailEnd type="none" w="med" len="med"/>
                     </a:lnL>
-                    <a:lnR w="12700">
+                    <a:lnR w="12700" cap="flat" cmpd="sng" algn="ctr">
                       <a:solidFill>
                         <a:srgbClr val="FFFFFF"/>
                       </a:solidFill>
                       <a:prstDash val="solid"/>
+                      <a:round/>
+                      <a:headEnd type="none" w="med" len="med"/>
+                      <a:tailEnd type="none" w="med" len="med"/>
                     </a:lnR>
-                    <a:lnT w="12700">
+                    <a:lnT w="12700" cap="flat" cmpd="sng" algn="ctr">
                       <a:solidFill>
                         <a:srgbClr val="FFFFFF"/>
                       </a:solidFill>
                       <a:prstDash val="solid"/>
+                      <a:round/>
+                      <a:headEnd type="none" w="med" len="med"/>
+                      <a:tailEnd type="none" w="med" len="med"/>
                     </a:lnT>
                     <a:lnB w="12700">
                       <a:solidFill>
@@ -17799,18 +17601,21 @@
                         </a:rPr>
                         <a:t> наблюдения.</a:t>
                       </a:r>
-                      <a:endParaRPr sz="1600">
+                      <a:endParaRPr sz="1600" dirty="0">
                         <a:latin typeface="Times New Roman"/>
                         <a:cs typeface="Times New Roman"/>
                       </a:endParaRPr>
                     </a:p>
                   </a:txBody>
                   <a:tcPr marL="0" marR="0" marT="39370" marB="0">
-                    <a:lnL w="12700">
+                    <a:lnL w="12700" cap="flat" cmpd="sng" algn="ctr">
                       <a:solidFill>
                         <a:srgbClr val="FFFFFF"/>
                       </a:solidFill>
                       <a:prstDash val="solid"/>
+                      <a:round/>
+                      <a:headEnd type="none" w="med" len="med"/>
+                      <a:tailEnd type="none" w="med" len="med"/>
                     </a:lnL>
                     <a:lnR w="12700">
                       <a:solidFill>
@@ -17818,11 +17623,14 @@
                       </a:solidFill>
                       <a:prstDash val="solid"/>
                     </a:lnR>
-                    <a:lnT w="12700">
+                    <a:lnT w="12700" cap="flat" cmpd="sng" algn="ctr">
                       <a:solidFill>
                         <a:srgbClr val="FFFFFF"/>
                       </a:solidFill>
                       <a:prstDash val="solid"/>
+                      <a:round/>
+                      <a:headEnd type="none" w="med" len="med"/>
+                      <a:tailEnd type="none" w="med" len="med"/>
                     </a:lnT>
                     <a:lnB w="12700">
                       <a:solidFill>
@@ -21962,7 +21770,7 @@
               <a:t>  </a:t>
             </a:r>
             <a:r>
-              <a:rPr sz="2600" dirty="0">
+              <a:rPr sz="2600" dirty="0" err="1">
                 <a:latin typeface="Times New Roman"/>
                 <a:cs typeface="Times New Roman"/>
               </a:rPr>
@@ -21976,11 +21784,18 @@
               <a:t>  </a:t>
             </a:r>
             <a:r>
-              <a:rPr sz="2600" dirty="0">
-                <a:latin typeface="Times New Roman"/>
-                <a:cs typeface="Times New Roman"/>
-              </a:rPr>
-              <a:t>модификации</a:t>
+              <a:rPr sz="2600" dirty="0" err="1">
+                <a:latin typeface="Times New Roman"/>
+                <a:cs typeface="Times New Roman"/>
+              </a:rPr>
+              <a:t>модификаци</a:t>
+            </a:r>
+            <a:r>
+              <a:rPr lang="ru-RU" sz="2600" dirty="0">
+                <a:latin typeface="Times New Roman"/>
+                <a:cs typeface="Times New Roman"/>
+              </a:rPr>
+              <a:t>й</a:t>
             </a:r>
             <a:r>
               <a:rPr sz="2600" spc="405" dirty="0">

--- a/part2/Презентация.pptx
+++ b/part2/Презентация.pptx
@@ -297,7 +297,7 @@
               <a:pPr>
                 <a:defRPr/>
               </a:pPr>
-              <a:t>19.06.2026</a:t>
+              <a:t>21.06.2026</a:t>
             </a:fld>
             <a:endParaRPr lang="ru-RU"/>
           </a:p>
@@ -538,7 +538,7 @@
               <a:pPr>
                 <a:defRPr/>
               </a:pPr>
-              <a:t>19.06.2026</a:t>
+              <a:t>21.06.2026</a:t>
             </a:fld>
             <a:endParaRPr lang="ru-RU"/>
           </a:p>
@@ -5090,23 +5090,29 @@
               <a:buNone/>
             </a:pPr>
             <a:r>
+              <a:rPr lang="ru-RU" altLang="ru-RU" sz="2000" dirty="0">
+                <a:solidFill>
+                  <a:srgbClr val="AAA9B2"/>
+                </a:solidFill>
+                <a:cs typeface="Times New Roman" panose="02020603050405020304" pitchFamily="18" charset="0"/>
+              </a:rPr>
+              <a:t>Москва </a:t>
+            </a:r>
+            <a:r>
               <a:rPr lang="en-US" altLang="ru-RU" sz="2000" dirty="0">
                 <a:solidFill>
                   <a:srgbClr val="AAA9B2"/>
                 </a:solidFill>
                 <a:cs typeface="Times New Roman" panose="02020603050405020304" pitchFamily="18" charset="0"/>
               </a:rPr>
-              <a:t>2026 </a:t>
-            </a:r>
-            <a:r>
-              <a:rPr lang="ru-RU" altLang="ru-RU" sz="2000" dirty="0">
-                <a:solidFill>
-                  <a:srgbClr val="AAA9B2"/>
-                </a:solidFill>
-                <a:cs typeface="Times New Roman" panose="02020603050405020304" pitchFamily="18" charset="0"/>
-              </a:rPr>
-              <a:t>Москва</a:t>
-            </a:r>
+              <a:t>2026</a:t>
+            </a:r>
+            <a:endParaRPr lang="ru-RU" altLang="ru-RU" sz="2000" dirty="0">
+              <a:solidFill>
+                <a:srgbClr val="AAA9B2"/>
+              </a:solidFill>
+              <a:cs typeface="Times New Roman" panose="02020603050405020304" pitchFamily="18" charset="0"/>
+            </a:endParaRPr>
           </a:p>
         </p:txBody>
       </p:sp>
@@ -6354,7 +6360,7 @@
         </p:nvSpPr>
         <p:spPr>
           <a:xfrm>
-            <a:off x="1066624" y="6353969"/>
+            <a:off x="623392" y="6170846"/>
             <a:ext cx="4521460" cy="307777"/>
           </a:xfrm>
           <a:prstGeom prst="rect">
@@ -6411,8 +6417,8 @@
         </p:blipFill>
         <p:spPr>
           <a:xfrm>
-            <a:off x="553595" y="559969"/>
-            <a:ext cx="5547519" cy="5775611"/>
+            <a:off x="197628" y="693592"/>
+            <a:ext cx="5241328" cy="5456831"/>
           </a:xfrm>
           <a:prstGeom prst="rect">
             <a:avLst/>
@@ -6434,14 +6440,14 @@
           <p:nvPr>
             <p:extLst>
               <p:ext uri="{D42A27DB-BD31-4B8C-83A1-F6EECF244321}">
-                <p14:modId xmlns:p14="http://schemas.microsoft.com/office/powerpoint/2010/main" val="1848767533"/>
+                <p14:modId xmlns:p14="http://schemas.microsoft.com/office/powerpoint/2010/main" val="3370411618"/>
               </p:ext>
             </p:extLst>
           </p:nvPr>
         </p:nvGraphicFramePr>
         <p:xfrm>
-          <a:off x="6426865" y="1655768"/>
-          <a:ext cx="4808666" cy="1970004"/>
+          <a:off x="5667002" y="1275316"/>
+          <a:ext cx="5253534" cy="5320172"/>
         </p:xfrm>
         <a:graphic>
           <a:graphicData uri="http://schemas.openxmlformats.org/drawingml/2006/table">
@@ -6450,14 +6456,14 @@
                 <a:tableStyleId>{5C22544A-7EE6-4342-B048-85BDC9FD1C3A}</a:tableStyleId>
               </a:tblPr>
               <a:tblGrid>
-                <a:gridCol w="893271">
+                <a:gridCol w="968110">
                   <a:extLst>
                     <a:ext uri="{9D8B030D-6E8A-4147-A177-3AD203B41FA5}">
                       <a16:colId xmlns:a16="http://schemas.microsoft.com/office/drawing/2014/main" val="4189095062"/>
                     </a:ext>
                   </a:extLst>
                 </a:gridCol>
-                <a:gridCol w="3915395">
+                <a:gridCol w="4285424">
                   <a:extLst>
                     <a:ext uri="{9D8B030D-6E8A-4147-A177-3AD203B41FA5}">
                       <a16:colId xmlns:a16="http://schemas.microsoft.com/office/drawing/2014/main" val="1280274518"/>
@@ -6489,8 +6495,8 @@
                         <a:t>Используемые механизмы </a:t>
                       </a:r>
                       <a:r>
-                        <a:rPr lang="en-US" dirty="0" err="1"/>
-                        <a:t>linux</a:t>
+                        <a:rPr lang="en-US" dirty="0"/>
+                        <a:t>Linux</a:t>
                       </a:r>
                       <a:endParaRPr lang="ru-RU" dirty="0"/>
                     </a:p>
@@ -6503,13 +6509,17 @@
                   </a:ext>
                 </a:extLst>
               </a:tr>
-              <a:tr h="443308">
+              <a:tr h="341064">
                 <a:tc>
                   <a:txBody>
                     <a:bodyPr/>
                     <a:lstStyle/>
                     <a:p>
-                      <a:endParaRPr lang="ru-RU"/>
+                      <a:r>
+                        <a:rPr lang="en-US" sz="1600" dirty="0"/>
+                        <a:t>B2</a:t>
+                      </a:r>
+                      <a:endParaRPr lang="ru-RU" sz="1600" dirty="0"/>
                     </a:p>
                   </a:txBody>
                   <a:tcPr/>
@@ -6519,7 +6529,31 @@
                     <a:bodyPr/>
                     <a:lstStyle/>
                     <a:p>
-                      <a:endParaRPr lang="ru-RU"/>
+                      <a:r>
+                        <a:rPr lang="en-US" sz="1600" dirty="0"/>
+                        <a:t>fork(</a:t>
+                      </a:r>
+                      <a:r>
+                        <a:rPr lang="ru-RU" sz="1600" dirty="0"/>
+                        <a:t>)+</a:t>
+                      </a:r>
+                      <a:r>
+                        <a:rPr lang="en-US" sz="1600" dirty="0" err="1"/>
+                        <a:t>execve</a:t>
+                      </a:r>
+                      <a:r>
+                        <a:rPr lang="en-US" sz="1600" dirty="0"/>
+                        <a:t>() + </a:t>
+                      </a:r>
+                      <a:r>
+                        <a:rPr lang="en-US" sz="1600" dirty="0" err="1"/>
+                        <a:t>ptrace</a:t>
+                      </a:r>
+                      <a:r>
+                        <a:rPr lang="en-US" sz="1600" dirty="0"/>
+                        <a:t>(PTRACE_TRACEME)</a:t>
+                      </a:r>
+                      <a:endParaRPr lang="ru-RU" sz="1600" dirty="0"/>
                     </a:p>
                   </a:txBody>
                   <a:tcPr/>
@@ -6530,13 +6564,17 @@
                   </a:ext>
                 </a:extLst>
               </a:tr>
-              <a:tr h="443308">
+              <a:tr h="360040">
                 <a:tc>
                   <a:txBody>
                     <a:bodyPr/>
                     <a:lstStyle/>
                     <a:p>
-                      <a:endParaRPr lang="ru-RU"/>
+                      <a:r>
+                        <a:rPr lang="en-US" sz="1600" dirty="0"/>
+                        <a:t>C2</a:t>
+                      </a:r>
+                      <a:endParaRPr lang="ru-RU" sz="1600" dirty="0"/>
                     </a:p>
                   </a:txBody>
                   <a:tcPr/>
@@ -6546,7 +6584,15 @@
                     <a:bodyPr/>
                     <a:lstStyle/>
                     <a:p>
-                      <a:endParaRPr lang="ru-RU" dirty="0"/>
+                      <a:r>
+                        <a:rPr lang="ru-RU" sz="1600" dirty="0"/>
+                        <a:t>Чтение </a:t>
+                      </a:r>
+                      <a:r>
+                        <a:rPr lang="en-US" sz="1600" dirty="0"/>
+                        <a:t>ELF (SHT_SYMTAB/SHT_DYNSYM)</a:t>
+                      </a:r>
+                      <a:endParaRPr lang="ru-RU" sz="1600" dirty="0"/>
                     </a:p>
                   </a:txBody>
                   <a:tcPr/>
@@ -6563,7 +6609,11 @@
                     <a:bodyPr/>
                     <a:lstStyle/>
                     <a:p>
-                      <a:endParaRPr lang="ru-RU"/>
+                      <a:r>
+                        <a:rPr lang="en-US" sz="1600" dirty="0"/>
+                        <a:t>D2, E2</a:t>
+                      </a:r>
+                      <a:endParaRPr lang="ru-RU" sz="1600" dirty="0"/>
                     </a:p>
                   </a:txBody>
                   <a:tcPr/>
@@ -6573,7 +6623,39 @@
                     <a:bodyPr/>
                     <a:lstStyle/>
                     <a:p>
-                      <a:endParaRPr lang="ru-RU" dirty="0"/>
+                      <a:r>
+                        <a:rPr lang="ru-RU" sz="1600" dirty="0"/>
+                        <a:t>поиск инструкции syscall чтением /proc/&lt;pid&gt;/mem</a:t>
+                      </a:r>
+                      <a:r>
+                        <a:rPr lang="en-US" sz="1600" dirty="0"/>
+                        <a:t>, </a:t>
+                      </a:r>
+                      <a:r>
+                        <a:rPr lang="ru-RU" sz="1600" dirty="0"/>
+                        <a:t>инжекция </a:t>
+                      </a:r>
+                      <a:r>
+                        <a:rPr lang="en-US" sz="1600" dirty="0" err="1"/>
+                        <a:t>mprotect</a:t>
+                      </a:r>
+                      <a:r>
+                        <a:rPr lang="en-US" sz="1600" dirty="0"/>
+                        <a:t>(PROT_READ) </a:t>
+                      </a:r>
+                      <a:r>
+                        <a:rPr lang="ru-RU" sz="1600" dirty="0"/>
+                        <a:t>через </a:t>
+                      </a:r>
+                      <a:r>
+                        <a:rPr lang="en-US" sz="1600" dirty="0" err="1"/>
+                        <a:t>ptrace</a:t>
+                      </a:r>
+                      <a:r>
+                        <a:rPr lang="en-US" sz="1600" dirty="0"/>
+                        <a:t>(SETREGS)+SINGLESTEP</a:t>
+                      </a:r>
+                      <a:endParaRPr lang="ru-RU" sz="1600" dirty="0"/>
                     </a:p>
                   </a:txBody>
                   <a:tcPr/>
@@ -6581,6 +6663,252 @@
                 <a:extLst>
                   <a:ext uri="{0D108BD9-81ED-4DB2-BD59-A6C34878D82A}">
                     <a16:rowId xmlns:a16="http://schemas.microsoft.com/office/drawing/2014/main" val="1811387758"/>
+                  </a:ext>
+                </a:extLst>
+              </a:tr>
+              <a:tr h="443308">
+                <a:tc>
+                  <a:txBody>
+                    <a:bodyPr/>
+                    <a:lstStyle/>
+                    <a:p>
+                      <a:r>
+                        <a:rPr lang="en-US" sz="1600" dirty="0"/>
+                        <a:t>F2, D4</a:t>
+                      </a:r>
+                      <a:endParaRPr lang="ru-RU" sz="1600" dirty="0"/>
+                    </a:p>
+                  </a:txBody>
+                  <a:tcPr/>
+                </a:tc>
+                <a:tc>
+                  <a:txBody>
+                    <a:bodyPr/>
+                    <a:lstStyle/>
+                    <a:p>
+                      <a:r>
+                        <a:rPr lang="en-US" sz="1600" dirty="0" err="1"/>
+                        <a:t>ptrace</a:t>
+                      </a:r>
+                      <a:r>
+                        <a:rPr lang="en-US" sz="1600" dirty="0"/>
+                        <a:t>(PTRACE_CONT)</a:t>
+                      </a:r>
+                      <a:endParaRPr lang="ru-RU" sz="1600" dirty="0"/>
+                    </a:p>
+                  </a:txBody>
+                  <a:tcPr/>
+                </a:tc>
+                <a:extLst>
+                  <a:ext uri="{0D108BD9-81ED-4DB2-BD59-A6C34878D82A}">
+                    <a16:rowId xmlns:a16="http://schemas.microsoft.com/office/drawing/2014/main" val="2739001603"/>
+                  </a:ext>
+                </a:extLst>
+              </a:tr>
+              <a:tr h="443308">
+                <a:tc>
+                  <a:txBody>
+                    <a:bodyPr/>
+                    <a:lstStyle/>
+                    <a:p>
+                      <a:r>
+                        <a:rPr lang="en-US" sz="1600" dirty="0"/>
+                        <a:t>B3</a:t>
+                      </a:r>
+                      <a:endParaRPr lang="ru-RU" sz="1600" dirty="0"/>
+                    </a:p>
+                  </a:txBody>
+                  <a:tcPr/>
+                </a:tc>
+                <a:tc>
+                  <a:txBody>
+                    <a:bodyPr/>
+                    <a:lstStyle/>
+                    <a:p>
+                      <a:r>
+                        <a:rPr lang="ru-RU" sz="1600" dirty="0"/>
+                        <a:t>Остановка:</a:t>
+                      </a:r>
+                      <a:r>
+                        <a:rPr lang="en-US" sz="1600" dirty="0"/>
+                        <a:t> </a:t>
+                      </a:r>
+                      <a:r>
+                        <a:rPr lang="en-US" sz="1600" dirty="0" err="1"/>
+                        <a:t>waitpid</a:t>
+                      </a:r>
+                      <a:r>
+                        <a:rPr lang="en-US" sz="1600" dirty="0"/>
+                        <a:t>(SIGNALED/EXITED).</a:t>
+                      </a:r>
+                    </a:p>
+                    <a:p>
+                      <a:r>
+                        <a:rPr lang="ru-RU" sz="1600" dirty="0"/>
+                        <a:t>Аппаратное нарушение прав страницы (MMU)</a:t>
+                      </a:r>
+                      <a:r>
+                        <a:rPr lang="en-US" sz="1600" dirty="0"/>
+                        <a:t>,</a:t>
+                      </a:r>
+                      <a:r>
+                        <a:rPr lang="ru-RU" sz="1600" dirty="0"/>
+                        <a:t> </a:t>
+                      </a:r>
+                      <a:r>
+                        <a:rPr lang="en-US" sz="1600" dirty="0" err="1"/>
+                        <a:t>ptrace</a:t>
+                      </a:r>
+                      <a:r>
+                        <a:rPr lang="en-US" sz="1600" dirty="0"/>
+                        <a:t>(GETSIGINFO)</a:t>
+                      </a:r>
+                      <a:endParaRPr lang="ru-RU" sz="1600" dirty="0"/>
+                    </a:p>
+                  </a:txBody>
+                  <a:tcPr/>
+                </a:tc>
+                <a:extLst>
+                  <a:ext uri="{0D108BD9-81ED-4DB2-BD59-A6C34878D82A}">
+                    <a16:rowId xmlns:a16="http://schemas.microsoft.com/office/drawing/2014/main" val="2237863224"/>
+                  </a:ext>
+                </a:extLst>
+              </a:tr>
+              <a:tr h="443308">
+                <a:tc>
+                  <a:txBody>
+                    <a:bodyPr/>
+                    <a:lstStyle/>
+                    <a:p>
+                      <a:r>
+                        <a:rPr lang="en-US" sz="1600" dirty="0"/>
+                        <a:t>F3</a:t>
+                      </a:r>
+                      <a:endParaRPr lang="ru-RU" sz="1600" dirty="0"/>
+                    </a:p>
+                  </a:txBody>
+                  <a:tcPr/>
+                </a:tc>
+                <a:tc>
+                  <a:txBody>
+                    <a:bodyPr/>
+                    <a:lstStyle/>
+                    <a:p>
+                      <a:r>
+                        <a:rPr lang="en-US" sz="1600" dirty="0" err="1"/>
+                        <a:t>ptrace</a:t>
+                      </a:r>
+                      <a:r>
+                        <a:rPr lang="en-US" sz="1600" dirty="0"/>
+                        <a:t>(PTRACE_GETREGS)</a:t>
+                      </a:r>
+                      <a:r>
+                        <a:rPr lang="ru-RU" sz="1600" dirty="0"/>
+                        <a:t>, чтение </a:t>
+                      </a:r>
+                      <a:r>
+                        <a:rPr lang="en-US" sz="1600" dirty="0"/>
+                        <a:t>/proc/&lt;</a:t>
+                      </a:r>
+                      <a:r>
+                        <a:rPr lang="en-US" sz="1600" dirty="0" err="1"/>
+                        <a:t>pid</a:t>
+                      </a:r>
+                      <a:r>
+                        <a:rPr lang="en-US" sz="1600" dirty="0"/>
+                        <a:t>&gt;/maps </a:t>
+                      </a:r>
+                      <a:r>
+                        <a:rPr lang="ru-RU" sz="1600" dirty="0"/>
+                        <a:t>и </a:t>
+                      </a:r>
+                      <a:r>
+                        <a:rPr lang="en-US" sz="1600" dirty="0"/>
+                        <a:t>STT_FUNC </a:t>
+                      </a:r>
+                      <a:r>
+                        <a:rPr lang="ru-RU" sz="1600" dirty="0"/>
+                        <a:t>из </a:t>
+                      </a:r>
+                      <a:r>
+                        <a:rPr lang="en-US" sz="1600" dirty="0"/>
+                        <a:t>ELF</a:t>
+                      </a:r>
+                      <a:endParaRPr lang="ru-RU" sz="1600" dirty="0"/>
+                    </a:p>
+                  </a:txBody>
+                  <a:tcPr/>
+                </a:tc>
+                <a:extLst>
+                  <a:ext uri="{0D108BD9-81ED-4DB2-BD59-A6C34878D82A}">
+                    <a16:rowId xmlns:a16="http://schemas.microsoft.com/office/drawing/2014/main" val="2929816564"/>
+                  </a:ext>
+                </a:extLst>
+              </a:tr>
+              <a:tr h="443308">
+                <a:tc>
+                  <a:txBody>
+                    <a:bodyPr/>
+                    <a:lstStyle/>
+                    <a:p>
+                      <a:r>
+                        <a:rPr lang="en-US" sz="1600" dirty="0"/>
+                        <a:t>G3, H3</a:t>
+                      </a:r>
+                      <a:endParaRPr lang="ru-RU" sz="1600" dirty="0"/>
+                    </a:p>
+                  </a:txBody>
+                  <a:tcPr/>
+                </a:tc>
+                <a:tc>
+                  <a:txBody>
+                    <a:bodyPr/>
+                    <a:lstStyle/>
+                    <a:p>
+                      <a:r>
+                        <a:rPr lang="ru-RU" sz="1600" dirty="0"/>
+                        <a:t>Инжекция </a:t>
+                      </a:r>
+                      <a:r>
+                        <a:rPr lang="en-US" sz="1600" dirty="0" err="1"/>
+                        <a:t>mprotect</a:t>
+                      </a:r>
+                      <a:r>
+                        <a:rPr lang="en-US" sz="1600" dirty="0"/>
+                        <a:t>(PROT_READ|PROT_WRITE), </a:t>
+                      </a:r>
+                      <a:r>
+                        <a:rPr lang="ru-RU" sz="1600" dirty="0"/>
+                        <a:t>затем </a:t>
+                      </a:r>
+                      <a:r>
+                        <a:rPr lang="en-US" sz="1600" dirty="0" err="1"/>
+                        <a:t>ptrace</a:t>
+                      </a:r>
+                      <a:r>
+                        <a:rPr lang="en-US" sz="1600" dirty="0"/>
+                        <a:t>(SINGLESTEP), </a:t>
+                      </a:r>
+                      <a:r>
+                        <a:rPr lang="ru-RU" sz="1600" dirty="0"/>
+                        <a:t>затем повторная инжекция </a:t>
+                      </a:r>
+                      <a:r>
+                        <a:rPr lang="en-US" sz="1600" dirty="0" err="1"/>
+                        <a:t>mprotect</a:t>
+                      </a:r>
+                      <a:r>
+                        <a:rPr lang="en-US" sz="1600" dirty="0"/>
+                        <a:t>(PROT_READ)</a:t>
+                      </a:r>
+                      <a:endParaRPr lang="ru-RU" sz="1600" dirty="0"/>
+                    </a:p>
+                  </a:txBody>
+                  <a:tcPr/>
+                </a:tc>
+                <a:extLst>
+                  <a:ext uri="{0D108BD9-81ED-4DB2-BD59-A6C34878D82A}">
+                    <a16:rowId xmlns:a16="http://schemas.microsoft.com/office/drawing/2014/main" val="3125220593"/>
                   </a:ext>
                 </a:extLst>
               </a:tr>
@@ -6602,7 +6930,7 @@
         </p:nvSpPr>
         <p:spPr>
           <a:xfrm>
-            <a:off x="6578017" y="1052736"/>
+            <a:off x="5879976" y="768988"/>
             <a:ext cx="4896543" cy="504625"/>
           </a:xfrm>
           <a:prstGeom prst="rect">
@@ -8224,6 +8552,252 @@
           </a:graphicData>
         </a:graphic>
       </p:graphicFrame>
+      <p:sp>
+        <p:nvSpPr>
+          <p:cNvPr id="3" name="Номер слайда 3">
+            <a:extLst>
+              <a:ext uri="{FF2B5EF4-FFF2-40B4-BE49-F238E27FC236}">
+                <a16:creationId xmlns:a16="http://schemas.microsoft.com/office/drawing/2014/main" id="{AAF0725D-6DF4-5F4D-34E1-D76018B2A64D}"/>
+              </a:ext>
+            </a:extLst>
+          </p:cNvPr>
+          <p:cNvSpPr>
+            <a:spLocks noGrp="1"/>
+          </p:cNvSpPr>
+          <p:nvPr>
+            <p:ph type="sldNum" sz="quarter" idx="10"/>
+          </p:nvPr>
+        </p:nvSpPr>
+        <p:spPr bwMode="auto">
+          <a:xfrm>
+            <a:off x="10974388" y="6092825"/>
+            <a:ext cx="522287" cy="522288"/>
+          </a:xfrm>
+          <a:noFill/>
+          <a:extLst>
+            <a:ext uri="{909E8E84-426E-40DD-AFC4-6F175D3DCCD1}">
+              <a14:hiddenFill xmlns:a14="http://schemas.microsoft.com/office/drawing/2010/main">
+                <a:solidFill>
+                  <a:srgbClr val="FFFFFF"/>
+                </a:solidFill>
+              </a14:hiddenFill>
+            </a:ext>
+            <a:ext uri="{91240B29-F687-4F45-9708-019B960494DF}">
+              <a14:hiddenLine xmlns:a14="http://schemas.microsoft.com/office/drawing/2010/main" w="9525">
+                <a:solidFill>
+                  <a:srgbClr val="000000"/>
+                </a:solidFill>
+                <a:miter lim="800000"/>
+                <a:headEnd/>
+                <a:tailEnd/>
+              </a14:hiddenLine>
+            </a:ext>
+          </a:extLst>
+        </p:spPr>
+        <p:txBody>
+          <a:bodyPr/>
+          <a:lstStyle>
+            <a:lvl1pPr>
+              <a:spcBef>
+                <a:spcPts val="600"/>
+              </a:spcBef>
+              <a:buClr>
+                <a:schemeClr val="accent1"/>
+              </a:buClr>
+              <a:buSzPct val="70000"/>
+              <a:buFont typeface="Wingdings" pitchFamily="2" charset="2"/>
+              <a:buChar char=""/>
+              <a:defRPr sz="2400">
+                <a:solidFill>
+                  <a:schemeClr val="tx1"/>
+                </a:solidFill>
+                <a:latin typeface="Times New Roman" panose="02020603050405020304" pitchFamily="18" charset="0"/>
+              </a:defRPr>
+            </a:lvl1pPr>
+            <a:lvl2pPr marL="742950" indent="-285750">
+              <a:spcBef>
+                <a:spcPct val="20000"/>
+              </a:spcBef>
+              <a:buClr>
+                <a:schemeClr val="accent1"/>
+              </a:buClr>
+              <a:buSzPct val="80000"/>
+              <a:buFont typeface="Wingdings 2" pitchFamily="2" charset="2"/>
+              <a:buChar char=""/>
+              <a:defRPr sz="2100">
+                <a:solidFill>
+                  <a:schemeClr val="tx1"/>
+                </a:solidFill>
+                <a:latin typeface="Times New Roman" panose="02020603050405020304" pitchFamily="18" charset="0"/>
+              </a:defRPr>
+            </a:lvl2pPr>
+            <a:lvl3pPr marL="1143000" indent="-228600">
+              <a:spcBef>
+                <a:spcPct val="20000"/>
+              </a:spcBef>
+              <a:buClr>
+                <a:srgbClr val="4471A6"/>
+              </a:buClr>
+              <a:buSzPct val="60000"/>
+              <a:buFont typeface="Wingdings" pitchFamily="2" charset="2"/>
+              <a:buChar char=""/>
+              <a:defRPr sz="2400">
+                <a:solidFill>
+                  <a:schemeClr val="tx1"/>
+                </a:solidFill>
+                <a:latin typeface="Times New Roman" panose="02020603050405020304" pitchFamily="18" charset="0"/>
+              </a:defRPr>
+            </a:lvl3pPr>
+            <a:lvl4pPr marL="1600200" indent="-228600">
+              <a:spcBef>
+                <a:spcPct val="20000"/>
+              </a:spcBef>
+              <a:buClr>
+                <a:srgbClr val="B2C1DB"/>
+              </a:buClr>
+              <a:buSzPct val="60000"/>
+              <a:buFont typeface="Wingdings" pitchFamily="2" charset="2"/>
+              <a:buChar char=""/>
+              <a:defRPr sz="2000">
+                <a:solidFill>
+                  <a:schemeClr val="tx1"/>
+                </a:solidFill>
+                <a:latin typeface="Times New Roman" panose="02020603050405020304" pitchFamily="18" charset="0"/>
+              </a:defRPr>
+            </a:lvl4pPr>
+            <a:lvl5pPr marL="2057400" indent="-228600">
+              <a:spcBef>
+                <a:spcPct val="20000"/>
+              </a:spcBef>
+              <a:buClr>
+                <a:srgbClr val="DCB3B2"/>
+              </a:buClr>
+              <a:buSzPct val="68000"/>
+              <a:buFont typeface="Wingdings 2" pitchFamily="2" charset="2"/>
+              <a:buChar char=""/>
+              <a:defRPr sz="1600">
+                <a:solidFill>
+                  <a:schemeClr val="tx1"/>
+                </a:solidFill>
+                <a:latin typeface="Times New Roman" panose="02020603050405020304" pitchFamily="18" charset="0"/>
+              </a:defRPr>
+            </a:lvl5pPr>
+            <a:lvl6pPr marL="2514600" indent="-228600" eaLnBrk="0" fontAlgn="base" hangingPunct="0">
+              <a:spcBef>
+                <a:spcPct val="20000"/>
+              </a:spcBef>
+              <a:spcAft>
+                <a:spcPct val="0"/>
+              </a:spcAft>
+              <a:buClr>
+                <a:srgbClr val="DCB3B2"/>
+              </a:buClr>
+              <a:buSzPct val="68000"/>
+              <a:buFont typeface="Wingdings 2" pitchFamily="2" charset="2"/>
+              <a:buChar char=""/>
+              <a:defRPr sz="1600">
+                <a:solidFill>
+                  <a:schemeClr val="tx1"/>
+                </a:solidFill>
+                <a:latin typeface="Times New Roman" panose="02020603050405020304" pitchFamily="18" charset="0"/>
+              </a:defRPr>
+            </a:lvl6pPr>
+            <a:lvl7pPr marL="2971800" indent="-228600" eaLnBrk="0" fontAlgn="base" hangingPunct="0">
+              <a:spcBef>
+                <a:spcPct val="20000"/>
+              </a:spcBef>
+              <a:spcAft>
+                <a:spcPct val="0"/>
+              </a:spcAft>
+              <a:buClr>
+                <a:srgbClr val="DCB3B2"/>
+              </a:buClr>
+              <a:buSzPct val="68000"/>
+              <a:buFont typeface="Wingdings 2" pitchFamily="2" charset="2"/>
+              <a:buChar char=""/>
+              <a:defRPr sz="1600">
+                <a:solidFill>
+                  <a:schemeClr val="tx1"/>
+                </a:solidFill>
+                <a:latin typeface="Times New Roman" panose="02020603050405020304" pitchFamily="18" charset="0"/>
+              </a:defRPr>
+            </a:lvl7pPr>
+            <a:lvl8pPr marL="3429000" indent="-228600" eaLnBrk="0" fontAlgn="base" hangingPunct="0">
+              <a:spcBef>
+                <a:spcPct val="20000"/>
+              </a:spcBef>
+              <a:spcAft>
+                <a:spcPct val="0"/>
+              </a:spcAft>
+              <a:buClr>
+                <a:srgbClr val="DCB3B2"/>
+              </a:buClr>
+              <a:buSzPct val="68000"/>
+              <a:buFont typeface="Wingdings 2" pitchFamily="2" charset="2"/>
+              <a:buChar char=""/>
+              <a:defRPr sz="1600">
+                <a:solidFill>
+                  <a:schemeClr val="tx1"/>
+                </a:solidFill>
+                <a:latin typeface="Times New Roman" panose="02020603050405020304" pitchFamily="18" charset="0"/>
+              </a:defRPr>
+            </a:lvl8pPr>
+            <a:lvl9pPr marL="3886200" indent="-228600" eaLnBrk="0" fontAlgn="base" hangingPunct="0">
+              <a:spcBef>
+                <a:spcPct val="20000"/>
+              </a:spcBef>
+              <a:spcAft>
+                <a:spcPct val="0"/>
+              </a:spcAft>
+              <a:buClr>
+                <a:srgbClr val="DCB3B2"/>
+              </a:buClr>
+              <a:buSzPct val="68000"/>
+              <a:buFont typeface="Wingdings 2" pitchFamily="2" charset="2"/>
+              <a:buChar char=""/>
+              <a:defRPr sz="1600">
+                <a:solidFill>
+                  <a:schemeClr val="tx1"/>
+                </a:solidFill>
+                <a:latin typeface="Times New Roman" panose="02020603050405020304" pitchFamily="18" charset="0"/>
+              </a:defRPr>
+            </a:lvl9pPr>
+          </a:lstStyle>
+          <a:p>
+            <a:pPr>
+              <a:spcBef>
+                <a:spcPct val="0"/>
+              </a:spcBef>
+              <a:buClrTx/>
+              <a:buSzTx/>
+              <a:buFontTx/>
+              <a:buNone/>
+            </a:pPr>
+            <a:fld id="{BD0BA0DF-D6E9-5943-8648-144AA2B3FB25}" type="slidenum">
+              <a:rPr lang="en-US" altLang="ru-RU" sz="1400">
+                <a:solidFill>
+                  <a:srgbClr val="FFFFFF"/>
+                </a:solidFill>
+              </a:rPr>
+              <a:pPr>
+                <a:spcBef>
+                  <a:spcPct val="0"/>
+                </a:spcBef>
+                <a:buClrTx/>
+                <a:buSzTx/>
+                <a:buFontTx/>
+                <a:buNone/>
+              </a:pPr>
+              <a:t>13</a:t>
+            </a:fld>
+            <a:endParaRPr lang="en-US" altLang="ru-RU" sz="1400">
+              <a:solidFill>
+                <a:srgbClr val="FFFFFF"/>
+              </a:solidFill>
+            </a:endParaRPr>
+          </a:p>
+        </p:txBody>
+      </p:sp>
     </p:spTree>
     <p:extLst>
       <p:ext uri="{BB962C8B-B14F-4D97-AF65-F5344CB8AC3E}">
@@ -9616,8 +10190,8 @@
         </p:nvSpPr>
         <p:spPr>
           <a:xfrm>
-            <a:off x="4439816" y="5799857"/>
-            <a:ext cx="3096344" cy="307777"/>
+            <a:off x="1847528" y="5661248"/>
+            <a:ext cx="3600400" cy="307777"/>
           </a:xfrm>
           <a:prstGeom prst="rect">
             <a:avLst/>
@@ -9634,7 +10208,7 @@
               <a:rPr lang="ru-RU" sz="1400" dirty="0">
                 <a:latin typeface="+mn-lt"/>
               </a:rPr>
-              <a:t>Рисунок 5 – Схема инжекции </a:t>
+              <a:t>Рисунок 5 – Блок-схема инжекции </a:t>
             </a:r>
             <a:r>
               <a:rPr lang="en-US" sz="1400" dirty="0" err="1">
@@ -9676,7 +10250,7 @@
         </p:blipFill>
         <p:spPr>
           <a:xfrm>
-            <a:off x="5004330" y="1323534"/>
+            <a:off x="2639616" y="1259765"/>
             <a:ext cx="1679284" cy="4210932"/>
           </a:xfrm>
           <a:prstGeom prst="rect">
@@ -9684,6 +10258,413 @@
           </a:prstGeom>
         </p:spPr>
       </p:pic>
+      <p:sp>
+        <p:nvSpPr>
+          <p:cNvPr id="3" name="object 4">
+            <a:extLst>
+              <a:ext uri="{FF2B5EF4-FFF2-40B4-BE49-F238E27FC236}">
+                <a16:creationId xmlns:a16="http://schemas.microsoft.com/office/drawing/2014/main" id="{F19076AC-8A9B-AE12-79C2-ECA0ADC0E874}"/>
+              </a:ext>
+            </a:extLst>
+          </p:cNvPr>
+          <p:cNvSpPr txBox="1"/>
+          <p:nvPr/>
+        </p:nvSpPr>
+        <p:spPr>
+          <a:xfrm>
+            <a:off x="6092824" y="1084785"/>
+            <a:ext cx="4104456" cy="258404"/>
+          </a:xfrm>
+          <a:prstGeom prst="rect">
+            <a:avLst/>
+          </a:prstGeom>
+        </p:spPr>
+        <p:txBody>
+          <a:bodyPr vert="horz" wrap="square" lIns="0" tIns="12065" rIns="0" bIns="0" rtlCol="0">
+            <a:spAutoFit/>
+          </a:bodyPr>
+          <a:lstStyle/>
+          <a:p>
+            <a:pPr marL="12700">
+              <a:lnSpc>
+                <a:spcPct val="100000"/>
+              </a:lnSpc>
+              <a:spcBef>
+                <a:spcPts val="95"/>
+              </a:spcBef>
+            </a:pPr>
+            <a:r>
+              <a:rPr lang="ru-RU" sz="1600" spc="-10" dirty="0">
+                <a:latin typeface="Times New Roman"/>
+                <a:cs typeface="Times New Roman"/>
+              </a:rPr>
+              <a:t>Таблица</a:t>
+            </a:r>
+            <a:r>
+              <a:rPr sz="1600" spc="-15" dirty="0">
+                <a:latin typeface="Times New Roman"/>
+                <a:cs typeface="Times New Roman"/>
+              </a:rPr>
+              <a:t> </a:t>
+            </a:r>
+            <a:r>
+              <a:rPr lang="en-US" sz="1600" spc="-15" dirty="0">
+                <a:latin typeface="Times New Roman"/>
+                <a:cs typeface="Times New Roman"/>
+              </a:rPr>
+              <a:t>4</a:t>
+            </a:r>
+            <a:r>
+              <a:rPr sz="1600" spc="-40" dirty="0">
+                <a:latin typeface="Times New Roman"/>
+                <a:cs typeface="Times New Roman"/>
+              </a:rPr>
+              <a:t> </a:t>
+            </a:r>
+            <a:r>
+              <a:rPr sz="1600" dirty="0">
+                <a:latin typeface="Times New Roman"/>
+                <a:cs typeface="Times New Roman"/>
+              </a:rPr>
+              <a:t>–</a:t>
+            </a:r>
+            <a:r>
+              <a:rPr sz="1600" spc="-35" dirty="0">
+                <a:latin typeface="Times New Roman"/>
+                <a:cs typeface="Times New Roman"/>
+              </a:rPr>
+              <a:t> </a:t>
+            </a:r>
+            <a:r>
+              <a:rPr lang="ru-RU" sz="1600" spc="-35" dirty="0">
+                <a:latin typeface="Times New Roman"/>
+                <a:cs typeface="Times New Roman"/>
+              </a:rPr>
+              <a:t>Используемые механизмы </a:t>
+            </a:r>
+            <a:r>
+              <a:rPr lang="en-US" sz="1600" spc="-35" dirty="0">
+                <a:latin typeface="Times New Roman"/>
+                <a:cs typeface="Times New Roman"/>
+              </a:rPr>
+              <a:t>Linux</a:t>
+            </a:r>
+            <a:endParaRPr sz="1600" dirty="0">
+              <a:latin typeface="Times New Roman"/>
+              <a:cs typeface="Times New Roman"/>
+            </a:endParaRPr>
+          </a:p>
+        </p:txBody>
+      </p:sp>
+      <p:graphicFrame>
+        <p:nvGraphicFramePr>
+          <p:cNvPr id="7" name="Table 6">
+            <a:extLst>
+              <a:ext uri="{FF2B5EF4-FFF2-40B4-BE49-F238E27FC236}">
+                <a16:creationId xmlns:a16="http://schemas.microsoft.com/office/drawing/2014/main" id="{1FF2285C-4272-F6DC-9EF5-8121C6B02A2A}"/>
+              </a:ext>
+            </a:extLst>
+          </p:cNvPr>
+          <p:cNvGraphicFramePr>
+            <a:graphicFrameLocks noGrp="1"/>
+          </p:cNvGraphicFramePr>
+          <p:nvPr>
+            <p:extLst>
+              <p:ext uri="{D42A27DB-BD31-4B8C-83A1-F6EECF244321}">
+                <p14:modId xmlns:p14="http://schemas.microsoft.com/office/powerpoint/2010/main" val="1797881976"/>
+              </p:ext>
+            </p:extLst>
+          </p:nvPr>
+        </p:nvGraphicFramePr>
+        <p:xfrm>
+          <a:off x="5663952" y="1412776"/>
+          <a:ext cx="5184576" cy="4846320"/>
+        </p:xfrm>
+        <a:graphic>
+          <a:graphicData uri="http://schemas.openxmlformats.org/drawingml/2006/table">
+            <a:tbl>
+              <a:tblPr firstRow="1" bandRow="1">
+                <a:tableStyleId>{5C22544A-7EE6-4342-B048-85BDC9FD1C3A}</a:tableStyleId>
+              </a:tblPr>
+              <a:tblGrid>
+                <a:gridCol w="1026268">
+                  <a:extLst>
+                    <a:ext uri="{9D8B030D-6E8A-4147-A177-3AD203B41FA5}">
+                      <a16:colId xmlns:a16="http://schemas.microsoft.com/office/drawing/2014/main" val="2623173674"/>
+                    </a:ext>
+                  </a:extLst>
+                </a:gridCol>
+                <a:gridCol w="4158308">
+                  <a:extLst>
+                    <a:ext uri="{9D8B030D-6E8A-4147-A177-3AD203B41FA5}">
+                      <a16:colId xmlns:a16="http://schemas.microsoft.com/office/drawing/2014/main" val="903011946"/>
+                    </a:ext>
+                  </a:extLst>
+                </a:gridCol>
+              </a:tblGrid>
+              <a:tr h="590113">
+                <a:tc>
+                  <a:txBody>
+                    <a:bodyPr/>
+                    <a:lstStyle/>
+                    <a:p>
+                      <a:pPr marL="0" marR="0" lvl="0" indent="0" algn="l" defTabSz="914400" rtl="0" eaLnBrk="1" fontAlgn="auto" latinLnBrk="0" hangingPunct="1">
+                        <a:lnSpc>
+                          <a:spcPct val="100000"/>
+                        </a:lnSpc>
+                        <a:spcBef>
+                          <a:spcPts val="0"/>
+                        </a:spcBef>
+                        <a:spcAft>
+                          <a:spcPts val="0"/>
+                        </a:spcAft>
+                        <a:buClrTx/>
+                        <a:buSzTx/>
+                        <a:buFontTx/>
+                        <a:buNone/>
+                        <a:tabLst/>
+                        <a:defRPr/>
+                      </a:pPr>
+                      <a:r>
+                        <a:rPr lang="ru-RU" dirty="0"/>
+                        <a:t>Номер блока</a:t>
+                      </a:r>
+                    </a:p>
+                  </a:txBody>
+                  <a:tcPr/>
+                </a:tc>
+                <a:tc>
+                  <a:txBody>
+                    <a:bodyPr/>
+                    <a:lstStyle/>
+                    <a:p>
+                      <a:pPr marL="0" marR="0" lvl="0" indent="0" algn="l" defTabSz="914400" rtl="0" eaLnBrk="1" fontAlgn="auto" latinLnBrk="0" hangingPunct="1">
+                        <a:lnSpc>
+                          <a:spcPct val="100000"/>
+                        </a:lnSpc>
+                        <a:spcBef>
+                          <a:spcPts val="0"/>
+                        </a:spcBef>
+                        <a:spcAft>
+                          <a:spcPts val="0"/>
+                        </a:spcAft>
+                        <a:buClrTx/>
+                        <a:buSzTx/>
+                        <a:buFontTx/>
+                        <a:buNone/>
+                        <a:tabLst/>
+                        <a:defRPr/>
+                      </a:pPr>
+                      <a:r>
+                        <a:rPr lang="ru-RU" dirty="0"/>
+                        <a:t>Используемые механизмы </a:t>
+                      </a:r>
+                      <a:r>
+                        <a:rPr lang="en-US" dirty="0"/>
+                        <a:t>Linux</a:t>
+                      </a:r>
+                      <a:endParaRPr lang="ru-RU" dirty="0"/>
+                    </a:p>
+                  </a:txBody>
+                  <a:tcPr/>
+                </a:tc>
+                <a:extLst>
+                  <a:ext uri="{0D108BD9-81ED-4DB2-BD59-A6C34878D82A}">
+                    <a16:rowId xmlns:a16="http://schemas.microsoft.com/office/drawing/2014/main" val="2462198841"/>
+                  </a:ext>
+                </a:extLst>
+              </a:tr>
+              <a:tr h="590113">
+                <a:tc>
+                  <a:txBody>
+                    <a:bodyPr/>
+                    <a:lstStyle/>
+                    <a:p>
+                      <a:r>
+                        <a:rPr lang="ru-RU" dirty="0"/>
+                        <a:t>1</a:t>
+                      </a:r>
+                    </a:p>
+                  </a:txBody>
+                  <a:tcPr/>
+                </a:tc>
+                <a:tc>
+                  <a:txBody>
+                    <a:bodyPr/>
+                    <a:lstStyle/>
+                    <a:p>
+                      <a:r>
+                        <a:rPr lang="en-US" dirty="0" err="1"/>
+                        <a:t>ptrace</a:t>
+                      </a:r>
+                      <a:r>
+                        <a:rPr lang="en-US" dirty="0"/>
+                        <a:t>(PTRACE_GETREGS)</a:t>
+                      </a:r>
+                      <a:r>
+                        <a:rPr lang="ru-RU" dirty="0"/>
+                        <a:t> и сохранение состояния</a:t>
+                      </a:r>
+                    </a:p>
+                  </a:txBody>
+                  <a:tcPr/>
+                </a:tc>
+                <a:extLst>
+                  <a:ext uri="{0D108BD9-81ED-4DB2-BD59-A6C34878D82A}">
+                    <a16:rowId xmlns:a16="http://schemas.microsoft.com/office/drawing/2014/main" val="1642538562"/>
+                  </a:ext>
+                </a:extLst>
+              </a:tr>
+              <a:tr h="590113">
+                <a:tc>
+                  <a:txBody>
+                    <a:bodyPr/>
+                    <a:lstStyle/>
+                    <a:p>
+                      <a:r>
+                        <a:rPr lang="ru-RU" dirty="0"/>
+                        <a:t>2</a:t>
+                      </a:r>
+                    </a:p>
+                  </a:txBody>
+                  <a:tcPr/>
+                </a:tc>
+                <a:tc>
+                  <a:txBody>
+                    <a:bodyPr/>
+                    <a:lstStyle/>
+                    <a:p>
+                      <a:r>
+                        <a:rPr lang="en-US" dirty="0" err="1"/>
+                        <a:t>ptrace</a:t>
+                      </a:r>
+                      <a:r>
+                        <a:rPr lang="en-US" dirty="0"/>
+                        <a:t>(PTRACE_SETREGS)</a:t>
+                      </a:r>
+                      <a:r>
+                        <a:rPr lang="ru-RU" dirty="0"/>
+                        <a:t> запись измененного состояния:</a:t>
+                      </a:r>
+                    </a:p>
+                    <a:p>
+                      <a:r>
+                        <a:rPr lang="ru-RU" dirty="0"/>
+                        <a:t>rip направляется на найденную инструкцию syscall (0f 05), </a:t>
+                      </a:r>
+                    </a:p>
+                    <a:p>
+                      <a:r>
+                        <a:rPr lang="ru-RU" dirty="0"/>
+                        <a:t>rax = __NR_mprotect, </a:t>
+                      </a:r>
+                    </a:p>
+                    <a:p>
+                      <a:r>
+                        <a:rPr lang="ru-RU" dirty="0"/>
+                        <a:t>rdi/rsi/rdx = адрес, длина, права</a:t>
+                      </a:r>
+                    </a:p>
+                  </a:txBody>
+                  <a:tcPr/>
+                </a:tc>
+                <a:extLst>
+                  <a:ext uri="{0D108BD9-81ED-4DB2-BD59-A6C34878D82A}">
+                    <a16:rowId xmlns:a16="http://schemas.microsoft.com/office/drawing/2014/main" val="1900437325"/>
+                  </a:ext>
+                </a:extLst>
+              </a:tr>
+              <a:tr h="590113">
+                <a:tc>
+                  <a:txBody>
+                    <a:bodyPr/>
+                    <a:lstStyle/>
+                    <a:p>
+                      <a:r>
+                        <a:rPr lang="ru-RU" dirty="0"/>
+                        <a:t>3</a:t>
+                      </a:r>
+                    </a:p>
+                  </a:txBody>
+                  <a:tcPr/>
+                </a:tc>
+                <a:tc>
+                  <a:txBody>
+                    <a:bodyPr/>
+                    <a:lstStyle/>
+                    <a:p>
+                      <a:r>
+                        <a:rPr lang="en-US" dirty="0" err="1"/>
+                        <a:t>ptrace</a:t>
+                      </a:r>
+                      <a:r>
+                        <a:rPr lang="en-US" dirty="0"/>
+                        <a:t>(PTRACE_SINGLESTEP) + </a:t>
+                      </a:r>
+                      <a:r>
+                        <a:rPr lang="en-US" dirty="0" err="1"/>
+                        <a:t>waitpid</a:t>
+                      </a:r>
+                      <a:r>
+                        <a:rPr lang="en-US" dirty="0"/>
+                        <a:t>(); </a:t>
+                      </a:r>
+                      <a:r>
+                        <a:rPr lang="ru-RU" dirty="0"/>
+                        <a:t>исполняется системный вызов </a:t>
+                      </a:r>
+                      <a:r>
+                        <a:rPr lang="en-US" dirty="0" err="1"/>
+                        <a:t>mprotect</a:t>
+                      </a:r>
+                      <a:endParaRPr lang="ru-RU" dirty="0"/>
+                    </a:p>
+                  </a:txBody>
+                  <a:tcPr/>
+                </a:tc>
+                <a:extLst>
+                  <a:ext uri="{0D108BD9-81ED-4DB2-BD59-A6C34878D82A}">
+                    <a16:rowId xmlns:a16="http://schemas.microsoft.com/office/drawing/2014/main" val="2691234894"/>
+                  </a:ext>
+                </a:extLst>
+              </a:tr>
+              <a:tr h="590113">
+                <a:tc>
+                  <a:txBody>
+                    <a:bodyPr/>
+                    <a:lstStyle/>
+                    <a:p>
+                      <a:r>
+                        <a:rPr lang="ru-RU" dirty="0"/>
+                        <a:t>4</a:t>
+                      </a:r>
+                    </a:p>
+                  </a:txBody>
+                  <a:tcPr/>
+                </a:tc>
+                <a:tc>
+                  <a:txBody>
+                    <a:bodyPr/>
+                    <a:lstStyle/>
+                    <a:p>
+                      <a:r>
+                        <a:rPr lang="ru-RU" dirty="0"/>
+                        <a:t>ptrace(PTRACE_SETREGS) — восстановление сохранённого состояния регистров</a:t>
+                      </a:r>
+                    </a:p>
+                  </a:txBody>
+                  <a:tcPr/>
+                </a:tc>
+                <a:extLst>
+                  <a:ext uri="{0D108BD9-81ED-4DB2-BD59-A6C34878D82A}">
+                    <a16:rowId xmlns:a16="http://schemas.microsoft.com/office/drawing/2014/main" val="1564303323"/>
+                  </a:ext>
+                </a:extLst>
+              </a:tr>
+            </a:tbl>
+          </a:graphicData>
+        </a:graphic>
+      </p:graphicFrame>
     </p:spTree>
     <p:extLst>
       <p:ext uri="{BB962C8B-B14F-4D97-AF65-F5344CB8AC3E}">
@@ -10241,7 +11222,7 @@
                 <a:latin typeface="Times New Roman"/>
                 <a:cs typeface="Times New Roman"/>
               </a:rPr>
-              <a:t>4</a:t>
+              <a:t>5</a:t>
             </a:r>
             <a:r>
               <a:rPr sz="1600" spc="-40" dirty="0">
@@ -16224,7 +17205,7 @@
           <p:nvPr>
             <p:extLst>
               <p:ext uri="{D42A27DB-BD31-4B8C-83A1-F6EECF244321}">
-                <p14:modId xmlns:p14="http://schemas.microsoft.com/office/powerpoint/2010/main" val="260372187"/>
+                <p14:modId xmlns:p14="http://schemas.microsoft.com/office/powerpoint/2010/main" val="1204227540"/>
               </p:ext>
             </p:extLst>
           </p:nvPr>
@@ -17110,7 +18091,7 @@
                   </a:ext>
                 </a:extLst>
               </a:tr>
-              <a:tr h="1066800">
+              <a:tr h="1108641">
                 <a:tc>
                   <a:txBody>
                     <a:bodyPr/>
@@ -17244,7 +18225,7 @@
                       </a:pPr>
                       <a:r>
                         <a:rPr lang="ru-RU" sz="1600" dirty="0"/>
-                        <a:t>GWP-ASan: обнаружение ошибок памяти в продакшене через охранные страницы и перехват сигнала.</a:t>
+                        <a:t>GWP-ASan: обнаружение ошибок памяти через охранные страницы и перехват сигнала.</a:t>
                       </a:r>
                       <a:endParaRPr sz="1600" dirty="0">
                         <a:latin typeface="Times New Roman"/>
@@ -18053,59 +19034,17 @@
                         <a:t> </a:t>
                       </a:r>
                       <a:r>
+                        <a:rPr lang="ru-RU" sz="1600" dirty="0"/>
+                        <a:t>ориентирован на запись и анонимную память</a:t>
+                      </a:r>
+                      <a:r>
                         <a:rPr sz="1600" spc="-10" dirty="0">
                           <a:latin typeface="Times New Roman"/>
                           <a:cs typeface="Times New Roman"/>
                         </a:rPr>
-                        <a:t>сложность</a:t>
-                      </a:r>
-                      <a:endParaRPr sz="1600">
-                        <a:latin typeface="Times New Roman"/>
-                        <a:cs typeface="Times New Roman"/>
-                      </a:endParaRPr>
-                    </a:p>
-                    <a:p>
-                      <a:pPr marL="92075">
-                        <a:lnSpc>
-                          <a:spcPct val="100000"/>
-                        </a:lnSpc>
-                      </a:pPr>
-                      <a:r>
-                        <a:rPr sz="1600" dirty="0">
-                          <a:latin typeface="Times New Roman"/>
-                          <a:cs typeface="Times New Roman"/>
-                        </a:rPr>
-                        <a:t>реализации</a:t>
-                      </a:r>
-                      <a:r>
-                        <a:rPr sz="1600" spc="-55" dirty="0">
-                          <a:latin typeface="Times New Roman"/>
-                          <a:cs typeface="Times New Roman"/>
-                        </a:rPr>
-                        <a:t> </a:t>
-                      </a:r>
-                      <a:r>
-                        <a:rPr sz="1600" spc="-10" dirty="0">
-                          <a:latin typeface="Times New Roman"/>
-                          <a:cs typeface="Times New Roman"/>
-                        </a:rPr>
-                        <a:t>контекстной</a:t>
-                      </a:r>
-                      <a:r>
-                        <a:rPr sz="1600" spc="-65" dirty="0">
-                          <a:latin typeface="Times New Roman"/>
-                          <a:cs typeface="Times New Roman"/>
-                        </a:rPr>
-                        <a:t> </a:t>
-                      </a:r>
-                      <a:r>
-                        <a:rPr sz="1600" spc="-10" dirty="0">
-                          <a:latin typeface="Times New Roman"/>
-                          <a:cs typeface="Times New Roman"/>
-                        </a:rPr>
-                        <a:t>фильтрации.</a:t>
-                      </a:r>
-                      <a:endParaRPr sz="1600">
+                        <a:t>.</a:t>
+                      </a:r>
+                      <a:endParaRPr sz="1600" dirty="0">
                         <a:latin typeface="Times New Roman"/>
                         <a:cs typeface="Times New Roman"/>
                       </a:endParaRPr>
@@ -20005,7 +20944,7 @@
               <a:t> </a:t>
             </a:r>
             <a:r>
-              <a:rPr sz="2600" dirty="0">
+              <a:rPr sz="2600" dirty="0" err="1">
                 <a:latin typeface="Times New Roman"/>
                 <a:cs typeface="Times New Roman"/>
               </a:rPr>
@@ -20019,11 +20958,18 @@
               <a:t> </a:t>
             </a:r>
             <a:r>
-              <a:rPr sz="2600" spc="-10" dirty="0">
-                <a:latin typeface="Times New Roman"/>
-                <a:cs typeface="Times New Roman"/>
-              </a:rPr>
-              <a:t>прототипа;</a:t>
+              <a:rPr sz="2600" spc="-10" dirty="0" err="1">
+                <a:latin typeface="Times New Roman"/>
+                <a:cs typeface="Times New Roman"/>
+              </a:rPr>
+              <a:t>прототипа</a:t>
+            </a:r>
+            <a:r>
+              <a:rPr lang="en-US" sz="2600" spc="-10" dirty="0">
+                <a:latin typeface="Times New Roman"/>
+                <a:cs typeface="Times New Roman"/>
+              </a:rPr>
+              <a:t>.</a:t>
             </a:r>
             <a:endParaRPr sz="2600" dirty="0">
               <a:latin typeface="Times New Roman"/>
@@ -20981,11 +21927,18 @@
               <a:t> </a:t>
             </a:r>
             <a:r>
-              <a:rPr sz="2400" spc="-10" dirty="0">
+              <a:rPr sz="2400" spc="-10" dirty="0" err="1">
                 <a:latin typeface="Times New Roman"/>
                 <a:cs typeface="Times New Roman"/>
               </a:rPr>
               <a:t>адресу</a:t>
+            </a:r>
+            <a:r>
+              <a:rPr lang="en-US" sz="2400" spc="-10" dirty="0">
+                <a:latin typeface="Times New Roman"/>
+                <a:cs typeface="Times New Roman"/>
+              </a:rPr>
+              <a:t>.</a:t>
             </a:r>
             <a:endParaRPr sz="2400" dirty="0">
               <a:latin typeface="Times New Roman"/>
